--- a/system-design-101/vi/lessons/sd-14-022/slides/sd-14-022.pptx
+++ b/system-design-101/vi/lessons/sd-14-022/slides/sd-14-022.pptx
@@ -3307,14 +3307,36 @@
       </p:sp>
       <p:sp>
         <p:nvSpPr>
-          <p:cNvPr id="3" name="Text 1"/>
-          <p:cNvSpPr/>
-          <p:nvPr/>
-        </p:nvSpPr>
-        <p:spPr>
-          <a:xfrm>
-            <a:off x="914400" y="1333500"/>
-            <a:ext cx="11430000" cy="1143000"/>
+          <p:cNvPr id="3" name="Shape 1"/>
+          <p:cNvSpPr/>
+          <p:nvPr/>
+        </p:nvSpPr>
+        <p:spPr>
+          <a:xfrm>
+            <a:off x="914400" y="1485900"/>
+            <a:ext cx="4000500" cy="1943100"/>
+          </a:xfrm>
+          <a:prstGeom prst="roundRect">
+            <a:avLst>
+              <a:gd name="adj" fmla="val 10784"/>
+            </a:avLst>
+          </a:prstGeom>
+          <a:solidFill>
+            <a:srgbClr val="1E212B"/>
+          </a:solidFill>
+          <a:ln/>
+        </p:spPr>
+      </p:sp>
+      <p:sp>
+        <p:nvSpPr>
+          <p:cNvPr id="4" name="Text 2"/>
+          <p:cNvSpPr/>
+          <p:nvPr/>
+        </p:nvSpPr>
+        <p:spPr>
+          <a:xfrm>
+            <a:off x="1143000" y="1695450"/>
+            <a:ext cx="3543300" cy="419100"/>
           </a:xfrm>
           <a:prstGeom prst="rect">
             <a:avLst/>
@@ -3323,17 +3345,14 @@
           <a:ln/>
         </p:spPr>
         <p:txBody>
-          <a:bodyPr wrap="square" lIns="0" tIns="61341" rIns="0" bIns="-61341" rtlCol="0" anchor="t"/>
+          <a:bodyPr wrap="square" lIns="0" tIns="0" rIns="0" bIns="0" rtlCol="0" anchor="t"/>
           <a:lstStyle/>
           <a:p>
             <a:pPr algn="l" indent="0" marL="0">
-              <a:lnSpc>
-                <a:spcPts val="7176"/>
-              </a:lnSpc>
               <a:buNone/>
             </a:pPr>
             <a:r>
-              <a:rPr lang="en-US" sz="6900" dirty="0" spc="-59" kern="0">
+              <a:rPr lang="en-US" sz="2400" dirty="0" spc="-3" kern="0">
                 <a:solidFill>
                   <a:srgbClr val="F3EEE3"/>
                 </a:solidFill>
@@ -3341,116 +3360,22 @@
                 <a:ea typeface="Bricolage Grotesque ExtraBold" pitchFamily="34" charset="-122"/>
                 <a:cs typeface="Bricolage Grotesque ExtraBold" pitchFamily="34" charset="-120"/>
               </a:rPr>
-              <a:t>Từ</a:t>
-            </a:r>
-            <a:r>
-              <a:rPr lang="en-US" sz="6900" dirty="0" spc="-8" kern="0">
-                <a:solidFill>
-                  <a:srgbClr val="F3EEE3"/>
-                </a:solidFill>
-                <a:latin typeface="Bricolage Grotesque ExtraBold" pitchFamily="34" charset="0"/>
-                <a:ea typeface="Bricolage Grotesque ExtraBold" pitchFamily="34" charset="-122"/>
-                <a:cs typeface="Bricolage Grotesque ExtraBold" pitchFamily="34" charset="-120"/>
-              </a:rPr>
-              <a:t> khóa</a:t>
-            </a:r>
-            <a:r>
-              <a:rPr lang="en-US" sz="6900" dirty="0" spc="-13" kern="0">
-                <a:solidFill>
-                  <a:srgbClr val="F3EEE3"/>
-                </a:solidFill>
-                <a:latin typeface="Bricolage Grotesque ExtraBold" pitchFamily="34" charset="0"/>
-                <a:ea typeface="Bricolage Grotesque ExtraBold" pitchFamily="34" charset="-122"/>
-                <a:cs typeface="Bricolage Grotesque ExtraBold" pitchFamily="34" charset="-120"/>
-              </a:rPr>
-              <a:t> trong</a:t>
-            </a:r>
-            <a:r>
-              <a:rPr lang="en-US" sz="6900" dirty="0" spc="-4" kern="0">
-                <a:solidFill>
-                  <a:srgbClr val="F3EEE3"/>
-                </a:solidFill>
-                <a:latin typeface="Bricolage Grotesque ExtraBold" pitchFamily="34" charset="0"/>
-                <a:ea typeface="Bricolage Grotesque ExtraBold" pitchFamily="34" charset="-122"/>
-                <a:cs typeface="Bricolage Grotesque ExtraBold" pitchFamily="34" charset="-120"/>
-              </a:rPr>
-              <a:t> bài</a:t>
-            </a:r>
-            <a:endParaRPr lang="en-US" sz="6900" dirty="0"/>
+              <a:t>CIA</a:t>
+            </a:r>
+            <a:endParaRPr lang="en-US" sz="2400" dirty="0"/>
           </a:p>
         </p:txBody>
       </p:sp>
       <p:sp>
         <p:nvSpPr>
-          <p:cNvPr id="4" name="Shape 2"/>
-          <p:cNvSpPr/>
-          <p:nvPr/>
-        </p:nvSpPr>
-        <p:spPr>
-          <a:xfrm>
-            <a:off x="914400" y="2533650"/>
-            <a:ext cx="3886200" cy="2438400"/>
-          </a:xfrm>
-          <a:prstGeom prst="roundRect">
-            <a:avLst>
-              <a:gd name="adj" fmla="val 9375"/>
-            </a:avLst>
-          </a:prstGeom>
-          <a:solidFill>
-            <a:srgbClr val="1E212B"/>
-          </a:solidFill>
-          <a:ln/>
-        </p:spPr>
-      </p:sp>
-      <p:sp>
-        <p:nvSpPr>
           <p:cNvPr id="5" name="Text 3"/>
           <p:cNvSpPr/>
           <p:nvPr/>
         </p:nvSpPr>
         <p:spPr>
           <a:xfrm>
-            <a:off x="1181100" y="2724150"/>
-            <a:ext cx="3352800" cy="552450"/>
-          </a:xfrm>
-          <a:prstGeom prst="rect">
-            <a:avLst/>
-          </a:prstGeom>
-          <a:noFill/>
-          <a:ln/>
-        </p:spPr>
-        <p:txBody>
-          <a:bodyPr wrap="square" lIns="0" tIns="0" rIns="0" bIns="0" rtlCol="0" anchor="t"/>
-          <a:lstStyle/>
-          <a:p>
-            <a:pPr algn="l" indent="0" marL="0">
-              <a:buNone/>
-            </a:pPr>
-            <a:r>
-              <a:rPr lang="en-US" sz="3300" dirty="0" spc="-1" kern="0">
-                <a:solidFill>
-                  <a:srgbClr val="F3EEE3"/>
-                </a:solidFill>
-                <a:latin typeface="Bricolage Grotesque ExtraBold" pitchFamily="34" charset="0"/>
-                <a:ea typeface="Bricolage Grotesque ExtraBold" pitchFamily="34" charset="-122"/>
-                <a:cs typeface="Bricolage Grotesque ExtraBold" pitchFamily="34" charset="-120"/>
-              </a:rPr>
-              <a:t>CIA</a:t>
-            </a:r>
-            <a:endParaRPr lang="en-US" sz="3300" dirty="0"/>
-          </a:p>
-        </p:txBody>
-      </p:sp>
-      <p:sp>
-        <p:nvSpPr>
-          <p:cNvPr id="6" name="Text 4"/>
-          <p:cNvSpPr/>
-          <p:nvPr/>
-        </p:nvSpPr>
-        <p:spPr>
-          <a:xfrm>
-            <a:off x="1181100" y="3333750"/>
-            <a:ext cx="3352800" cy="590550"/>
+            <a:off x="1143000" y="2171700"/>
+            <a:ext cx="3543300" cy="571500"/>
           </a:xfrm>
           <a:prstGeom prst="rect">
             <a:avLst/>
@@ -3507,14 +3432,14 @@
       </p:sp>
       <p:sp>
         <p:nvSpPr>
-          <p:cNvPr id="7" name="Text 5"/>
-          <p:cNvSpPr/>
-          <p:nvPr/>
-        </p:nvSpPr>
-        <p:spPr>
-          <a:xfrm>
-            <a:off x="1181100" y="3981450"/>
-            <a:ext cx="3352800" cy="914400"/>
+          <p:cNvPr id="6" name="Text 4"/>
+          <p:cNvSpPr/>
+          <p:nvPr/>
+        </p:nvSpPr>
+        <p:spPr>
+          <a:xfrm>
+            <a:off x="1143000" y="2876550"/>
+            <a:ext cx="3543300" cy="342900"/>
           </a:xfrm>
           <a:prstGeom prst="rect">
             <a:avLst/>
@@ -3523,17 +3448,17 @@
           <a:ln/>
         </p:spPr>
         <p:txBody>
-          <a:bodyPr wrap="square" lIns="0" tIns="9716" rIns="0" bIns="-9716" rtlCol="0" anchor="t"/>
+          <a:bodyPr wrap="square" lIns="0" tIns="8906" rIns="0" bIns="-8906" rtlCol="0" anchor="t"/>
           <a:lstStyle/>
           <a:p>
             <a:pPr algn="l" indent="0" marL="0">
               <a:lnSpc>
-                <a:spcPts val="2340"/>
+                <a:spcPts val="2145"/>
               </a:lnSpc>
               <a:buNone/>
             </a:pPr>
             <a:r>
-              <a:rPr lang="en-US" sz="1800" dirty="0" spc="-2" kern="0">
+              <a:rPr lang="en-US" sz="1650" dirty="0" spc="3" kern="0">
                 <a:solidFill>
                   <a:srgbClr val="D8D3C4"/>
                 </a:solidFill>
@@ -3544,7 +3469,7 @@
               <a:t>bí</a:t>
             </a:r>
             <a:r>
-              <a:rPr lang="en-US" sz="1800" dirty="0" spc="-10" kern="0">
+              <a:rPr lang="en-US" sz="1650" dirty="0" spc="-4" kern="0">
                 <a:solidFill>
                   <a:srgbClr val="D8D3C4"/>
                 </a:solidFill>
@@ -3555,7 +3480,7 @@
               <a:t> mật,</a:t>
             </a:r>
             <a:r>
-              <a:rPr lang="en-US" sz="1800" dirty="0" spc="-9" kern="0">
+              <a:rPr lang="en-US" sz="1650" dirty="0" spc="-7" kern="0">
                 <a:solidFill>
                   <a:srgbClr val="D8D3C4"/>
                 </a:solidFill>
@@ -3566,7 +3491,7 @@
               <a:t> toàn</a:t>
             </a:r>
             <a:r>
-              <a:rPr lang="en-US" sz="1800" dirty="0" spc="-10" kern="0">
+              <a:rPr lang="en-US" sz="1650" dirty="0" spc="-6" kern="0">
                 <a:solidFill>
                   <a:srgbClr val="D8D3C4"/>
                 </a:solidFill>
@@ -3577,7 +3502,7 @@
               <a:t> vẹn,</a:t>
             </a:r>
             <a:r>
-              <a:rPr lang="en-US" sz="1800" dirty="0" spc="-6" kern="0">
+              <a:rPr lang="en-US" sz="1650" dirty="0" spc="-3" kern="0">
                 <a:solidFill>
                   <a:srgbClr val="D8D3C4"/>
                 </a:solidFill>
@@ -3585,37 +3510,26 @@
                 <a:ea typeface="Be Vietnam Pro" pitchFamily="34" charset="-122"/>
                 <a:cs typeface="Be Vietnam Pro" pitchFamily="34" charset="-120"/>
               </a:rPr>
-              <a:t> sẵn</a:t>
-            </a:r>
-            <a:r>
-              <a:rPr lang="en-US" sz="1800" dirty="0" spc="-5" kern="0">
-                <a:solidFill>
-                  <a:srgbClr val="D8D3C4"/>
-                </a:solidFill>
-                <a:latin typeface="Be Vietnam Pro" pitchFamily="34" charset="0"/>
-                <a:ea typeface="Be Vietnam Pro" pitchFamily="34" charset="-122"/>
-                <a:cs typeface="Be Vietnam Pro" pitchFamily="34" charset="-120"/>
-              </a:rPr>
-              <a:t> sàng</a:t>
-            </a:r>
-            <a:endParaRPr lang="en-US" sz="1800" dirty="0"/>
+              <a:t> sẵn sàng</a:t>
+            </a:r>
+            <a:endParaRPr lang="en-US" sz="1650" dirty="0"/>
           </a:p>
         </p:txBody>
       </p:sp>
       <p:sp>
         <p:nvSpPr>
-          <p:cNvPr id="8" name="Shape 6"/>
-          <p:cNvSpPr/>
-          <p:nvPr/>
-        </p:nvSpPr>
-        <p:spPr>
-          <a:xfrm>
-            <a:off x="5105400" y="2533650"/>
-            <a:ext cx="3886200" cy="2438400"/>
+          <p:cNvPr id="7" name="Shape 5"/>
+          <p:cNvSpPr/>
+          <p:nvPr/>
+        </p:nvSpPr>
+        <p:spPr>
+          <a:xfrm>
+            <a:off x="5067300" y="1485900"/>
+            <a:ext cx="4000500" cy="1943100"/>
           </a:xfrm>
           <a:prstGeom prst="roundRect">
             <a:avLst>
-              <a:gd name="adj" fmla="val 9375"/>
+              <a:gd name="adj" fmla="val 10784"/>
             </a:avLst>
           </a:prstGeom>
           <a:solidFill>
@@ -3626,14 +3540,14 @@
       </p:sp>
       <p:sp>
         <p:nvSpPr>
-          <p:cNvPr id="9" name="Text 7"/>
-          <p:cNvSpPr/>
-          <p:nvPr/>
-        </p:nvSpPr>
-        <p:spPr>
-          <a:xfrm>
-            <a:off x="5372100" y="2724150"/>
-            <a:ext cx="3352800" cy="552450"/>
+          <p:cNvPr id="8" name="Text 6"/>
+          <p:cNvSpPr/>
+          <p:nvPr/>
+        </p:nvSpPr>
+        <p:spPr>
+          <a:xfrm>
+            <a:off x="5295900" y="1695450"/>
+            <a:ext cx="3543300" cy="419100"/>
           </a:xfrm>
           <a:prstGeom prst="rect">
             <a:avLst/>
@@ -3649,7 +3563,7 @@
               <a:buNone/>
             </a:pPr>
             <a:r>
-              <a:rPr lang="en-US" sz="3300" dirty="0" spc="-33" kern="0">
+              <a:rPr lang="en-US" sz="2400" dirty="0" spc="4" kern="0">
                 <a:solidFill>
                   <a:srgbClr val="FFB454"/>
                 </a:solidFill>
@@ -3657,22 +3571,22 @@
                 <a:ea typeface="Bricolage Grotesque ExtraBold" pitchFamily="34" charset="-122"/>
                 <a:cs typeface="Bricolage Grotesque ExtraBold" pitchFamily="34" charset="-120"/>
               </a:rPr>
-              <a:t>HMAC</a:t>
-            </a:r>
-            <a:endParaRPr lang="en-US" sz="3300" dirty="0"/>
+              <a:t>USD</a:t>
+            </a:r>
+            <a:endParaRPr lang="en-US" sz="2400" dirty="0"/>
           </a:p>
         </p:txBody>
       </p:sp>
       <p:sp>
         <p:nvSpPr>
-          <p:cNvPr id="10" name="Text 8"/>
-          <p:cNvSpPr/>
-          <p:nvPr/>
-        </p:nvSpPr>
-        <p:spPr>
-          <a:xfrm>
-            <a:off x="5372100" y="3333750"/>
-            <a:ext cx="3352800" cy="590550"/>
+          <p:cNvPr id="9" name="Text 7"/>
+          <p:cNvSpPr/>
+          <p:nvPr/>
+        </p:nvSpPr>
+        <p:spPr>
+          <a:xfrm>
+            <a:off x="5295900" y="2171700"/>
+            <a:ext cx="3543300" cy="571500"/>
           </a:xfrm>
           <a:prstGeom prst="rect">
             <a:avLst/>
@@ -3691,7 +3605,7 @@
               <a:buNone/>
             </a:pPr>
             <a:r>
-              <a:rPr lang="en-US" sz="1650" dirty="0" spc="-4" kern="0">
+              <a:rPr lang="en-US" sz="1650" dirty="0" spc="-7" kern="0">
                 <a:solidFill>
                   <a:srgbClr val="9A98A0"/>
                 </a:solidFill>
@@ -3699,10 +3613,10 @@
                 <a:ea typeface="Be Vietnam Pro" pitchFamily="34" charset="-122"/>
                 <a:cs typeface="Be Vietnam Pro" pitchFamily="34" charset="-120"/>
               </a:rPr>
-              <a:t>Hash-based</a:t>
-            </a:r>
-            <a:r>
-              <a:rPr lang="en-US" sz="1650" dirty="0" spc="-6" kern="0">
+              <a:t>United</a:t>
+            </a:r>
+            <a:r>
+              <a:rPr lang="en-US" sz="1650" dirty="0" spc="-13" kern="0">
                 <a:solidFill>
                   <a:srgbClr val="9A98A0"/>
                 </a:solidFill>
@@ -3710,10 +3624,10 @@
                 <a:ea typeface="Be Vietnam Pro" pitchFamily="34" charset="-122"/>
                 <a:cs typeface="Be Vietnam Pro" pitchFamily="34" charset="-120"/>
               </a:rPr>
-              <a:t> Message</a:t>
-            </a:r>
-            <a:r>
-              <a:rPr lang="en-US" sz="1650" dirty="0" spc="-7" kern="0">
+              <a:t> States</a:t>
+            </a:r>
+            <a:r>
+              <a:rPr lang="en-US" sz="1650" dirty="0" spc="-1" kern="0">
                 <a:solidFill>
                   <a:srgbClr val="9A98A0"/>
                 </a:solidFill>
@@ -3721,18 +3635,7 @@
                 <a:ea typeface="Be Vietnam Pro" pitchFamily="34" charset="-122"/>
                 <a:cs typeface="Be Vietnam Pro" pitchFamily="34" charset="-120"/>
               </a:rPr>
-              <a:t> Authentication</a:t>
-            </a:r>
-            <a:r>
-              <a:rPr lang="en-US" sz="1650" dirty="0" spc="1" kern="0">
-                <a:solidFill>
-                  <a:srgbClr val="9A98A0"/>
-                </a:solidFill>
-                <a:latin typeface="Be Vietnam Pro" pitchFamily="34" charset="0"/>
-                <a:ea typeface="Be Vietnam Pro" pitchFamily="34" charset="-122"/>
-                <a:cs typeface="Be Vietnam Pro" pitchFamily="34" charset="-120"/>
-              </a:rPr>
-              <a:t> Code</a:t>
+              <a:t> Dollar</a:t>
             </a:r>
             <a:endParaRPr lang="en-US" sz="1650" dirty="0"/>
           </a:p>
@@ -3740,14 +3643,14 @@
       </p:sp>
       <p:sp>
         <p:nvSpPr>
-          <p:cNvPr id="11" name="Text 9"/>
-          <p:cNvSpPr/>
-          <p:nvPr/>
-        </p:nvSpPr>
-        <p:spPr>
-          <a:xfrm>
-            <a:off x="5372100" y="3981450"/>
-            <a:ext cx="3352800" cy="914400"/>
+          <p:cNvPr id="10" name="Text 8"/>
+          <p:cNvSpPr/>
+          <p:nvPr/>
+        </p:nvSpPr>
+        <p:spPr>
+          <a:xfrm>
+            <a:off x="5295900" y="2876550"/>
+            <a:ext cx="3543300" cy="342900"/>
           </a:xfrm>
           <a:prstGeom prst="rect">
             <a:avLst/>
@@ -3756,17 +3659,17 @@
           <a:ln/>
         </p:spPr>
         <p:txBody>
-          <a:bodyPr wrap="square" lIns="0" tIns="9716" rIns="0" bIns="-9716" rtlCol="0" anchor="t"/>
+          <a:bodyPr wrap="square" lIns="0" tIns="8906" rIns="0" bIns="-8906" rtlCol="0" anchor="t"/>
           <a:lstStyle/>
           <a:p>
             <a:pPr algn="l" indent="0" marL="0">
               <a:lnSpc>
-                <a:spcPts val="2340"/>
+                <a:spcPts val="2145"/>
               </a:lnSpc>
               <a:buNone/>
             </a:pPr>
             <a:r>
-              <a:rPr lang="en-US" sz="1800" dirty="0" spc="-3" kern="0">
+              <a:rPr lang="en-US" sz="1650" dirty="0" spc="19" kern="0">
                 <a:solidFill>
                   <a:srgbClr val="D8D3C4"/>
                 </a:solidFill>
@@ -3774,10 +3677,10 @@
                 <a:ea typeface="Be Vietnam Pro" pitchFamily="34" charset="-122"/>
                 <a:cs typeface="Be Vietnam Pro" pitchFamily="34" charset="-120"/>
               </a:rPr>
-              <a:t>thẻ</a:t>
-            </a:r>
-            <a:r>
-              <a:rPr lang="en-US" sz="1800" dirty="0" spc="-11" kern="0">
+              <a:t>đô</a:t>
+            </a:r>
+            <a:r>
+              <a:rPr lang="en-US" sz="1650" dirty="0" spc="-1" kern="0">
                 <a:solidFill>
                   <a:srgbClr val="D8D3C4"/>
                 </a:solidFill>
@@ -3785,10 +3688,10 @@
                 <a:ea typeface="Be Vietnam Pro" pitchFamily="34" charset="-122"/>
                 <a:cs typeface="Be Vietnam Pro" pitchFamily="34" charset="-120"/>
               </a:rPr>
-              <a:t> xác</a:t>
-            </a:r>
-            <a:r>
-              <a:rPr lang="en-US" sz="1800" dirty="0" spc="6" kern="0">
+              <a:t> la</a:t>
+            </a:r>
+            <a:r>
+              <a:rPr lang="en-US" sz="1650" dirty="0" spc="0" kern="0">
                 <a:solidFill>
                   <a:srgbClr val="D8D3C4"/>
                 </a:solidFill>
@@ -3796,10 +3699,10 @@
                 <a:ea typeface="Be Vietnam Pro" pitchFamily="34" charset="-122"/>
                 <a:cs typeface="Be Vietnam Pro" pitchFamily="34" charset="-120"/>
               </a:rPr>
-              <a:t> thực</a:t>
-            </a:r>
-            <a:r>
-              <a:rPr lang="en-US" sz="1800" dirty="0" spc="-2" kern="0">
+              <a:t> Mỹ,</a:t>
+            </a:r>
+            <a:r>
+              <a:rPr lang="en-US" sz="1650" dirty="0" spc="2" kern="0">
                 <a:solidFill>
                   <a:srgbClr val="D8D3C4"/>
                 </a:solidFill>
@@ -3807,10 +3710,10 @@
                 <a:ea typeface="Be Vietnam Pro" pitchFamily="34" charset="-122"/>
                 <a:cs typeface="Be Vietnam Pro" pitchFamily="34" charset="-120"/>
               </a:rPr>
-              <a:t> dùng</a:t>
-            </a:r>
-            <a:r>
-              <a:rPr lang="en-US" sz="1800" dirty="0" spc="-1" kern="0">
+              <a:t> tiền</a:t>
+            </a:r>
+            <a:r>
+              <a:rPr lang="en-US" sz="1650" dirty="0" spc="-12" kern="0">
                 <a:solidFill>
                   <a:srgbClr val="D8D3C4"/>
                 </a:solidFill>
@@ -3818,10 +3721,10 @@
                 <a:ea typeface="Be Vietnam Pro" pitchFamily="34" charset="-122"/>
                 <a:cs typeface="Be Vietnam Pro" pitchFamily="34" charset="-120"/>
               </a:rPr>
-              <a:t> khóa bí</a:t>
-            </a:r>
-            <a:r>
-              <a:rPr lang="en-US" sz="1800" dirty="0" spc="-11" kern="0">
+              <a:t> trong</a:t>
+            </a:r>
+            <a:r>
+              <a:rPr lang="en-US" sz="1650" dirty="0" spc="4" kern="0">
                 <a:solidFill>
                   <a:srgbClr val="D8D3C4"/>
                 </a:solidFill>
@@ -3829,26 +3732,37 @@
                 <a:ea typeface="Be Vietnam Pro" pitchFamily="34" charset="-122"/>
                 <a:cs typeface="Be Vietnam Pro" pitchFamily="34" charset="-120"/>
               </a:rPr>
-              <a:t> mật</a:t>
-            </a:r>
-            <a:endParaRPr lang="en-US" sz="1800" dirty="0"/>
+              <a:t> ví</a:t>
+            </a:r>
+            <a:r>
+              <a:rPr lang="en-US" sz="1650" dirty="0" spc="2" kern="0">
+                <a:solidFill>
+                  <a:srgbClr val="D8D3C4"/>
+                </a:solidFill>
+                <a:latin typeface="Be Vietnam Pro" pitchFamily="34" charset="0"/>
+                <a:ea typeface="Be Vietnam Pro" pitchFamily="34" charset="-122"/>
+                <a:cs typeface="Be Vietnam Pro" pitchFamily="34" charset="-120"/>
+              </a:rPr>
+              <a:t> dụ</a:t>
+            </a:r>
+            <a:endParaRPr lang="en-US" sz="1650" dirty="0"/>
           </a:p>
         </p:txBody>
       </p:sp>
       <p:sp>
         <p:nvSpPr>
-          <p:cNvPr id="12" name="Shape 10"/>
-          <p:cNvSpPr/>
-          <p:nvPr/>
-        </p:nvSpPr>
-        <p:spPr>
-          <a:xfrm>
-            <a:off x="9296400" y="2533650"/>
-            <a:ext cx="3886200" cy="2438400"/>
+          <p:cNvPr id="11" name="Shape 9"/>
+          <p:cNvSpPr/>
+          <p:nvPr/>
+        </p:nvSpPr>
+        <p:spPr>
+          <a:xfrm>
+            <a:off x="9220200" y="1485900"/>
+            <a:ext cx="4000500" cy="1943100"/>
           </a:xfrm>
           <a:prstGeom prst="roundRect">
             <a:avLst>
-              <a:gd name="adj" fmla="val 9375"/>
+              <a:gd name="adj" fmla="val 10784"/>
             </a:avLst>
           </a:prstGeom>
           <a:solidFill>
@@ -3859,14 +3773,14 @@
       </p:sp>
       <p:sp>
         <p:nvSpPr>
-          <p:cNvPr id="13" name="Text 11"/>
-          <p:cNvSpPr/>
-          <p:nvPr/>
-        </p:nvSpPr>
-        <p:spPr>
-          <a:xfrm>
-            <a:off x="9563100" y="2724150"/>
-            <a:ext cx="3352800" cy="552450"/>
+          <p:cNvPr id="12" name="Text 10"/>
+          <p:cNvSpPr/>
+          <p:nvPr/>
+        </p:nvSpPr>
+        <p:spPr>
+          <a:xfrm>
+            <a:off x="9448800" y="1695450"/>
+            <a:ext cx="3543300" cy="419100"/>
           </a:xfrm>
           <a:prstGeom prst="rect">
             <a:avLst/>
@@ -3882,30 +3796,30 @@
               <a:buNone/>
             </a:pPr>
             <a:r>
-              <a:rPr lang="en-US" sz="3300" dirty="0" spc="-8" kern="0">
-                <a:solidFill>
-                  <a:srgbClr val="7C93FF"/>
+              <a:rPr lang="en-US" sz="2400" dirty="0" spc="-24" kern="0">
+                <a:solidFill>
+                  <a:srgbClr val="FFB454"/>
                 </a:solidFill>
                 <a:latin typeface="Bricolage Grotesque ExtraBold" pitchFamily="34" charset="0"/>
                 <a:ea typeface="Bricolage Grotesque ExtraBold" pitchFamily="34" charset="-122"/>
                 <a:cs typeface="Bricolage Grotesque ExtraBold" pitchFamily="34" charset="-120"/>
               </a:rPr>
-              <a:t>AES</a:t>
-            </a:r>
-            <a:endParaRPr lang="en-US" sz="3300" dirty="0"/>
+              <a:t>HMAC</a:t>
+            </a:r>
+            <a:endParaRPr lang="en-US" sz="2400" dirty="0"/>
           </a:p>
         </p:txBody>
       </p:sp>
       <p:sp>
         <p:nvSpPr>
-          <p:cNvPr id="14" name="Text 12"/>
-          <p:cNvSpPr/>
-          <p:nvPr/>
-        </p:nvSpPr>
-        <p:spPr>
-          <a:xfrm>
-            <a:off x="9563100" y="3333750"/>
-            <a:ext cx="3352800" cy="590550"/>
+          <p:cNvPr id="13" name="Text 11"/>
+          <p:cNvSpPr/>
+          <p:nvPr/>
+        </p:nvSpPr>
+        <p:spPr>
+          <a:xfrm>
+            <a:off x="9448800" y="2171700"/>
+            <a:ext cx="3543300" cy="571500"/>
           </a:xfrm>
           <a:prstGeom prst="rect">
             <a:avLst/>
@@ -3924,7 +3838,7 @@
               <a:buNone/>
             </a:pPr>
             <a:r>
-              <a:rPr lang="en-US" sz="1650" dirty="0" spc="-10" kern="0">
+              <a:rPr lang="en-US" sz="1650" dirty="0" spc="-4" kern="0">
                 <a:solidFill>
                   <a:srgbClr val="9A98A0"/>
                 </a:solidFill>
@@ -3932,10 +3846,10 @@
                 <a:ea typeface="Be Vietnam Pro" pitchFamily="34" charset="-122"/>
                 <a:cs typeface="Be Vietnam Pro" pitchFamily="34" charset="-120"/>
               </a:rPr>
-              <a:t>Advanced</a:t>
-            </a:r>
-            <a:r>
-              <a:rPr lang="en-US" sz="1650" dirty="0" spc="-2" kern="0">
+              <a:t>Hash-based</a:t>
+            </a:r>
+            <a:r>
+              <a:rPr lang="en-US" sz="1650" dirty="0" spc="-6" kern="0">
                 <a:solidFill>
                   <a:srgbClr val="9A98A0"/>
                 </a:solidFill>
@@ -3943,10 +3857,10 @@
                 <a:ea typeface="Be Vietnam Pro" pitchFamily="34" charset="-122"/>
                 <a:cs typeface="Be Vietnam Pro" pitchFamily="34" charset="-120"/>
               </a:rPr>
-              <a:t> Encryption</a:t>
-            </a:r>
-            <a:r>
-              <a:rPr lang="en-US" sz="1650" dirty="0" spc="-12" kern="0">
+              <a:t> Message</a:t>
+            </a:r>
+            <a:r>
+              <a:rPr lang="en-US" sz="1650" dirty="0" spc="-7" kern="0">
                 <a:solidFill>
                   <a:srgbClr val="9A98A0"/>
                 </a:solidFill>
@@ -3954,7 +3868,18 @@
                 <a:ea typeface="Be Vietnam Pro" pitchFamily="34" charset="-122"/>
                 <a:cs typeface="Be Vietnam Pro" pitchFamily="34" charset="-120"/>
               </a:rPr>
-              <a:t> Standard</a:t>
+              <a:t> Authentication</a:t>
+            </a:r>
+            <a:r>
+              <a:rPr lang="en-US" sz="1650" dirty="0" spc="1" kern="0">
+                <a:solidFill>
+                  <a:srgbClr val="9A98A0"/>
+                </a:solidFill>
+                <a:latin typeface="Be Vietnam Pro" pitchFamily="34" charset="0"/>
+                <a:ea typeface="Be Vietnam Pro" pitchFamily="34" charset="-122"/>
+                <a:cs typeface="Be Vietnam Pro" pitchFamily="34" charset="-120"/>
+              </a:rPr>
+              <a:t> Code</a:t>
             </a:r>
             <a:endParaRPr lang="en-US" sz="1650" dirty="0"/>
           </a:p>
@@ -3962,14 +3887,14 @@
       </p:sp>
       <p:sp>
         <p:nvSpPr>
-          <p:cNvPr id="15" name="Text 13"/>
-          <p:cNvSpPr/>
-          <p:nvPr/>
-        </p:nvSpPr>
-        <p:spPr>
-          <a:xfrm>
-            <a:off x="9563100" y="3981450"/>
-            <a:ext cx="3352800" cy="914400"/>
+          <p:cNvPr id="14" name="Text 12"/>
+          <p:cNvSpPr/>
+          <p:nvPr/>
+        </p:nvSpPr>
+        <p:spPr>
+          <a:xfrm>
+            <a:off x="9448800" y="2876550"/>
+            <a:ext cx="3543300" cy="342900"/>
           </a:xfrm>
           <a:prstGeom prst="rect">
             <a:avLst/>
@@ -3978,17 +3903,17 @@
           <a:ln/>
         </p:spPr>
         <p:txBody>
-          <a:bodyPr wrap="square" lIns="0" tIns="9716" rIns="0" bIns="-9716" rtlCol="0" anchor="t"/>
+          <a:bodyPr wrap="square" lIns="0" tIns="8906" rIns="0" bIns="-8906" rtlCol="0" anchor="t"/>
           <a:lstStyle/>
           <a:p>
             <a:pPr algn="l" indent="0" marL="0">
               <a:lnSpc>
-                <a:spcPts val="2340"/>
+                <a:spcPts val="2145"/>
               </a:lnSpc>
               <a:buNone/>
             </a:pPr>
             <a:r>
-              <a:rPr lang="en-US" sz="1800" dirty="0" spc="-2" kern="0">
+              <a:rPr lang="en-US" sz="1650" dirty="0" spc="4" kern="0">
                 <a:solidFill>
                   <a:srgbClr val="D8D3C4"/>
                 </a:solidFill>
@@ -3996,10 +3921,10 @@
                 <a:ea typeface="Be Vietnam Pro" pitchFamily="34" charset="-122"/>
                 <a:cs typeface="Be Vietnam Pro" pitchFamily="34" charset="-120"/>
               </a:rPr>
-              <a:t>mã</a:t>
-            </a:r>
-            <a:r>
-              <a:rPr lang="en-US" sz="1800" dirty="0" spc="-1" kern="0">
+              <a:t>thẻ</a:t>
+            </a:r>
+            <a:r>
+              <a:rPr lang="en-US" sz="1650" dirty="0" spc="-12" kern="0">
                 <a:solidFill>
                   <a:srgbClr val="D8D3C4"/>
                 </a:solidFill>
@@ -4007,10 +3932,10 @@
                 <a:ea typeface="Be Vietnam Pro" pitchFamily="34" charset="-122"/>
                 <a:cs typeface="Be Vietnam Pro" pitchFamily="34" charset="-120"/>
               </a:rPr>
-              <a:t> hóa</a:t>
-            </a:r>
-            <a:r>
-              <a:rPr lang="en-US" sz="1800" dirty="0" spc="-4" kern="0">
+              <a:t> xác</a:t>
+            </a:r>
+            <a:r>
+              <a:rPr lang="en-US" sz="1650" dirty="0" spc="7" kern="0">
                 <a:solidFill>
                   <a:srgbClr val="D8D3C4"/>
                 </a:solidFill>
@@ -4018,10 +3943,10 @@
                 <a:ea typeface="Be Vietnam Pro" pitchFamily="34" charset="-122"/>
                 <a:cs typeface="Be Vietnam Pro" pitchFamily="34" charset="-120"/>
               </a:rPr>
-              <a:t> bằng</a:t>
-            </a:r>
-            <a:r>
-              <a:rPr lang="en-US" sz="1800" dirty="0" spc="-7" kern="0">
+              <a:t> thực</a:t>
+            </a:r>
+            <a:r>
+              <a:rPr lang="en-US" sz="1650" dirty="0" spc="0" kern="0">
                 <a:solidFill>
                   <a:srgbClr val="D8D3C4"/>
                 </a:solidFill>
@@ -4029,10 +3954,10 @@
                 <a:ea typeface="Be Vietnam Pro" pitchFamily="34" charset="-122"/>
                 <a:cs typeface="Be Vietnam Pro" pitchFamily="34" charset="-120"/>
               </a:rPr>
-              <a:t> một</a:t>
-            </a:r>
-            <a:r>
-              <a:rPr lang="en-US" sz="1800" dirty="0" spc="-1" kern="0">
+              <a:t> dùng</a:t>
+            </a:r>
+            <a:r>
+              <a:rPr lang="en-US" sz="1650" dirty="0" spc="-1" kern="0">
                 <a:solidFill>
                   <a:srgbClr val="D8D3C4"/>
                 </a:solidFill>
@@ -4043,7 +3968,7 @@
               <a:t> khóa</a:t>
             </a:r>
             <a:r>
-              <a:rPr lang="en-US" sz="1800" dirty="0" spc="-2" kern="0">
+              <a:rPr lang="en-US" sz="1650" dirty="0" spc="4" kern="0">
                 <a:solidFill>
                   <a:srgbClr val="D8D3C4"/>
                 </a:solidFill>
@@ -4051,26 +3976,37 @@
                 <a:ea typeface="Be Vietnam Pro" pitchFamily="34" charset="-122"/>
                 <a:cs typeface="Be Vietnam Pro" pitchFamily="34" charset="-120"/>
               </a:rPr>
-              <a:t> chung</a:t>
-            </a:r>
-            <a:endParaRPr lang="en-US" sz="1800" dirty="0"/>
+              <a:t> bí</a:t>
+            </a:r>
+            <a:r>
+              <a:rPr lang="en-US" sz="1650" dirty="0" spc="-6" kern="0">
+                <a:solidFill>
+                  <a:srgbClr val="D8D3C4"/>
+                </a:solidFill>
+                <a:latin typeface="Be Vietnam Pro" pitchFamily="34" charset="0"/>
+                <a:ea typeface="Be Vietnam Pro" pitchFamily="34" charset="-122"/>
+                <a:cs typeface="Be Vietnam Pro" pitchFamily="34" charset="-120"/>
+              </a:rPr>
+              <a:t> mật</a:t>
+            </a:r>
+            <a:endParaRPr lang="en-US" sz="1650" dirty="0"/>
           </a:p>
         </p:txBody>
       </p:sp>
       <p:sp>
         <p:nvSpPr>
-          <p:cNvPr id="16" name="Shape 14"/>
-          <p:cNvSpPr/>
-          <p:nvPr/>
-        </p:nvSpPr>
-        <p:spPr>
-          <a:xfrm>
-            <a:off x="13487400" y="2533650"/>
-            <a:ext cx="3886200" cy="2438400"/>
+          <p:cNvPr id="15" name="Shape 13"/>
+          <p:cNvSpPr/>
+          <p:nvPr/>
+        </p:nvSpPr>
+        <p:spPr>
+          <a:xfrm>
+            <a:off x="13373100" y="1485900"/>
+            <a:ext cx="4000500" cy="1943100"/>
           </a:xfrm>
           <a:prstGeom prst="roundRect">
             <a:avLst>
-              <a:gd name="adj" fmla="val 9375"/>
+              <a:gd name="adj" fmla="val 10784"/>
             </a:avLst>
           </a:prstGeom>
           <a:solidFill>
@@ -4081,14 +4017,14 @@
       </p:sp>
       <p:sp>
         <p:nvSpPr>
-          <p:cNvPr id="17" name="Text 15"/>
-          <p:cNvSpPr/>
-          <p:nvPr/>
-        </p:nvSpPr>
-        <p:spPr>
-          <a:xfrm>
-            <a:off x="13754100" y="2724150"/>
-            <a:ext cx="3352800" cy="552450"/>
+          <p:cNvPr id="16" name="Text 14"/>
+          <p:cNvSpPr/>
+          <p:nvPr/>
+        </p:nvSpPr>
+        <p:spPr>
+          <a:xfrm>
+            <a:off x="13601700" y="1695450"/>
+            <a:ext cx="3543300" cy="419100"/>
           </a:xfrm>
           <a:prstGeom prst="rect">
             <a:avLst/>
@@ -4104,7 +4040,7 @@
               <a:buNone/>
             </a:pPr>
             <a:r>
-              <a:rPr lang="en-US" sz="3300" dirty="0" spc="-9" kern="0">
+              <a:rPr lang="en-US" sz="2400" dirty="0" spc="-8" kern="0">
                 <a:solidFill>
                   <a:srgbClr val="7C93FF"/>
                 </a:solidFill>
@@ -4112,22 +4048,22 @@
                 <a:ea typeface="Bricolage Grotesque ExtraBold" pitchFamily="34" charset="-122"/>
                 <a:cs typeface="Bricolage Grotesque ExtraBold" pitchFamily="34" charset="-120"/>
               </a:rPr>
-              <a:t>CTR</a:t>
-            </a:r>
-            <a:endParaRPr lang="en-US" sz="3300" dirty="0"/>
+              <a:t>AES</a:t>
+            </a:r>
+            <a:endParaRPr lang="en-US" sz="2400" dirty="0"/>
           </a:p>
         </p:txBody>
       </p:sp>
       <p:sp>
         <p:nvSpPr>
-          <p:cNvPr id="18" name="Text 16"/>
-          <p:cNvSpPr/>
-          <p:nvPr/>
-        </p:nvSpPr>
-        <p:spPr>
-          <a:xfrm>
-            <a:off x="13754100" y="3333750"/>
-            <a:ext cx="3352800" cy="590550"/>
+          <p:cNvPr id="17" name="Text 15"/>
+          <p:cNvSpPr/>
+          <p:nvPr/>
+        </p:nvSpPr>
+        <p:spPr>
+          <a:xfrm>
+            <a:off x="13601700" y="2171700"/>
+            <a:ext cx="3543300" cy="571500"/>
           </a:xfrm>
           <a:prstGeom prst="rect">
             <a:avLst/>
@@ -4146,7 +4082,7 @@
               <a:buNone/>
             </a:pPr>
             <a:r>
-              <a:rPr lang="en-US" sz="1650" dirty="0" spc="-43" kern="0">
+              <a:rPr lang="en-US" sz="1650" dirty="0" spc="-10" kern="0">
                 <a:solidFill>
                   <a:srgbClr val="9A98A0"/>
                 </a:solidFill>
@@ -4154,7 +4090,29 @@
                 <a:ea typeface="Be Vietnam Pro" pitchFamily="34" charset="-122"/>
                 <a:cs typeface="Be Vietnam Pro" pitchFamily="34" charset="-120"/>
               </a:rPr>
-              <a:t>CounTeR</a:t>
+              <a:t>Advanced</a:t>
+            </a:r>
+            <a:r>
+              <a:rPr lang="en-US" sz="1650" dirty="0" spc="-2" kern="0">
+                <a:solidFill>
+                  <a:srgbClr val="9A98A0"/>
+                </a:solidFill>
+                <a:latin typeface="Be Vietnam Pro" pitchFamily="34" charset="0"/>
+                <a:ea typeface="Be Vietnam Pro" pitchFamily="34" charset="-122"/>
+                <a:cs typeface="Be Vietnam Pro" pitchFamily="34" charset="-120"/>
+              </a:rPr>
+              <a:t> Encryption</a:t>
+            </a:r>
+            <a:r>
+              <a:rPr lang="en-US" sz="1650" dirty="0" spc="-12" kern="0">
+                <a:solidFill>
+                  <a:srgbClr val="9A98A0"/>
+                </a:solidFill>
+                <a:latin typeface="Be Vietnam Pro" pitchFamily="34" charset="0"/>
+                <a:ea typeface="Be Vietnam Pro" pitchFamily="34" charset="-122"/>
+                <a:cs typeface="Be Vietnam Pro" pitchFamily="34" charset="-120"/>
+              </a:rPr>
+              <a:t> Standard</a:t>
             </a:r>
             <a:endParaRPr lang="en-US" sz="1650" dirty="0"/>
           </a:p>
@@ -4162,14 +4120,14 @@
       </p:sp>
       <p:sp>
         <p:nvSpPr>
-          <p:cNvPr id="19" name="Text 17"/>
-          <p:cNvSpPr/>
-          <p:nvPr/>
-        </p:nvSpPr>
-        <p:spPr>
-          <a:xfrm>
-            <a:off x="13754100" y="3981450"/>
-            <a:ext cx="3352800" cy="914400"/>
+          <p:cNvPr id="18" name="Text 16"/>
+          <p:cNvSpPr/>
+          <p:nvPr/>
+        </p:nvSpPr>
+        <p:spPr>
+          <a:xfrm>
+            <a:off x="13601700" y="2876550"/>
+            <a:ext cx="3543300" cy="342900"/>
           </a:xfrm>
           <a:prstGeom prst="rect">
             <a:avLst/>
@@ -4178,17 +4136,17 @@
           <a:ln/>
         </p:spPr>
         <p:txBody>
-          <a:bodyPr wrap="square" lIns="0" tIns="9716" rIns="0" bIns="-9716" rtlCol="0" anchor="t"/>
+          <a:bodyPr wrap="square" lIns="0" tIns="8906" rIns="0" bIns="-8906" rtlCol="0" anchor="t"/>
           <a:lstStyle/>
           <a:p>
             <a:pPr algn="l" indent="0" marL="0">
               <a:lnSpc>
-                <a:spcPts val="2340"/>
+                <a:spcPts val="2145"/>
               </a:lnSpc>
               <a:buNone/>
             </a:pPr>
             <a:r>
-              <a:rPr lang="en-US" sz="1800" dirty="0" spc="-1" kern="0">
+              <a:rPr lang="en-US" sz="1650" dirty="0" spc="0" kern="0">
                 <a:solidFill>
                   <a:srgbClr val="D8D3C4"/>
                 </a:solidFill>
@@ -4196,10 +4154,10 @@
                 <a:ea typeface="Be Vietnam Pro" pitchFamily="34" charset="-122"/>
                 <a:cs typeface="Be Vietnam Pro" pitchFamily="34" charset="-120"/>
               </a:rPr>
-              <a:t>giữ bí</a:t>
-            </a:r>
-            <a:r>
-              <a:rPr lang="en-US" sz="1800" dirty="0" spc="-10" kern="0">
+              <a:t>mã</a:t>
+            </a:r>
+            <a:r>
+              <a:rPr lang="en-US" sz="1650" dirty="0" spc="-1" kern="0">
                 <a:solidFill>
                   <a:srgbClr val="D8D3C4"/>
                 </a:solidFill>
@@ -4207,10 +4165,10 @@
                 <a:ea typeface="Be Vietnam Pro" pitchFamily="34" charset="-122"/>
                 <a:cs typeface="Be Vietnam Pro" pitchFamily="34" charset="-120"/>
               </a:rPr>
-              <a:t> mật,</a:t>
-            </a:r>
-            <a:r>
-              <a:rPr lang="en-US" sz="1800" dirty="0" spc="-2" kern="0">
+              <a:t> hóa</a:t>
+            </a:r>
+            <a:r>
+              <a:rPr lang="en-US" sz="1650" dirty="0" spc="-2" kern="0">
                 <a:solidFill>
                   <a:srgbClr val="D8D3C4"/>
                 </a:solidFill>
@@ -4218,10 +4176,10 @@
                 <a:ea typeface="Be Vietnam Pro" pitchFamily="34" charset="-122"/>
                 <a:cs typeface="Be Vietnam Pro" pitchFamily="34" charset="-120"/>
               </a:rPr>
-              <a:t> không</a:t>
-            </a:r>
-            <a:r>
-              <a:rPr lang="en-US" sz="1800" dirty="0" spc="-1" kern="0">
+              <a:t> bằng</a:t>
+            </a:r>
+            <a:r>
+              <a:rPr lang="en-US" sz="1650" dirty="0" spc="-1" kern="0">
                 <a:solidFill>
                   <a:srgbClr val="D8D3C4"/>
                 </a:solidFill>
@@ -4229,59 +4187,26 @@
                 <a:ea typeface="Be Vietnam Pro" pitchFamily="34" charset="-122"/>
                 <a:cs typeface="Be Vietnam Pro" pitchFamily="34" charset="-120"/>
               </a:rPr>
-              <a:t> tự kiểm</a:t>
-            </a:r>
-            <a:r>
-              <a:rPr lang="en-US" sz="1800" dirty="0" spc="-3" kern="0">
-                <a:solidFill>
-                  <a:srgbClr val="D8D3C4"/>
-                </a:solidFill>
-                <a:latin typeface="Be Vietnam Pro" pitchFamily="34" charset="0"/>
-                <a:ea typeface="Be Vietnam Pro" pitchFamily="34" charset="-122"/>
-                <a:cs typeface="Be Vietnam Pro" pitchFamily="34" charset="-120"/>
-              </a:rPr>
-              <a:t> tin</a:t>
-            </a:r>
-            <a:r>
-              <a:rPr lang="en-US" sz="1800" dirty="0" spc="-1" kern="0">
-                <a:solidFill>
-                  <a:srgbClr val="D8D3C4"/>
-                </a:solidFill>
-                <a:latin typeface="Be Vietnam Pro" pitchFamily="34" charset="0"/>
-                <a:ea typeface="Be Vietnam Pro" pitchFamily="34" charset="-122"/>
-                <a:cs typeface="Be Vietnam Pro" pitchFamily="34" charset="-120"/>
-              </a:rPr>
-              <a:t> bị</a:t>
-            </a:r>
-            <a:r>
-              <a:rPr lang="en-US" sz="1800" dirty="0" spc="10" kern="0">
-                <a:solidFill>
-                  <a:srgbClr val="D8D3C4"/>
-                </a:solidFill>
-                <a:latin typeface="Be Vietnam Pro" pitchFamily="34" charset="0"/>
-                <a:ea typeface="Be Vietnam Pro" pitchFamily="34" charset="-122"/>
-                <a:cs typeface="Be Vietnam Pro" pitchFamily="34" charset="-120"/>
-              </a:rPr>
-              <a:t> sửa</a:t>
-            </a:r>
-            <a:endParaRPr lang="en-US" sz="1800" dirty="0"/>
+              <a:t> một khóa chung</a:t>
+            </a:r>
+            <a:endParaRPr lang="en-US" sz="1650" dirty="0"/>
           </a:p>
         </p:txBody>
       </p:sp>
       <p:sp>
         <p:nvSpPr>
-          <p:cNvPr id="20" name="Shape 18"/>
-          <p:cNvSpPr/>
-          <p:nvPr/>
-        </p:nvSpPr>
-        <p:spPr>
-          <a:xfrm>
-            <a:off x="914400" y="5162550"/>
-            <a:ext cx="3886200" cy="2438400"/>
+          <p:cNvPr id="19" name="Shape 17"/>
+          <p:cNvSpPr/>
+          <p:nvPr/>
+        </p:nvSpPr>
+        <p:spPr>
+          <a:xfrm>
+            <a:off x="914400" y="3581400"/>
+            <a:ext cx="4000500" cy="1943100"/>
           </a:xfrm>
           <a:prstGeom prst="roundRect">
             <a:avLst>
-              <a:gd name="adj" fmla="val 9375"/>
+              <a:gd name="adj" fmla="val 10784"/>
             </a:avLst>
           </a:prstGeom>
           <a:solidFill>
@@ -4292,14 +4217,14 @@
       </p:sp>
       <p:sp>
         <p:nvSpPr>
-          <p:cNvPr id="21" name="Text 19"/>
-          <p:cNvSpPr/>
-          <p:nvPr/>
-        </p:nvSpPr>
-        <p:spPr>
-          <a:xfrm>
-            <a:off x="1181100" y="5353050"/>
-            <a:ext cx="3352800" cy="552450"/>
+          <p:cNvPr id="20" name="Text 18"/>
+          <p:cNvSpPr/>
+          <p:nvPr/>
+        </p:nvSpPr>
+        <p:spPr>
+          <a:xfrm>
+            <a:off x="1143000" y="3790950"/>
+            <a:ext cx="3543300" cy="419100"/>
           </a:xfrm>
           <a:prstGeom prst="rect">
             <a:avLst/>
@@ -4315,30 +4240,30 @@
               <a:buNone/>
             </a:pPr>
             <a:r>
-              <a:rPr lang="en-US" sz="3300" dirty="0" kern="0">
-                <a:solidFill>
-                  <a:srgbClr val="FFB454"/>
+              <a:rPr lang="en-US" sz="2400" dirty="0" spc="-6" kern="0">
+                <a:solidFill>
+                  <a:srgbClr val="7C93FF"/>
                 </a:solidFill>
                 <a:latin typeface="Bricolage Grotesque ExtraBold" pitchFamily="34" charset="0"/>
                 <a:ea typeface="Bricolage Grotesque ExtraBold" pitchFamily="34" charset="-122"/>
                 <a:cs typeface="Bricolage Grotesque ExtraBold" pitchFamily="34" charset="-120"/>
               </a:rPr>
-              <a:t>GCM</a:t>
-            </a:r>
-            <a:endParaRPr lang="en-US" sz="3300" dirty="0"/>
+              <a:t>CTR</a:t>
+            </a:r>
+            <a:endParaRPr lang="en-US" sz="2400" dirty="0"/>
           </a:p>
         </p:txBody>
       </p:sp>
       <p:sp>
         <p:nvSpPr>
-          <p:cNvPr id="22" name="Text 20"/>
-          <p:cNvSpPr/>
-          <p:nvPr/>
-        </p:nvSpPr>
-        <p:spPr>
-          <a:xfrm>
-            <a:off x="1181100" y="5962650"/>
-            <a:ext cx="3352800" cy="590550"/>
+          <p:cNvPr id="21" name="Text 19"/>
+          <p:cNvSpPr/>
+          <p:nvPr/>
+        </p:nvSpPr>
+        <p:spPr>
+          <a:xfrm>
+            <a:off x="1143000" y="4267200"/>
+            <a:ext cx="3543300" cy="571500"/>
           </a:xfrm>
           <a:prstGeom prst="rect">
             <a:avLst/>
@@ -4357,7 +4282,7 @@
               <a:buNone/>
             </a:pPr>
             <a:r>
-              <a:rPr lang="en-US" sz="1650" dirty="0" spc="-5" kern="0">
+              <a:rPr lang="en-US" sz="1650" dirty="0" spc="-43" kern="0">
                 <a:solidFill>
                   <a:srgbClr val="9A98A0"/>
                 </a:solidFill>
@@ -4365,18 +4290,7 @@
                 <a:ea typeface="Be Vietnam Pro" pitchFamily="34" charset="-122"/>
                 <a:cs typeface="Be Vietnam Pro" pitchFamily="34" charset="-120"/>
               </a:rPr>
-              <a:t>Galois/Counter</a:t>
-            </a:r>
-            <a:r>
-              <a:rPr lang="en-US" sz="1650" dirty="0" spc="-3" kern="0">
-                <a:solidFill>
-                  <a:srgbClr val="9A98A0"/>
-                </a:solidFill>
-                <a:latin typeface="Be Vietnam Pro" pitchFamily="34" charset="0"/>
-                <a:ea typeface="Be Vietnam Pro" pitchFamily="34" charset="-122"/>
-                <a:cs typeface="Be Vietnam Pro" pitchFamily="34" charset="-120"/>
-              </a:rPr>
-              <a:t> Mode</a:t>
+              <a:t>CounTeR</a:t>
             </a:r>
             <a:endParaRPr lang="en-US" sz="1650" dirty="0"/>
           </a:p>
@@ -4384,14 +4298,14 @@
       </p:sp>
       <p:sp>
         <p:nvSpPr>
-          <p:cNvPr id="23" name="Text 21"/>
-          <p:cNvSpPr/>
-          <p:nvPr/>
-        </p:nvSpPr>
-        <p:spPr>
-          <a:xfrm>
-            <a:off x="1181100" y="6610350"/>
-            <a:ext cx="3352800" cy="914400"/>
+          <p:cNvPr id="22" name="Text 20"/>
+          <p:cNvSpPr/>
+          <p:nvPr/>
+        </p:nvSpPr>
+        <p:spPr>
+          <a:xfrm>
+            <a:off x="1143000" y="4972050"/>
+            <a:ext cx="3543300" cy="342900"/>
           </a:xfrm>
           <a:prstGeom prst="rect">
             <a:avLst/>
@@ -4400,17 +4314,17 @@
           <a:ln/>
         </p:spPr>
         <p:txBody>
-          <a:bodyPr wrap="square" lIns="0" tIns="9716" rIns="0" bIns="-9716" rtlCol="0" anchor="t"/>
+          <a:bodyPr wrap="square" lIns="0" tIns="8906" rIns="0" bIns="-8906" rtlCol="0" anchor="t"/>
           <a:lstStyle/>
           <a:p>
             <a:pPr algn="l" indent="0" marL="0">
               <a:lnSpc>
-                <a:spcPts val="2340"/>
+                <a:spcPts val="2145"/>
               </a:lnSpc>
               <a:buNone/>
             </a:pPr>
             <a:r>
-              <a:rPr lang="en-US" sz="1800" dirty="0" spc="-2" kern="0">
+              <a:rPr lang="en-US" sz="1650" dirty="0" spc="-1" kern="0">
                 <a:solidFill>
                   <a:srgbClr val="D8D3C4"/>
                 </a:solidFill>
@@ -4418,10 +4332,10 @@
                 <a:ea typeface="Be Vietnam Pro" pitchFamily="34" charset="-122"/>
                 <a:cs typeface="Be Vietnam Pro" pitchFamily="34" charset="-120"/>
               </a:rPr>
-              <a:t>mã</a:t>
-            </a:r>
-            <a:r>
-              <a:rPr lang="en-US" sz="1800" dirty="0" spc="-1" kern="0">
+              <a:t>giữ</a:t>
+            </a:r>
+            <a:r>
+              <a:rPr lang="en-US" sz="1650" dirty="0" spc="3" kern="0">
                 <a:solidFill>
                   <a:srgbClr val="D8D3C4"/>
                 </a:solidFill>
@@ -4429,10 +4343,10 @@
                 <a:ea typeface="Be Vietnam Pro" pitchFamily="34" charset="-122"/>
                 <a:cs typeface="Be Vietnam Pro" pitchFamily="34" charset="-120"/>
               </a:rPr>
-              <a:t> hóa</a:t>
-            </a:r>
-            <a:r>
-              <a:rPr lang="en-US" sz="1800" dirty="0" spc="-12" kern="0">
+              <a:t> bí</a:t>
+            </a:r>
+            <a:r>
+              <a:rPr lang="en-US" sz="1650" dirty="0" spc="-4" kern="0">
                 <a:solidFill>
                   <a:srgbClr val="D8D3C4"/>
                 </a:solidFill>
@@ -4440,10 +4354,10 @@
                 <a:ea typeface="Be Vietnam Pro" pitchFamily="34" charset="-122"/>
                 <a:cs typeface="Be Vietnam Pro" pitchFamily="34" charset="-120"/>
               </a:rPr>
-              <a:t> và</a:t>
-            </a:r>
-            <a:r>
-              <a:rPr lang="en-US" sz="1800" dirty="0" spc="-11" kern="0">
+              <a:t> mật,</a:t>
+            </a:r>
+            <a:r>
+              <a:rPr lang="en-US" sz="1650" dirty="0" spc="0" kern="0">
                 <a:solidFill>
                   <a:srgbClr val="D8D3C4"/>
                 </a:solidFill>
@@ -4451,10 +4365,10 @@
                 <a:ea typeface="Be Vietnam Pro" pitchFamily="34" charset="-122"/>
                 <a:cs typeface="Be Vietnam Pro" pitchFamily="34" charset="-120"/>
               </a:rPr>
-              <a:t> gắn</a:t>
-            </a:r>
-            <a:r>
-              <a:rPr lang="en-US" sz="1800" dirty="0" spc="-2" kern="0">
+              <a:t> không báo</a:t>
+            </a:r>
+            <a:r>
+              <a:rPr lang="en-US" sz="1650" dirty="0" spc="1" kern="0">
                 <a:solidFill>
                   <a:srgbClr val="D8D3C4"/>
                 </a:solidFill>
@@ -4462,10 +4376,10 @@
                 <a:ea typeface="Be Vietnam Pro" pitchFamily="34" charset="-122"/>
                 <a:cs typeface="Be Vietnam Pro" pitchFamily="34" charset="-120"/>
               </a:rPr>
-              <a:t> thẻ kiểm,</a:t>
-            </a:r>
-            <a:r>
-              <a:rPr lang="en-US" sz="1800" dirty="0" spc="-1" kern="0">
+              <a:t> tin</a:t>
+            </a:r>
+            <a:r>
+              <a:rPr lang="en-US" sz="1650" dirty="0" spc="3" kern="0">
                 <a:solidFill>
                   <a:srgbClr val="D8D3C4"/>
                 </a:solidFill>
@@ -4476,7 +4390,7 @@
               <a:t> bị</a:t>
             </a:r>
             <a:r>
-              <a:rPr lang="en-US" sz="1800" dirty="0" spc="9" kern="0">
+              <a:rPr lang="en-US" sz="1650" dirty="0" spc="7" kern="0">
                 <a:solidFill>
                   <a:srgbClr val="D8D3C4"/>
                 </a:solidFill>
@@ -4486,57 +4400,24 @@
               </a:rPr>
               <a:t> sửa</a:t>
             </a:r>
-            <a:r>
-              <a:rPr lang="en-US" sz="1800" dirty="0" spc="-2" kern="0">
-                <a:solidFill>
-                  <a:srgbClr val="D8D3C4"/>
-                </a:solidFill>
-                <a:latin typeface="Be Vietnam Pro" pitchFamily="34" charset="0"/>
-                <a:ea typeface="Be Vietnam Pro" pitchFamily="34" charset="-122"/>
-                <a:cs typeface="Be Vietnam Pro" pitchFamily="34" charset="-120"/>
-              </a:rPr>
-              <a:t> thì</a:t>
-            </a:r>
-            <a:r>
-              <a:rPr lang="en-US" sz="1800" dirty="0" spc="0" kern="0">
-                <a:solidFill>
-                  <a:srgbClr val="D8D3C4"/>
-                </a:solidFill>
-                <a:latin typeface="Be Vietnam Pro" pitchFamily="34" charset="0"/>
-                <a:ea typeface="Be Vietnam Pro" pitchFamily="34" charset="-122"/>
-                <a:cs typeface="Be Vietnam Pro" pitchFamily="34" charset="-120"/>
-              </a:rPr>
-              <a:t> báo</a:t>
-            </a:r>
-            <a:r>
-              <a:rPr lang="en-US" sz="1800" dirty="0" spc="-1" kern="0">
-                <a:solidFill>
-                  <a:srgbClr val="D8D3C4"/>
-                </a:solidFill>
-                <a:latin typeface="Be Vietnam Pro" pitchFamily="34" charset="0"/>
-                <a:ea typeface="Be Vietnam Pro" pitchFamily="34" charset="-122"/>
-                <a:cs typeface="Be Vietnam Pro" pitchFamily="34" charset="-120"/>
-              </a:rPr>
-              <a:t> lỗi</a:t>
-            </a:r>
-            <a:endParaRPr lang="en-US" sz="1800" dirty="0"/>
+            <a:endParaRPr lang="en-US" sz="1650" dirty="0"/>
           </a:p>
         </p:txBody>
       </p:sp>
       <p:sp>
         <p:nvSpPr>
-          <p:cNvPr id="24" name="Shape 22"/>
-          <p:cNvSpPr/>
-          <p:nvPr/>
-        </p:nvSpPr>
-        <p:spPr>
-          <a:xfrm>
-            <a:off x="5105400" y="5162550"/>
-            <a:ext cx="3886200" cy="2438400"/>
+          <p:cNvPr id="23" name="Shape 21"/>
+          <p:cNvSpPr/>
+          <p:nvPr/>
+        </p:nvSpPr>
+        <p:spPr>
+          <a:xfrm>
+            <a:off x="5067300" y="3581400"/>
+            <a:ext cx="4000500" cy="1943100"/>
           </a:xfrm>
           <a:prstGeom prst="roundRect">
             <a:avLst>
-              <a:gd name="adj" fmla="val 9375"/>
+              <a:gd name="adj" fmla="val 10784"/>
             </a:avLst>
           </a:prstGeom>
           <a:solidFill>
@@ -4547,14 +4428,14 @@
       </p:sp>
       <p:sp>
         <p:nvSpPr>
-          <p:cNvPr id="25" name="Text 23"/>
-          <p:cNvSpPr/>
-          <p:nvPr/>
-        </p:nvSpPr>
-        <p:spPr>
-          <a:xfrm>
-            <a:off x="5372100" y="5353050"/>
-            <a:ext cx="3352800" cy="552450"/>
+          <p:cNvPr id="24" name="Text 22"/>
+          <p:cNvSpPr/>
+          <p:nvPr/>
+        </p:nvSpPr>
+        <p:spPr>
+          <a:xfrm>
+            <a:off x="5295900" y="3790950"/>
+            <a:ext cx="3543300" cy="419100"/>
           </a:xfrm>
           <a:prstGeom prst="rect">
             <a:avLst/>
@@ -4570,30 +4451,30 @@
               <a:buNone/>
             </a:pPr>
             <a:r>
-              <a:rPr lang="en-US" sz="3300" dirty="0" spc="-82" kern="0">
-                <a:solidFill>
-                  <a:srgbClr val="F3EEE3"/>
+              <a:rPr lang="en-US" sz="2400" dirty="0" spc="-2" kern="0">
+                <a:solidFill>
+                  <a:srgbClr val="FFB454"/>
                 </a:solidFill>
                 <a:latin typeface="Bricolage Grotesque ExtraBold" pitchFamily="34" charset="0"/>
                 <a:ea typeface="Bricolage Grotesque ExtraBold" pitchFamily="34" charset="-122"/>
                 <a:cs typeface="Bricolage Grotesque ExtraBold" pitchFamily="34" charset="-120"/>
               </a:rPr>
-              <a:t>OWASP</a:t>
-            </a:r>
-            <a:endParaRPr lang="en-US" sz="3300" dirty="0"/>
+              <a:t>GCM</a:t>
+            </a:r>
+            <a:endParaRPr lang="en-US" sz="2400" dirty="0"/>
           </a:p>
         </p:txBody>
       </p:sp>
       <p:sp>
         <p:nvSpPr>
-          <p:cNvPr id="26" name="Text 24"/>
-          <p:cNvSpPr/>
-          <p:nvPr/>
-        </p:nvSpPr>
-        <p:spPr>
-          <a:xfrm>
-            <a:off x="5372100" y="5962650"/>
-            <a:ext cx="3352800" cy="590550"/>
+          <p:cNvPr id="25" name="Text 23"/>
+          <p:cNvSpPr/>
+          <p:nvPr/>
+        </p:nvSpPr>
+        <p:spPr>
+          <a:xfrm>
+            <a:off x="5295900" y="4267200"/>
+            <a:ext cx="3543300" cy="571500"/>
           </a:xfrm>
           <a:prstGeom prst="rect">
             <a:avLst/>
@@ -4612,6 +4493,17 @@
               <a:buNone/>
             </a:pPr>
             <a:r>
+              <a:rPr lang="en-US" sz="1650" dirty="0" spc="-5" kern="0">
+                <a:solidFill>
+                  <a:srgbClr val="9A98A0"/>
+                </a:solidFill>
+                <a:latin typeface="Be Vietnam Pro" pitchFamily="34" charset="0"/>
+                <a:ea typeface="Be Vietnam Pro" pitchFamily="34" charset="-122"/>
+                <a:cs typeface="Be Vietnam Pro" pitchFamily="34" charset="-120"/>
+              </a:rPr>
+              <a:t>Galois/Counter</a:t>
+            </a:r>
+            <a:r>
               <a:rPr lang="en-US" sz="1650" dirty="0" spc="-3" kern="0">
                 <a:solidFill>
                   <a:srgbClr val="9A98A0"/>
@@ -4620,51 +4512,7 @@
                 <a:ea typeface="Be Vietnam Pro" pitchFamily="34" charset="-122"/>
                 <a:cs typeface="Be Vietnam Pro" pitchFamily="34" charset="-120"/>
               </a:rPr>
-              <a:t>Open</a:t>
-            </a:r>
-            <a:r>
-              <a:rPr lang="en-US" sz="1650" dirty="0" spc="-8" kern="0">
-                <a:solidFill>
-                  <a:srgbClr val="9A98A0"/>
-                </a:solidFill>
-                <a:latin typeface="Be Vietnam Pro" pitchFamily="34" charset="0"/>
-                <a:ea typeface="Be Vietnam Pro" pitchFamily="34" charset="-122"/>
-                <a:cs typeface="Be Vietnam Pro" pitchFamily="34" charset="-120"/>
-              </a:rPr>
-              <a:t> Worldwide</a:t>
-            </a:r>
-            <a:r>
-              <a:rPr lang="en-US" sz="1650" dirty="0" spc="-4" kern="0">
-                <a:solidFill>
-                  <a:srgbClr val="9A98A0"/>
-                </a:solidFill>
-                <a:latin typeface="Be Vietnam Pro" pitchFamily="34" charset="0"/>
-                <a:ea typeface="Be Vietnam Pro" pitchFamily="34" charset="-122"/>
-                <a:cs typeface="Be Vietnam Pro" pitchFamily="34" charset="-120"/>
-              </a:rPr>
-              <a:t> Application</a:t>
-            </a:r>
-            <a:r>
-              <a:rPr lang="en-US" sz="1650" dirty="0" spc="1" kern="0">
-                <a:solidFill>
-                  <a:srgbClr val="9A98A0"/>
-                </a:solidFill>
-                <a:latin typeface="Be Vietnam Pro" pitchFamily="34" charset="0"/>
-                <a:ea typeface="Be Vietnam Pro" pitchFamily="34" charset="-122"/>
-                <a:cs typeface="Be Vietnam Pro" pitchFamily="34" charset="-120"/>
-              </a:rPr>
-              <a:t> Security</a:t>
-            </a:r>
-            <a:r>
-              <a:rPr lang="en-US" sz="1650" dirty="0" spc="-16" kern="0">
-                <a:solidFill>
-                  <a:srgbClr val="9A98A0"/>
-                </a:solidFill>
-                <a:latin typeface="Be Vietnam Pro" pitchFamily="34" charset="0"/>
-                <a:ea typeface="Be Vietnam Pro" pitchFamily="34" charset="-122"/>
-                <a:cs typeface="Be Vietnam Pro" pitchFamily="34" charset="-120"/>
-              </a:rPr>
-              <a:t> Project</a:t>
+              <a:t> Mode</a:t>
             </a:r>
             <a:endParaRPr lang="en-US" sz="1650" dirty="0"/>
           </a:p>
@@ -4672,14 +4520,14 @@
       </p:sp>
       <p:sp>
         <p:nvSpPr>
-          <p:cNvPr id="27" name="Text 25"/>
-          <p:cNvSpPr/>
-          <p:nvPr/>
-        </p:nvSpPr>
-        <p:spPr>
-          <a:xfrm>
-            <a:off x="5372100" y="6610350"/>
-            <a:ext cx="3352800" cy="914400"/>
+          <p:cNvPr id="26" name="Text 24"/>
+          <p:cNvSpPr/>
+          <p:nvPr/>
+        </p:nvSpPr>
+        <p:spPr>
+          <a:xfrm>
+            <a:off x="5295900" y="4972050"/>
+            <a:ext cx="3543300" cy="342900"/>
           </a:xfrm>
           <a:prstGeom prst="rect">
             <a:avLst/>
@@ -4688,17 +4536,17 @@
           <a:ln/>
         </p:spPr>
         <p:txBody>
-          <a:bodyPr wrap="square" lIns="0" tIns="9716" rIns="0" bIns="-9716" rtlCol="0" anchor="t"/>
+          <a:bodyPr wrap="square" lIns="0" tIns="8906" rIns="0" bIns="-8906" rtlCol="0" anchor="t"/>
           <a:lstStyle/>
           <a:p>
             <a:pPr algn="l" indent="0" marL="0">
               <a:lnSpc>
-                <a:spcPts val="2340"/>
+                <a:spcPts val="2145"/>
               </a:lnSpc>
               <a:buNone/>
             </a:pPr>
             <a:r>
-              <a:rPr lang="en-US" sz="1800" dirty="0" spc="-21" kern="0">
+              <a:rPr lang="en-US" sz="1650" dirty="0" spc="0" kern="0">
                 <a:solidFill>
                   <a:srgbClr val="D8D3C4"/>
                 </a:solidFill>
@@ -4706,10 +4554,10 @@
                 <a:ea typeface="Be Vietnam Pro" pitchFamily="34" charset="-122"/>
                 <a:cs typeface="Be Vietnam Pro" pitchFamily="34" charset="-120"/>
               </a:rPr>
-              <a:t>tổ</a:t>
-            </a:r>
-            <a:r>
-              <a:rPr lang="en-US" sz="1800" dirty="0" spc="7" kern="0">
+              <a:t>mã</a:t>
+            </a:r>
+            <a:r>
+              <a:rPr lang="en-US" sz="1650" dirty="0" spc="-1" kern="0">
                 <a:solidFill>
                   <a:srgbClr val="D8D3C4"/>
                 </a:solidFill>
@@ -4717,10 +4565,10 @@
                 <a:ea typeface="Be Vietnam Pro" pitchFamily="34" charset="-122"/>
                 <a:cs typeface="Be Vietnam Pro" pitchFamily="34" charset="-120"/>
               </a:rPr>
-              <a:t> chức</a:t>
-            </a:r>
-            <a:r>
-              <a:rPr lang="en-US" sz="1800" dirty="0" spc="-1" kern="0">
+              <a:t> hóa,</a:t>
+            </a:r>
+            <a:r>
+              <a:rPr lang="en-US" sz="1650" dirty="0" spc="4" kern="0">
                 <a:solidFill>
                   <a:srgbClr val="D8D3C4"/>
                 </a:solidFill>
@@ -4728,10 +4576,10 @@
                 <a:ea typeface="Be Vietnam Pro" pitchFamily="34" charset="-122"/>
                 <a:cs typeface="Be Vietnam Pro" pitchFamily="34" charset="-120"/>
               </a:rPr>
-              <a:t> cộng</a:t>
-            </a:r>
-            <a:r>
-              <a:rPr lang="en-US" sz="1800" dirty="0" spc="5" kern="0">
+              <a:t> thẻ</a:t>
+            </a:r>
+            <a:r>
+              <a:rPr lang="en-US" sz="1650" dirty="0" spc="1" kern="0">
                 <a:solidFill>
                   <a:srgbClr val="D8D3C4"/>
                 </a:solidFill>
@@ -4739,10 +4587,10 @@
                 <a:ea typeface="Be Vietnam Pro" pitchFamily="34" charset="-122"/>
                 <a:cs typeface="Be Vietnam Pro" pitchFamily="34" charset="-120"/>
               </a:rPr>
-              <a:t> đồng</a:t>
-            </a:r>
-            <a:r>
-              <a:rPr lang="en-US" sz="1800" dirty="0" spc="-12" kern="0">
+              <a:t> kiểm:</a:t>
+            </a:r>
+            <a:r>
+              <a:rPr lang="en-US" sz="1650" dirty="0" spc="6" kern="0">
                 <a:solidFill>
                   <a:srgbClr val="D8D3C4"/>
                 </a:solidFill>
@@ -4750,10 +4598,10 @@
                 <a:ea typeface="Be Vietnam Pro" pitchFamily="34" charset="-122"/>
                 <a:cs typeface="Be Vietnam Pro" pitchFamily="34" charset="-120"/>
               </a:rPr>
-              <a:t> về</a:t>
-            </a:r>
-            <a:r>
-              <a:rPr lang="en-US" sz="1800" dirty="0" spc="-1" kern="0">
+              <a:t> sửa</a:t>
+            </a:r>
+            <a:r>
+              <a:rPr lang="en-US" sz="1650" dirty="0" spc="1" kern="0">
                 <a:solidFill>
                   <a:srgbClr val="D8D3C4"/>
                 </a:solidFill>
@@ -4761,10 +4609,10 @@
                 <a:ea typeface="Be Vietnam Pro" pitchFamily="34" charset="-122"/>
                 <a:cs typeface="Be Vietnam Pro" pitchFamily="34" charset="-120"/>
               </a:rPr>
-              <a:t> bảo</a:t>
-            </a:r>
-            <a:r>
-              <a:rPr lang="en-US" sz="1800" dirty="0" spc="-11" kern="0">
+              <a:t> tin</a:t>
+            </a:r>
+            <a:r>
+              <a:rPr lang="en-US" sz="1650" dirty="0" spc="-1" kern="0">
                 <a:solidFill>
                   <a:srgbClr val="D8D3C4"/>
                 </a:solidFill>
@@ -4772,10 +4620,10 @@
                 <a:ea typeface="Be Vietnam Pro" pitchFamily="34" charset="-122"/>
                 <a:cs typeface="Be Vietnam Pro" pitchFamily="34" charset="-120"/>
               </a:rPr>
-              <a:t> mật</a:t>
-            </a:r>
-            <a:r>
-              <a:rPr lang="en-US" sz="1800" dirty="0" spc="16" kern="0">
+              <a:t> báo</a:t>
+            </a:r>
+            <a:r>
+              <a:rPr lang="en-US" sz="1650" dirty="0" spc="0" kern="0">
                 <a:solidFill>
                   <a:srgbClr val="D8D3C4"/>
                 </a:solidFill>
@@ -4783,37 +4631,26 @@
                 <a:ea typeface="Be Vietnam Pro" pitchFamily="34" charset="-122"/>
                 <a:cs typeface="Be Vietnam Pro" pitchFamily="34" charset="-120"/>
               </a:rPr>
-              <a:t> ứng</a:t>
-            </a:r>
-            <a:r>
-              <a:rPr lang="en-US" sz="1800" dirty="0" spc="-2" kern="0">
-                <a:solidFill>
-                  <a:srgbClr val="D8D3C4"/>
-                </a:solidFill>
-                <a:latin typeface="Be Vietnam Pro" pitchFamily="34" charset="0"/>
-                <a:ea typeface="Be Vietnam Pro" pitchFamily="34" charset="-122"/>
-                <a:cs typeface="Be Vietnam Pro" pitchFamily="34" charset="-120"/>
-              </a:rPr>
-              <a:t> dụng</a:t>
-            </a:r>
-            <a:endParaRPr lang="en-US" sz="1800" dirty="0"/>
+              <a:t> lỗi</a:t>
+            </a:r>
+            <a:endParaRPr lang="en-US" sz="1650" dirty="0"/>
           </a:p>
         </p:txBody>
       </p:sp>
       <p:sp>
         <p:nvSpPr>
-          <p:cNvPr id="28" name="Shape 26"/>
-          <p:cNvSpPr/>
-          <p:nvPr/>
-        </p:nvSpPr>
-        <p:spPr>
-          <a:xfrm>
-            <a:off x="9296400" y="5162550"/>
-            <a:ext cx="3886200" cy="2438400"/>
+          <p:cNvPr id="27" name="Shape 25"/>
+          <p:cNvSpPr/>
+          <p:nvPr/>
+        </p:nvSpPr>
+        <p:spPr>
+          <a:xfrm>
+            <a:off x="9220200" y="3581400"/>
+            <a:ext cx="4000500" cy="1943100"/>
           </a:xfrm>
           <a:prstGeom prst="roundRect">
             <a:avLst>
-              <a:gd name="adj" fmla="val 9375"/>
+              <a:gd name="adj" fmla="val 10784"/>
             </a:avLst>
           </a:prstGeom>
           <a:solidFill>
@@ -4824,14 +4661,14 @@
       </p:sp>
       <p:sp>
         <p:nvSpPr>
-          <p:cNvPr id="29" name="Text 27"/>
-          <p:cNvSpPr/>
-          <p:nvPr/>
-        </p:nvSpPr>
-        <p:spPr>
-          <a:xfrm>
-            <a:off x="9563100" y="5353050"/>
-            <a:ext cx="3352800" cy="552450"/>
+          <p:cNvPr id="28" name="Text 26"/>
+          <p:cNvSpPr/>
+          <p:nvPr/>
+        </p:nvSpPr>
+        <p:spPr>
+          <a:xfrm>
+            <a:off x="9448800" y="3790950"/>
+            <a:ext cx="3543300" cy="419100"/>
           </a:xfrm>
           <a:prstGeom prst="rect">
             <a:avLst/>
@@ -4847,30 +4684,30 @@
               <a:buNone/>
             </a:pPr>
             <a:r>
-              <a:rPr lang="en-US" sz="3300" dirty="0" spc="-60" kern="0">
-                <a:solidFill>
-                  <a:srgbClr val="F3EEE3"/>
+              <a:rPr lang="en-US" sz="2400" dirty="0" spc="1" kern="0">
+                <a:solidFill>
+                  <a:srgbClr val="FFB454"/>
                 </a:solidFill>
                 <a:latin typeface="Bricolage Grotesque ExtraBold" pitchFamily="34" charset="0"/>
                 <a:ea typeface="Bricolage Grotesque ExtraBold" pitchFamily="34" charset="-122"/>
                 <a:cs typeface="Bricolage Grotesque ExtraBold" pitchFamily="34" charset="-120"/>
               </a:rPr>
-              <a:t>ASVS</a:t>
-            </a:r>
-            <a:endParaRPr lang="en-US" sz="3300" dirty="0"/>
+              <a:t>SHA</a:t>
+            </a:r>
+            <a:endParaRPr lang="en-US" sz="2400" dirty="0"/>
           </a:p>
         </p:txBody>
       </p:sp>
       <p:sp>
         <p:nvSpPr>
-          <p:cNvPr id="30" name="Text 28"/>
-          <p:cNvSpPr/>
-          <p:nvPr/>
-        </p:nvSpPr>
-        <p:spPr>
-          <a:xfrm>
-            <a:off x="9563100" y="5962650"/>
-            <a:ext cx="3543300" cy="590550"/>
+          <p:cNvPr id="29" name="Text 27"/>
+          <p:cNvSpPr/>
+          <p:nvPr/>
+        </p:nvSpPr>
+        <p:spPr>
+          <a:xfrm>
+            <a:off x="9448800" y="4267200"/>
+            <a:ext cx="3543300" cy="571500"/>
           </a:xfrm>
           <a:prstGeom prst="rect">
             <a:avLst/>
@@ -4889,7 +4726,7 @@
               <a:buNone/>
             </a:pPr>
             <a:r>
-              <a:rPr lang="en-US" sz="1650" dirty="0" spc="-4" kern="0">
+              <a:rPr lang="en-US" sz="1650" dirty="0" spc="-14" kern="0">
                 <a:solidFill>
                   <a:srgbClr val="9A98A0"/>
                 </a:solidFill>
@@ -4897,10 +4734,10 @@
                 <a:ea typeface="Be Vietnam Pro" pitchFamily="34" charset="-122"/>
                 <a:cs typeface="Be Vietnam Pro" pitchFamily="34" charset="-120"/>
               </a:rPr>
-              <a:t>Application</a:t>
-            </a:r>
-            <a:r>
-              <a:rPr lang="en-US" sz="1650" dirty="0" spc="1" kern="0">
+              <a:t>Secure</a:t>
+            </a:r>
+            <a:r>
+              <a:rPr lang="en-US" sz="1650" dirty="0" spc="0" kern="0">
                 <a:solidFill>
                   <a:srgbClr val="9A98A0"/>
                 </a:solidFill>
@@ -4908,10 +4745,10 @@
                 <a:ea typeface="Be Vietnam Pro" pitchFamily="34" charset="-122"/>
                 <a:cs typeface="Be Vietnam Pro" pitchFamily="34" charset="-120"/>
               </a:rPr>
-              <a:t> Security</a:t>
-            </a:r>
-            <a:r>
-              <a:rPr lang="en-US" sz="1650" dirty="0" spc="-6" kern="0">
+              <a:t> Hash</a:t>
+            </a:r>
+            <a:r>
+              <a:rPr lang="en-US" sz="1650" dirty="0" spc="-1" kern="0">
                 <a:solidFill>
                   <a:srgbClr val="9A98A0"/>
                 </a:solidFill>
@@ -4919,18 +4756,7 @@
                 <a:ea typeface="Be Vietnam Pro" pitchFamily="34" charset="-122"/>
                 <a:cs typeface="Be Vietnam Pro" pitchFamily="34" charset="-120"/>
               </a:rPr>
-              <a:t> Verification</a:t>
-            </a:r>
-            <a:r>
-              <a:rPr lang="en-US" sz="1650" dirty="0" spc="-11" kern="0">
-                <a:solidFill>
-                  <a:srgbClr val="9A98A0"/>
-                </a:solidFill>
-                <a:latin typeface="Be Vietnam Pro" pitchFamily="34" charset="0"/>
-                <a:ea typeface="Be Vietnam Pro" pitchFamily="34" charset="-122"/>
-                <a:cs typeface="Be Vietnam Pro" pitchFamily="34" charset="-120"/>
-              </a:rPr>
-              <a:t> Standard</a:t>
+              <a:t> Algorithm</a:t>
             </a:r>
             <a:endParaRPr lang="en-US" sz="1650" dirty="0"/>
           </a:p>
@@ -4938,14 +4764,14 @@
       </p:sp>
       <p:sp>
         <p:nvSpPr>
-          <p:cNvPr id="31" name="Text 29"/>
-          <p:cNvSpPr/>
-          <p:nvPr/>
-        </p:nvSpPr>
-        <p:spPr>
-          <a:xfrm>
-            <a:off x="9563100" y="6610350"/>
-            <a:ext cx="3352800" cy="914400"/>
+          <p:cNvPr id="30" name="Text 28"/>
+          <p:cNvSpPr/>
+          <p:nvPr/>
+        </p:nvSpPr>
+        <p:spPr>
+          <a:xfrm>
+            <a:off x="9448800" y="4972050"/>
+            <a:ext cx="3543300" cy="342900"/>
           </a:xfrm>
           <a:prstGeom prst="rect">
             <a:avLst/>
@@ -4954,17 +4780,17 @@
           <a:ln/>
         </p:spPr>
         <p:txBody>
-          <a:bodyPr wrap="square" lIns="0" tIns="9716" rIns="0" bIns="-9716" rtlCol="0" anchor="t"/>
+          <a:bodyPr wrap="square" lIns="0" tIns="8906" rIns="0" bIns="-8906" rtlCol="0" anchor="t"/>
           <a:lstStyle/>
           <a:p>
             <a:pPr algn="l" indent="0" marL="0">
               <a:lnSpc>
-                <a:spcPts val="2340"/>
+                <a:spcPts val="2145"/>
               </a:lnSpc>
               <a:buNone/>
             </a:pPr>
             <a:r>
-              <a:rPr lang="en-US" sz="1800" dirty="0" spc="-6" kern="0">
+              <a:rPr lang="en-US" sz="1650" dirty="0" spc="0" kern="0">
                 <a:solidFill>
                   <a:srgbClr val="D8D3C4"/>
                 </a:solidFill>
@@ -4972,10 +4798,10 @@
                 <a:ea typeface="Be Vietnam Pro" pitchFamily="34" charset="-122"/>
                 <a:cs typeface="Be Vietnam Pro" pitchFamily="34" charset="-120"/>
               </a:rPr>
-              <a:t>bộ</a:t>
-            </a:r>
-            <a:r>
-              <a:rPr lang="en-US" sz="1800" dirty="0" spc="-18" kern="0">
+              <a:t>họ</a:t>
+            </a:r>
+            <a:r>
+              <a:rPr lang="en-US" sz="1650" dirty="0" spc="-3" kern="0">
                 <a:solidFill>
                   <a:srgbClr val="D8D3C4"/>
                 </a:solidFill>
@@ -4983,10 +4809,10 @@
                 <a:ea typeface="Be Vietnam Pro" pitchFamily="34" charset="-122"/>
                 <a:cs typeface="Be Vietnam Pro" pitchFamily="34" charset="-120"/>
               </a:rPr>
-              <a:t> yêu</a:t>
-            </a:r>
-            <a:r>
-              <a:rPr lang="en-US" sz="1800" dirty="0" spc="0" kern="0">
+              <a:t> thuật</a:t>
+            </a:r>
+            <a:r>
+              <a:rPr lang="en-US" sz="1650" dirty="0" spc="-7" kern="0">
                 <a:solidFill>
                   <a:srgbClr val="D8D3C4"/>
                 </a:solidFill>
@@ -4994,10 +4820,10 @@
                 <a:ea typeface="Be Vietnam Pro" pitchFamily="34" charset="-122"/>
                 <a:cs typeface="Be Vietnam Pro" pitchFamily="34" charset="-120"/>
               </a:rPr>
-              <a:t> cầu an</a:t>
-            </a:r>
-            <a:r>
-              <a:rPr lang="en-US" sz="1800" dirty="0" spc="-2" kern="0">
+              <a:t> toán</a:t>
+            </a:r>
+            <a:r>
+              <a:rPr lang="en-US" sz="1650" dirty="0" spc="-1" kern="0">
                 <a:solidFill>
                   <a:srgbClr val="D8D3C4"/>
                 </a:solidFill>
@@ -5005,10 +4831,10 @@
                 <a:ea typeface="Be Vietnam Pro" pitchFamily="34" charset="-122"/>
                 <a:cs typeface="Be Vietnam Pro" pitchFamily="34" charset="-120"/>
               </a:rPr>
-              <a:t> ninh</a:t>
-            </a:r>
-            <a:r>
-              <a:rPr lang="en-US" sz="1800" dirty="0" spc="3" kern="0">
+              <a:t> băm,</a:t>
+            </a:r>
+            <a:r>
+              <a:rPr lang="en-US" sz="1650" dirty="0" spc="-7" kern="0">
                 <a:solidFill>
                   <a:srgbClr val="D8D3C4"/>
                 </a:solidFill>
@@ -5016,10 +4842,10 @@
                 <a:ea typeface="Be Vietnam Pro" pitchFamily="34" charset="-122"/>
                 <a:cs typeface="Be Vietnam Pro" pitchFamily="34" charset="-120"/>
               </a:rPr>
-              <a:t> của</a:t>
-            </a:r>
-            <a:r>
-              <a:rPr lang="en-US" sz="1800" dirty="0" spc="-39" kern="0">
+              <a:t> gồm</a:t>
+            </a:r>
+            <a:r>
+              <a:rPr lang="en-US" sz="1650" dirty="0" spc="0" kern="0">
                 <a:solidFill>
                   <a:srgbClr val="D8D3C4"/>
                 </a:solidFill>
@@ -5027,70 +4853,26 @@
                 <a:ea typeface="Be Vietnam Pro" pitchFamily="34" charset="-122"/>
                 <a:cs typeface="Be Vietnam Pro" pitchFamily="34" charset="-120"/>
               </a:rPr>
-              <a:t> OWASP</a:t>
-            </a:r>
-            <a:r>
-              <a:rPr lang="en-US" sz="1800" dirty="0" spc="2" kern="0">
-                <a:solidFill>
-                  <a:srgbClr val="D8D3C4"/>
-                </a:solidFill>
-                <a:latin typeface="Be Vietnam Pro" pitchFamily="34" charset="0"/>
-                <a:ea typeface="Be Vietnam Pro" pitchFamily="34" charset="-122"/>
-                <a:cs typeface="Be Vietnam Pro" pitchFamily="34" charset="-120"/>
-              </a:rPr>
-              <a:t> cho</a:t>
-            </a:r>
-            <a:r>
-              <a:rPr lang="en-US" sz="1800" dirty="0" spc="16" kern="0">
-                <a:solidFill>
-                  <a:srgbClr val="D8D3C4"/>
-                </a:solidFill>
-                <a:latin typeface="Be Vietnam Pro" pitchFamily="34" charset="0"/>
-                <a:ea typeface="Be Vietnam Pro" pitchFamily="34" charset="-122"/>
-                <a:cs typeface="Be Vietnam Pro" pitchFamily="34" charset="-120"/>
-              </a:rPr>
-              <a:t> ứng</a:t>
-            </a:r>
-            <a:r>
-              <a:rPr lang="en-US" sz="1800" dirty="0" spc="-2" kern="0">
-                <a:solidFill>
-                  <a:srgbClr val="D8D3C4"/>
-                </a:solidFill>
-                <a:latin typeface="Be Vietnam Pro" pitchFamily="34" charset="0"/>
-                <a:ea typeface="Be Vietnam Pro" pitchFamily="34" charset="-122"/>
-                <a:cs typeface="Be Vietnam Pro" pitchFamily="34" charset="-120"/>
-              </a:rPr>
-              <a:t> dụng</a:t>
-            </a:r>
-            <a:r>
-              <a:rPr lang="en-US" sz="1800" dirty="0" spc="-7" kern="0">
-                <a:solidFill>
-                  <a:srgbClr val="D8D3C4"/>
-                </a:solidFill>
-                <a:latin typeface="Be Vietnam Pro" pitchFamily="34" charset="0"/>
-                <a:ea typeface="Be Vietnam Pro" pitchFamily="34" charset="-122"/>
-                <a:cs typeface="Be Vietnam Pro" pitchFamily="34" charset="-120"/>
-              </a:rPr>
-              <a:t> web</a:t>
-            </a:r>
-            <a:endParaRPr lang="en-US" sz="1800" dirty="0"/>
+              <a:t> SHA-256</a:t>
+            </a:r>
+            <a:endParaRPr lang="en-US" sz="1650" dirty="0"/>
           </a:p>
         </p:txBody>
       </p:sp>
       <p:sp>
         <p:nvSpPr>
-          <p:cNvPr id="32" name="Shape 30"/>
-          <p:cNvSpPr/>
-          <p:nvPr/>
-        </p:nvSpPr>
-        <p:spPr>
-          <a:xfrm>
-            <a:off x="13487400" y="5162550"/>
-            <a:ext cx="3886200" cy="2438400"/>
+          <p:cNvPr id="31" name="Shape 29"/>
+          <p:cNvSpPr/>
+          <p:nvPr/>
+        </p:nvSpPr>
+        <p:spPr>
+          <a:xfrm>
+            <a:off x="13373100" y="3581400"/>
+            <a:ext cx="4000500" cy="1943100"/>
           </a:xfrm>
           <a:prstGeom prst="roundRect">
             <a:avLst>
-              <a:gd name="adj" fmla="val 9375"/>
+              <a:gd name="adj" fmla="val 10784"/>
             </a:avLst>
           </a:prstGeom>
           <a:solidFill>
@@ -5101,14 +4883,14 @@
       </p:sp>
       <p:sp>
         <p:nvSpPr>
-          <p:cNvPr id="33" name="Text 31"/>
-          <p:cNvSpPr/>
-          <p:nvPr/>
-        </p:nvSpPr>
-        <p:spPr>
-          <a:xfrm>
-            <a:off x="13754100" y="5353050"/>
-            <a:ext cx="3352800" cy="552450"/>
+          <p:cNvPr id="32" name="Text 30"/>
+          <p:cNvSpPr/>
+          <p:nvPr/>
+        </p:nvSpPr>
+        <p:spPr>
+          <a:xfrm>
+            <a:off x="13601700" y="3790950"/>
+            <a:ext cx="3543300" cy="419100"/>
           </a:xfrm>
           <a:prstGeom prst="rect">
             <a:avLst/>
@@ -5124,7 +4906,7 @@
               <a:buNone/>
             </a:pPr>
             <a:r>
-              <a:rPr lang="en-US" sz="3300" dirty="0" spc="1" kern="0">
+              <a:rPr lang="en-US" sz="2400" dirty="0" spc="-61" kern="0">
                 <a:solidFill>
                   <a:srgbClr val="F3EEE3"/>
                 </a:solidFill>
@@ -5132,22 +4914,22 @@
                 <a:ea typeface="Bricolage Grotesque ExtraBold" pitchFamily="34" charset="-122"/>
                 <a:cs typeface="Bricolage Grotesque ExtraBold" pitchFamily="34" charset="-120"/>
               </a:rPr>
-              <a:t>MDN</a:t>
-            </a:r>
-            <a:endParaRPr lang="en-US" sz="3300" dirty="0"/>
+              <a:t>OWASP</a:t>
+            </a:r>
+            <a:endParaRPr lang="en-US" sz="2400" dirty="0"/>
           </a:p>
         </p:txBody>
       </p:sp>
       <p:sp>
         <p:nvSpPr>
-          <p:cNvPr id="34" name="Text 32"/>
-          <p:cNvSpPr/>
-          <p:nvPr/>
-        </p:nvSpPr>
-        <p:spPr>
-          <a:xfrm>
-            <a:off x="13754100" y="5962650"/>
-            <a:ext cx="3352800" cy="590550"/>
+          <p:cNvPr id="33" name="Text 31"/>
+          <p:cNvSpPr/>
+          <p:nvPr/>
+        </p:nvSpPr>
+        <p:spPr>
+          <a:xfrm>
+            <a:off x="13601700" y="4267200"/>
+            <a:ext cx="3543300" cy="571500"/>
           </a:xfrm>
           <a:prstGeom prst="rect">
             <a:avLst/>
@@ -5174,10 +4956,10 @@
                 <a:ea typeface="Be Vietnam Pro" pitchFamily="34" charset="-122"/>
                 <a:cs typeface="Be Vietnam Pro" pitchFamily="34" charset="-120"/>
               </a:rPr>
-              <a:t>Mozilla</a:t>
-            </a:r>
-            <a:r>
-              <a:rPr lang="en-US" sz="1650" dirty="0" spc="-7" kern="0">
+              <a:t>Open</a:t>
+            </a:r>
+            <a:r>
+              <a:rPr lang="en-US" sz="1650" dirty="0" spc="-8" kern="0">
                 <a:solidFill>
                   <a:srgbClr val="9A98A0"/>
                 </a:solidFill>
@@ -5185,10 +4967,10 @@
                 <a:ea typeface="Be Vietnam Pro" pitchFamily="34" charset="-122"/>
                 <a:cs typeface="Be Vietnam Pro" pitchFamily="34" charset="-120"/>
               </a:rPr>
-              <a:t> Developer</a:t>
-            </a:r>
-            <a:r>
-              <a:rPr lang="en-US" sz="1650" dirty="0" spc="-6" kern="0">
+              <a:t> Worldwide</a:t>
+            </a:r>
+            <a:r>
+              <a:rPr lang="en-US" sz="1650" dirty="0" spc="-4" kern="0">
                 <a:solidFill>
                   <a:srgbClr val="9A98A0"/>
                 </a:solidFill>
@@ -5196,7 +4978,29 @@
                 <a:ea typeface="Be Vietnam Pro" pitchFamily="34" charset="-122"/>
                 <a:cs typeface="Be Vietnam Pro" pitchFamily="34" charset="-120"/>
               </a:rPr>
-              <a:t> Network</a:t>
+              <a:t> Application</a:t>
+            </a:r>
+            <a:r>
+              <a:rPr lang="en-US" sz="1650" dirty="0" spc="1" kern="0">
+                <a:solidFill>
+                  <a:srgbClr val="9A98A0"/>
+                </a:solidFill>
+                <a:latin typeface="Be Vietnam Pro" pitchFamily="34" charset="0"/>
+                <a:ea typeface="Be Vietnam Pro" pitchFamily="34" charset="-122"/>
+                <a:cs typeface="Be Vietnam Pro" pitchFamily="34" charset="-120"/>
+              </a:rPr>
+              <a:t> Security</a:t>
+            </a:r>
+            <a:r>
+              <a:rPr lang="en-US" sz="1650" dirty="0" spc="-16" kern="0">
+                <a:solidFill>
+                  <a:srgbClr val="9A98A0"/>
+                </a:solidFill>
+                <a:latin typeface="Be Vietnam Pro" pitchFamily="34" charset="0"/>
+                <a:ea typeface="Be Vietnam Pro" pitchFamily="34" charset="-122"/>
+                <a:cs typeface="Be Vietnam Pro" pitchFamily="34" charset="-120"/>
+              </a:rPr>
+              <a:t> Project</a:t>
             </a:r>
             <a:endParaRPr lang="en-US" sz="1650" dirty="0"/>
           </a:p>
@@ -5204,14 +5008,14 @@
       </p:sp>
       <p:sp>
         <p:nvSpPr>
-          <p:cNvPr id="35" name="Text 33"/>
-          <p:cNvSpPr/>
-          <p:nvPr/>
-        </p:nvSpPr>
-        <p:spPr>
-          <a:xfrm>
-            <a:off x="13754100" y="6610350"/>
-            <a:ext cx="3352800" cy="914400"/>
+          <p:cNvPr id="34" name="Text 32"/>
+          <p:cNvSpPr/>
+          <p:nvPr/>
+        </p:nvSpPr>
+        <p:spPr>
+          <a:xfrm>
+            <a:off x="13601700" y="4972050"/>
+            <a:ext cx="3543300" cy="342900"/>
           </a:xfrm>
           <a:prstGeom prst="rect">
             <a:avLst/>
@@ -5220,17 +5024,17 @@
           <a:ln/>
         </p:spPr>
         <p:txBody>
-          <a:bodyPr wrap="square" lIns="0" tIns="9716" rIns="0" bIns="-9716" rtlCol="0" anchor="t"/>
+          <a:bodyPr wrap="square" lIns="0" tIns="8906" rIns="0" bIns="-8906" rtlCol="0" anchor="t"/>
           <a:lstStyle/>
           <a:p>
             <a:pPr algn="l" indent="0" marL="0">
               <a:lnSpc>
-                <a:spcPts val="2340"/>
+                <a:spcPts val="2145"/>
               </a:lnSpc>
               <a:buNone/>
             </a:pPr>
             <a:r>
-              <a:rPr lang="en-US" sz="1800" dirty="0" spc="-13" kern="0">
+              <a:rPr lang="en-US" sz="1650" dirty="0" spc="-2" kern="0">
                 <a:solidFill>
                   <a:srgbClr val="D8D3C4"/>
                 </a:solidFill>
@@ -5238,10 +5042,10 @@
                 <a:ea typeface="Be Vietnam Pro" pitchFamily="34" charset="-122"/>
                 <a:cs typeface="Be Vietnam Pro" pitchFamily="34" charset="-120"/>
               </a:rPr>
-              <a:t>tài</a:t>
-            </a:r>
-            <a:r>
-              <a:rPr lang="en-US" sz="1800" dirty="0" spc="-3" kern="0">
+              <a:t>cộng</a:t>
+            </a:r>
+            <a:r>
+              <a:rPr lang="en-US" sz="1650" dirty="0" spc="8" kern="0">
                 <a:solidFill>
                   <a:srgbClr val="D8D3C4"/>
                 </a:solidFill>
@@ -5249,10 +5053,10 @@
                 <a:ea typeface="Be Vietnam Pro" pitchFamily="34" charset="-122"/>
                 <a:cs typeface="Be Vietnam Pro" pitchFamily="34" charset="-120"/>
               </a:rPr>
-              <a:t> liệu</a:t>
-            </a:r>
-            <a:r>
-              <a:rPr lang="en-US" sz="1800" dirty="0" spc="-15" kern="0">
+              <a:t> đồng</a:t>
+            </a:r>
+            <a:r>
+              <a:rPr lang="en-US" sz="1650" dirty="0" spc="-1" kern="0">
                 <a:solidFill>
                   <a:srgbClr val="D8D3C4"/>
                 </a:solidFill>
@@ -5260,10 +5064,10 @@
                 <a:ea typeface="Be Vietnam Pro" pitchFamily="34" charset="-122"/>
                 <a:cs typeface="Be Vietnam Pro" pitchFamily="34" charset="-120"/>
               </a:rPr>
-              <a:t> tra</a:t>
-            </a:r>
-            <a:r>
-              <a:rPr lang="en-US" sz="1800" dirty="0" spc="13" kern="0">
+              <a:t> bảo</a:t>
+            </a:r>
+            <a:r>
+              <a:rPr lang="en-US" sz="1650" dirty="0" spc="-6" kern="0">
                 <a:solidFill>
                   <a:srgbClr val="D8D3C4"/>
                 </a:solidFill>
@@ -5271,10 +5075,10 @@
                 <a:ea typeface="Be Vietnam Pro" pitchFamily="34" charset="-122"/>
                 <a:cs typeface="Be Vietnam Pro" pitchFamily="34" charset="-120"/>
               </a:rPr>
-              <a:t> cứu</a:t>
-            </a:r>
-            <a:r>
-              <a:rPr lang="en-US" sz="1800" dirty="0" spc="-1" kern="0">
+              <a:t> mật</a:t>
+            </a:r>
+            <a:r>
+              <a:rPr lang="en-US" sz="1650" dirty="0" spc="17" kern="0">
                 <a:solidFill>
                   <a:srgbClr val="D8D3C4"/>
                 </a:solidFill>
@@ -5282,10 +5086,10 @@
                 <a:ea typeface="Be Vietnam Pro" pitchFamily="34" charset="-122"/>
                 <a:cs typeface="Be Vietnam Pro" pitchFamily="34" charset="-120"/>
               </a:rPr>
-              <a:t> công</a:t>
-            </a:r>
-            <a:r>
-              <a:rPr lang="en-US" sz="1800" dirty="0" spc="-3" kern="0">
+              <a:t> ứng</a:t>
+            </a:r>
+            <a:r>
+              <a:rPr lang="en-US" sz="1650" dirty="0" spc="-1" kern="0">
                 <a:solidFill>
                   <a:srgbClr val="D8D3C4"/>
                 </a:solidFill>
@@ -5293,55 +5097,44 @@
                 <a:ea typeface="Be Vietnam Pro" pitchFamily="34" charset="-122"/>
                 <a:cs typeface="Be Vietnam Pro" pitchFamily="34" charset="-120"/>
               </a:rPr>
-              <a:t> nghệ</a:t>
-            </a:r>
-            <a:r>
-              <a:rPr lang="en-US" sz="1800" dirty="0" spc="-8" kern="0">
-                <a:solidFill>
-                  <a:srgbClr val="D8D3C4"/>
-                </a:solidFill>
-                <a:latin typeface="Be Vietnam Pro" pitchFamily="34" charset="0"/>
-                <a:ea typeface="Be Vietnam Pro" pitchFamily="34" charset="-122"/>
-                <a:cs typeface="Be Vietnam Pro" pitchFamily="34" charset="-120"/>
-              </a:rPr>
-              <a:t> web</a:t>
-            </a:r>
-            <a:r>
-              <a:rPr lang="en-US" sz="1800" dirty="0" spc="3" kern="0">
-                <a:solidFill>
-                  <a:srgbClr val="D8D3C4"/>
-                </a:solidFill>
-                <a:latin typeface="Be Vietnam Pro" pitchFamily="34" charset="0"/>
-                <a:ea typeface="Be Vietnam Pro" pitchFamily="34" charset="-122"/>
-                <a:cs typeface="Be Vietnam Pro" pitchFamily="34" charset="-120"/>
-              </a:rPr>
-              <a:t> của</a:t>
-            </a:r>
-            <a:r>
-              <a:rPr lang="en-US" sz="1800" dirty="0" spc="1" kern="0">
-                <a:solidFill>
-                  <a:srgbClr val="D8D3C4"/>
-                </a:solidFill>
-                <a:latin typeface="Be Vietnam Pro" pitchFamily="34" charset="0"/>
-                <a:ea typeface="Be Vietnam Pro" pitchFamily="34" charset="-122"/>
-                <a:cs typeface="Be Vietnam Pro" pitchFamily="34" charset="-120"/>
-              </a:rPr>
-              <a:t> Mozilla</a:t>
-            </a:r>
-            <a:endParaRPr lang="en-US" sz="1800" dirty="0"/>
+              <a:t> dụng</a:t>
+            </a:r>
+            <a:endParaRPr lang="en-US" sz="1650" dirty="0"/>
           </a:p>
         </p:txBody>
       </p:sp>
       <p:sp>
         <p:nvSpPr>
+          <p:cNvPr id="35" name="Shape 33"/>
+          <p:cNvSpPr/>
+          <p:nvPr/>
+        </p:nvSpPr>
+        <p:spPr>
+          <a:xfrm>
+            <a:off x="914400" y="5676900"/>
+            <a:ext cx="4000500" cy="1943100"/>
+          </a:xfrm>
+          <a:prstGeom prst="roundRect">
+            <a:avLst>
+              <a:gd name="adj" fmla="val 10784"/>
+            </a:avLst>
+          </a:prstGeom>
+          <a:solidFill>
+            <a:srgbClr val="1E212B"/>
+          </a:solidFill>
+          <a:ln/>
+        </p:spPr>
+      </p:sp>
+      <p:sp>
+        <p:nvSpPr>
           <p:cNvPr id="36" name="Text 34"/>
           <p:cNvSpPr/>
           <p:nvPr/>
         </p:nvSpPr>
         <p:spPr>
           <a:xfrm>
-            <a:off x="914400" y="7905750"/>
-            <a:ext cx="5715000" cy="285750"/>
+            <a:off x="1143000" y="5886450"/>
+            <a:ext cx="3543300" cy="419100"/>
           </a:xfrm>
           <a:prstGeom prst="rect">
             <a:avLst/>
@@ -5357,37 +5150,90 @@
               <a:buNone/>
             </a:pPr>
             <a:r>
-              <a:rPr lang="en-US" sz="1650" b="1" spc="227" kern="0" dirty="0">
-                <a:solidFill>
-                  <a:srgbClr val="FF6A4D"/>
-                </a:solidFill>
-                <a:latin typeface="Be Vietnam Pro" pitchFamily="34" charset="0"/>
-                <a:ea typeface="Be Vietnam Pro" pitchFamily="34" charset="-122"/>
-                <a:cs typeface="Be Vietnam Pro" pitchFamily="34" charset="-120"/>
-              </a:rPr>
-              <a:t>NGUỒN</a:t>
-            </a:r>
-            <a:r>
-              <a:rPr lang="en-US" sz="1650" b="1" spc="229" kern="0" dirty="0">
-                <a:solidFill>
-                  <a:srgbClr val="FF6A4D"/>
-                </a:solidFill>
-                <a:latin typeface="Be Vietnam Pro" pitchFamily="34" charset="0"/>
-                <a:ea typeface="Be Vietnam Pro" pitchFamily="34" charset="-122"/>
-                <a:cs typeface="Be Vietnam Pro" pitchFamily="34" charset="-120"/>
-              </a:rPr>
-              <a:t> ĐỐI</a:t>
-            </a:r>
-            <a:r>
-              <a:rPr lang="en-US" sz="1650" b="1" spc="227" kern="0" dirty="0">
-                <a:solidFill>
-                  <a:srgbClr val="FF6A4D"/>
-                </a:solidFill>
-                <a:latin typeface="Be Vietnam Pro" pitchFamily="34" charset="0"/>
-                <a:ea typeface="Be Vietnam Pro" pitchFamily="34" charset="-122"/>
-                <a:cs typeface="Be Vietnam Pro" pitchFamily="34" charset="-120"/>
-              </a:rPr>
-              <a:t> CHIẾU</a:t>
+              <a:rPr lang="en-US" sz="2400" dirty="0" spc="-43" kern="0">
+                <a:solidFill>
+                  <a:srgbClr val="F3EEE3"/>
+                </a:solidFill>
+                <a:latin typeface="Bricolage Grotesque ExtraBold" pitchFamily="34" charset="0"/>
+                <a:ea typeface="Bricolage Grotesque ExtraBold" pitchFamily="34" charset="-122"/>
+                <a:cs typeface="Bricolage Grotesque ExtraBold" pitchFamily="34" charset="-120"/>
+              </a:rPr>
+              <a:t>ASVS</a:t>
+            </a:r>
+            <a:endParaRPr lang="en-US" sz="2400" dirty="0"/>
+          </a:p>
+        </p:txBody>
+      </p:sp>
+      <p:sp>
+        <p:nvSpPr>
+          <p:cNvPr id="37" name="Text 35"/>
+          <p:cNvSpPr/>
+          <p:nvPr/>
+        </p:nvSpPr>
+        <p:spPr>
+          <a:xfrm>
+            <a:off x="1143000" y="6362700"/>
+            <a:ext cx="3543300" cy="571500"/>
+          </a:xfrm>
+          <a:prstGeom prst="rect">
+            <a:avLst/>
+          </a:prstGeom>
+          <a:noFill/>
+          <a:ln/>
+        </p:spPr>
+        <p:txBody>
+          <a:bodyPr wrap="square" lIns="0" tIns="11509" rIns="0" bIns="-11509" rtlCol="0" anchor="t"/>
+          <a:lstStyle/>
+          <a:p>
+            <a:pPr algn="l" indent="0" marL="0">
+              <a:lnSpc>
+                <a:spcPts val="2063"/>
+              </a:lnSpc>
+              <a:buNone/>
+            </a:pPr>
+            <a:r>
+              <a:rPr lang="en-US" sz="1650" dirty="0" spc="-4" kern="0">
+                <a:solidFill>
+                  <a:srgbClr val="9A98A0"/>
+                </a:solidFill>
+                <a:latin typeface="Be Vietnam Pro" pitchFamily="34" charset="0"/>
+                <a:ea typeface="Be Vietnam Pro" pitchFamily="34" charset="-122"/>
+                <a:cs typeface="Be Vietnam Pro" pitchFamily="34" charset="-120"/>
+              </a:rPr>
+              <a:t>Application</a:t>
+            </a:r>
+            <a:r>
+              <a:rPr lang="en-US" sz="1650" dirty="0" spc="1" kern="0">
+                <a:solidFill>
+                  <a:srgbClr val="9A98A0"/>
+                </a:solidFill>
+                <a:latin typeface="Be Vietnam Pro" pitchFamily="34" charset="0"/>
+                <a:ea typeface="Be Vietnam Pro" pitchFamily="34" charset="-122"/>
+                <a:cs typeface="Be Vietnam Pro" pitchFamily="34" charset="-120"/>
+              </a:rPr>
+              <a:t> Security</a:t>
+            </a:r>
+            <a:r>
+              <a:rPr lang="en-US" sz="1650" dirty="0" spc="-6" kern="0">
+                <a:solidFill>
+                  <a:srgbClr val="9A98A0"/>
+                </a:solidFill>
+                <a:latin typeface="Be Vietnam Pro" pitchFamily="34" charset="0"/>
+                <a:ea typeface="Be Vietnam Pro" pitchFamily="34" charset="-122"/>
+                <a:cs typeface="Be Vietnam Pro" pitchFamily="34" charset="-120"/>
+              </a:rPr>
+              <a:t> Verification</a:t>
+            </a:r>
+            <a:r>
+              <a:rPr lang="en-US" sz="1650" dirty="0" spc="-11" kern="0">
+                <a:solidFill>
+                  <a:srgbClr val="9A98A0"/>
+                </a:solidFill>
+                <a:latin typeface="Be Vietnam Pro" pitchFamily="34" charset="0"/>
+                <a:ea typeface="Be Vietnam Pro" pitchFamily="34" charset="-122"/>
+                <a:cs typeface="Be Vietnam Pro" pitchFamily="34" charset="-120"/>
+              </a:rPr>
+              <a:t> Standard</a:t>
             </a:r>
             <a:endParaRPr lang="en-US" sz="1650" dirty="0"/>
           </a:p>
@@ -5395,14 +5241,144 @@
       </p:sp>
       <p:sp>
         <p:nvSpPr>
-          <p:cNvPr id="37" name="Text 35"/>
-          <p:cNvSpPr/>
-          <p:nvPr/>
-        </p:nvSpPr>
-        <p:spPr>
-          <a:xfrm>
-            <a:off x="914400" y="8267700"/>
-            <a:ext cx="16459200" cy="342900"/>
+          <p:cNvPr id="38" name="Text 36"/>
+          <p:cNvSpPr/>
+          <p:nvPr/>
+        </p:nvSpPr>
+        <p:spPr>
+          <a:xfrm>
+            <a:off x="1143000" y="7067550"/>
+            <a:ext cx="3543300" cy="342900"/>
+          </a:xfrm>
+          <a:prstGeom prst="rect">
+            <a:avLst/>
+          </a:prstGeom>
+          <a:noFill/>
+          <a:ln/>
+        </p:spPr>
+        <p:txBody>
+          <a:bodyPr wrap="square" lIns="0" tIns="8906" rIns="0" bIns="-8906" rtlCol="0" anchor="t"/>
+          <a:lstStyle/>
+          <a:p>
+            <a:pPr algn="l" indent="0" marL="0">
+              <a:lnSpc>
+                <a:spcPts val="2145"/>
+              </a:lnSpc>
+              <a:buNone/>
+            </a:pPr>
+            <a:r>
+              <a:rPr lang="en-US" sz="1650" dirty="0" spc="-19" kern="0">
+                <a:solidFill>
+                  <a:srgbClr val="D8D3C4"/>
+                </a:solidFill>
+                <a:latin typeface="Be Vietnam Pro" pitchFamily="34" charset="0"/>
+                <a:ea typeface="Be Vietnam Pro" pitchFamily="34" charset="-122"/>
+                <a:cs typeface="Be Vietnam Pro" pitchFamily="34" charset="-120"/>
+              </a:rPr>
+              <a:t>yêu</a:t>
+            </a:r>
+            <a:r>
+              <a:rPr lang="en-US" sz="1650" dirty="0" spc="1" kern="0">
+                <a:solidFill>
+                  <a:srgbClr val="D8D3C4"/>
+                </a:solidFill>
+                <a:latin typeface="Be Vietnam Pro" pitchFamily="34" charset="0"/>
+                <a:ea typeface="Be Vietnam Pro" pitchFamily="34" charset="-122"/>
+                <a:cs typeface="Be Vietnam Pro" pitchFamily="34" charset="-120"/>
+              </a:rPr>
+              <a:t> cầu</a:t>
+            </a:r>
+            <a:r>
+              <a:rPr lang="en-US" sz="1650" dirty="0" spc="-2" kern="0">
+                <a:solidFill>
+                  <a:srgbClr val="D8D3C4"/>
+                </a:solidFill>
+                <a:latin typeface="Be Vietnam Pro" pitchFamily="34" charset="0"/>
+                <a:ea typeface="Be Vietnam Pro" pitchFamily="34" charset="-122"/>
+                <a:cs typeface="Be Vietnam Pro" pitchFamily="34" charset="-120"/>
+              </a:rPr>
+              <a:t> an</a:t>
+            </a:r>
+            <a:r>
+              <a:rPr lang="en-US" sz="1650" dirty="0" spc="-1" kern="0">
+                <a:solidFill>
+                  <a:srgbClr val="D8D3C4"/>
+                </a:solidFill>
+                <a:latin typeface="Be Vietnam Pro" pitchFamily="34" charset="0"/>
+                <a:ea typeface="Be Vietnam Pro" pitchFamily="34" charset="-122"/>
+                <a:cs typeface="Be Vietnam Pro" pitchFamily="34" charset="-120"/>
+              </a:rPr>
+              <a:t> ninh</a:t>
+            </a:r>
+            <a:r>
+              <a:rPr lang="en-US" sz="1650" dirty="0" spc="-7" kern="0">
+                <a:solidFill>
+                  <a:srgbClr val="D8D3C4"/>
+                </a:solidFill>
+                <a:latin typeface="Be Vietnam Pro" pitchFamily="34" charset="0"/>
+                <a:ea typeface="Be Vietnam Pro" pitchFamily="34" charset="-122"/>
+                <a:cs typeface="Be Vietnam Pro" pitchFamily="34" charset="-120"/>
+              </a:rPr>
+              <a:t> web</a:t>
+            </a:r>
+            <a:r>
+              <a:rPr lang="en-US" sz="1650" dirty="0" spc="0" kern="0">
+                <a:solidFill>
+                  <a:srgbClr val="D8D3C4"/>
+                </a:solidFill>
+                <a:latin typeface="Be Vietnam Pro" pitchFamily="34" charset="0"/>
+                <a:ea typeface="Be Vietnam Pro" pitchFamily="34" charset="-122"/>
+                <a:cs typeface="Be Vietnam Pro" pitchFamily="34" charset="-120"/>
+              </a:rPr>
+              <a:t> của</a:t>
+            </a:r>
+            <a:r>
+              <a:rPr lang="en-US" sz="1650" dirty="0" spc="-36" kern="0">
+                <a:solidFill>
+                  <a:srgbClr val="D8D3C4"/>
+                </a:solidFill>
+                <a:latin typeface="Be Vietnam Pro" pitchFamily="34" charset="0"/>
+                <a:ea typeface="Be Vietnam Pro" pitchFamily="34" charset="-122"/>
+                <a:cs typeface="Be Vietnam Pro" pitchFamily="34" charset="-120"/>
+              </a:rPr>
+              <a:t> OWASP</a:t>
+            </a:r>
+            <a:endParaRPr lang="en-US" sz="1650" dirty="0"/>
+          </a:p>
+        </p:txBody>
+      </p:sp>
+      <p:sp>
+        <p:nvSpPr>
+          <p:cNvPr id="39" name="Shape 37"/>
+          <p:cNvSpPr/>
+          <p:nvPr/>
+        </p:nvSpPr>
+        <p:spPr>
+          <a:xfrm>
+            <a:off x="5067300" y="5676900"/>
+            <a:ext cx="4000500" cy="1943100"/>
+          </a:xfrm>
+          <a:prstGeom prst="roundRect">
+            <a:avLst>
+              <a:gd name="adj" fmla="val 10784"/>
+            </a:avLst>
+          </a:prstGeom>
+          <a:solidFill>
+            <a:srgbClr val="1E212B"/>
+          </a:solidFill>
+          <a:ln/>
+        </p:spPr>
+      </p:sp>
+      <p:sp>
+        <p:nvSpPr>
+          <p:cNvPr id="40" name="Text 38"/>
+          <p:cNvSpPr/>
+          <p:nvPr/>
+        </p:nvSpPr>
+        <p:spPr>
+          <a:xfrm>
+            <a:off x="5295900" y="5886450"/>
+            <a:ext cx="3543300" cy="419100"/>
           </a:xfrm>
           <a:prstGeom prst="rect">
             <a:avLst/>
@@ -5418,7 +5394,113 @@
               <a:buNone/>
             </a:pPr>
             <a:r>
-              <a:rPr lang="en-US" sz="1800" dirty="0" spc="-4" kern="0">
+              <a:rPr lang="en-US" sz="2400" dirty="0" spc="1" kern="0">
+                <a:solidFill>
+                  <a:srgbClr val="F3EEE3"/>
+                </a:solidFill>
+                <a:latin typeface="Bricolage Grotesque ExtraBold" pitchFamily="34" charset="0"/>
+                <a:ea typeface="Bricolage Grotesque ExtraBold" pitchFamily="34" charset="-122"/>
+                <a:cs typeface="Bricolage Grotesque ExtraBold" pitchFamily="34" charset="-120"/>
+              </a:rPr>
+              <a:t>MDN</a:t>
+            </a:r>
+            <a:endParaRPr lang="en-US" sz="2400" dirty="0"/>
+          </a:p>
+        </p:txBody>
+      </p:sp>
+      <p:sp>
+        <p:nvSpPr>
+          <p:cNvPr id="41" name="Text 39"/>
+          <p:cNvSpPr/>
+          <p:nvPr/>
+        </p:nvSpPr>
+        <p:spPr>
+          <a:xfrm>
+            <a:off x="5295900" y="6362700"/>
+            <a:ext cx="3543300" cy="571500"/>
+          </a:xfrm>
+          <a:prstGeom prst="rect">
+            <a:avLst/>
+          </a:prstGeom>
+          <a:noFill/>
+          <a:ln/>
+        </p:spPr>
+        <p:txBody>
+          <a:bodyPr wrap="square" lIns="0" tIns="11509" rIns="0" bIns="-11509" rtlCol="0" anchor="t"/>
+          <a:lstStyle/>
+          <a:p>
+            <a:pPr algn="l" indent="0" marL="0">
+              <a:lnSpc>
+                <a:spcPts val="2063"/>
+              </a:lnSpc>
+              <a:buNone/>
+            </a:pPr>
+            <a:r>
+              <a:rPr lang="en-US" sz="1650" dirty="0" spc="-3" kern="0">
+                <a:solidFill>
+                  <a:srgbClr val="9A98A0"/>
+                </a:solidFill>
+                <a:latin typeface="Be Vietnam Pro" pitchFamily="34" charset="0"/>
+                <a:ea typeface="Be Vietnam Pro" pitchFamily="34" charset="-122"/>
+                <a:cs typeface="Be Vietnam Pro" pitchFamily="34" charset="-120"/>
+              </a:rPr>
+              <a:t>Mozilla</a:t>
+            </a:r>
+            <a:r>
+              <a:rPr lang="en-US" sz="1650" dirty="0" spc="-7" kern="0">
+                <a:solidFill>
+                  <a:srgbClr val="9A98A0"/>
+                </a:solidFill>
+                <a:latin typeface="Be Vietnam Pro" pitchFamily="34" charset="0"/>
+                <a:ea typeface="Be Vietnam Pro" pitchFamily="34" charset="-122"/>
+                <a:cs typeface="Be Vietnam Pro" pitchFamily="34" charset="-120"/>
+              </a:rPr>
+              <a:t> Developer</a:t>
+            </a:r>
+            <a:r>
+              <a:rPr lang="en-US" sz="1650" dirty="0" spc="-6" kern="0">
+                <a:solidFill>
+                  <a:srgbClr val="9A98A0"/>
+                </a:solidFill>
+                <a:latin typeface="Be Vietnam Pro" pitchFamily="34" charset="0"/>
+                <a:ea typeface="Be Vietnam Pro" pitchFamily="34" charset="-122"/>
+                <a:cs typeface="Be Vietnam Pro" pitchFamily="34" charset="-120"/>
+              </a:rPr>
+              <a:t> Network</a:t>
+            </a:r>
+            <a:endParaRPr lang="en-US" sz="1650" dirty="0"/>
+          </a:p>
+        </p:txBody>
+      </p:sp>
+      <p:sp>
+        <p:nvSpPr>
+          <p:cNvPr id="42" name="Text 40"/>
+          <p:cNvSpPr/>
+          <p:nvPr/>
+        </p:nvSpPr>
+        <p:spPr>
+          <a:xfrm>
+            <a:off x="5295900" y="7067550"/>
+            <a:ext cx="3543300" cy="342900"/>
+          </a:xfrm>
+          <a:prstGeom prst="rect">
+            <a:avLst/>
+          </a:prstGeom>
+          <a:noFill/>
+          <a:ln/>
+        </p:spPr>
+        <p:txBody>
+          <a:bodyPr wrap="square" lIns="0" tIns="8906" rIns="0" bIns="-8906" rtlCol="0" anchor="t"/>
+          <a:lstStyle/>
+          <a:p>
+            <a:pPr algn="l" indent="0" marL="0">
+              <a:lnSpc>
+                <a:spcPts val="2145"/>
+              </a:lnSpc>
+              <a:buNone/>
+            </a:pPr>
+            <a:r>
+              <a:rPr lang="en-US" sz="1650" dirty="0" spc="-9" kern="0">
                 <a:solidFill>
                   <a:srgbClr val="D8D3C4"/>
                 </a:solidFill>
@@ -5426,10 +5508,10 @@
                 <a:ea typeface="Be Vietnam Pro" pitchFamily="34" charset="-122"/>
                 <a:cs typeface="Be Vietnam Pro" pitchFamily="34" charset="-120"/>
               </a:rPr>
-              <a:t>ByteByteGo</a:t>
-            </a:r>
-            <a:r>
-              <a:rPr lang="en-US" sz="1800" dirty="0" spc="1" kern="0">
+              <a:t>tài</a:t>
+            </a:r>
+            <a:r>
+              <a:rPr lang="en-US" sz="1650" dirty="0" spc="0" kern="0">
                 <a:solidFill>
                   <a:srgbClr val="D8D3C4"/>
                 </a:solidFill>
@@ -5437,10 +5519,10 @@
                 <a:ea typeface="Be Vietnam Pro" pitchFamily="34" charset="-122"/>
                 <a:cs typeface="Be Vietnam Pro" pitchFamily="34" charset="-120"/>
               </a:rPr>
-              <a:t> · MDN</a:t>
-            </a:r>
-            <a:r>
-              <a:rPr lang="en-US" sz="1800" dirty="0" spc="-2" kern="0">
+              <a:t> liệu</a:t>
+            </a:r>
+            <a:r>
+              <a:rPr lang="en-US" sz="1650" dirty="0" spc="-15" kern="0">
                 <a:solidFill>
                   <a:srgbClr val="D8D3C4"/>
                 </a:solidFill>
@@ -5448,10 +5530,10 @@
                 <a:ea typeface="Be Vietnam Pro" pitchFamily="34" charset="-122"/>
                 <a:cs typeface="Be Vietnam Pro" pitchFamily="34" charset="-120"/>
               </a:rPr>
-              <a:t> ·</a:t>
-            </a:r>
-            <a:r>
-              <a:rPr lang="en-US" sz="1800" dirty="0" spc="-39" kern="0">
+              <a:t> tra</a:t>
+            </a:r>
+            <a:r>
+              <a:rPr lang="en-US" sz="1650" dirty="0" spc="12" kern="0">
                 <a:solidFill>
                   <a:srgbClr val="D8D3C4"/>
                 </a:solidFill>
@@ -5459,10 +5541,10 @@
                 <a:ea typeface="Be Vietnam Pro" pitchFamily="34" charset="-122"/>
                 <a:cs typeface="Be Vietnam Pro" pitchFamily="34" charset="-120"/>
               </a:rPr>
-              <a:t> OWASP</a:t>
-            </a:r>
-            <a:r>
-              <a:rPr lang="en-US" sz="1800" dirty="0" spc="-8" kern="0">
+              <a:t> cứu</a:t>
+            </a:r>
+            <a:r>
+              <a:rPr lang="en-US" sz="1650" dirty="0" spc="0" kern="0">
                 <a:solidFill>
                   <a:srgbClr val="D8D3C4"/>
                 </a:solidFill>
@@ -5470,10 +5552,10 @@
                 <a:ea typeface="Be Vietnam Pro" pitchFamily="34" charset="-122"/>
                 <a:cs typeface="Be Vietnam Pro" pitchFamily="34" charset="-120"/>
               </a:rPr>
-              <a:t> Cheat</a:t>
-            </a:r>
-            <a:r>
-              <a:rPr lang="en-US" sz="1800" dirty="0" spc="-3" kern="0">
+              <a:t> công nghệ</a:t>
+            </a:r>
+            <a:r>
+              <a:rPr lang="en-US" sz="1650" dirty="0" spc="-7" kern="0">
                 <a:solidFill>
                   <a:srgbClr val="D8D3C4"/>
                 </a:solidFill>
@@ -5481,121 +5563,44 @@
                 <a:ea typeface="Be Vietnam Pro" pitchFamily="34" charset="-122"/>
                 <a:cs typeface="Be Vietnam Pro" pitchFamily="34" charset="-120"/>
               </a:rPr>
-              <a:t> Sheet</a:t>
-            </a:r>
-            <a:r>
-              <a:rPr lang="en-US" sz="1800" dirty="0" spc="8" kern="0">
-                <a:solidFill>
-                  <a:srgbClr val="D8D3C4"/>
-                </a:solidFill>
-                <a:latin typeface="Be Vietnam Pro" pitchFamily="34" charset="0"/>
-                <a:ea typeface="Be Vietnam Pro" pitchFamily="34" charset="-122"/>
-                <a:cs typeface="Be Vietnam Pro" pitchFamily="34" charset="-120"/>
-              </a:rPr>
-              <a:t> Series</a:t>
-            </a:r>
-            <a:r>
-              <a:rPr lang="en-US" sz="1800" dirty="0" spc="0" kern="0">
-                <a:solidFill>
-                  <a:srgbClr val="D8D3C4"/>
-                </a:solidFill>
-                <a:latin typeface="Be Vietnam Pro" pitchFamily="34" charset="0"/>
-                <a:ea typeface="Be Vietnam Pro" pitchFamily="34" charset="-122"/>
-                <a:cs typeface="Be Vietnam Pro" pitchFamily="34" charset="-120"/>
-              </a:rPr>
-              <a:t> ·</a:t>
-            </a:r>
-            <a:r>
-              <a:rPr lang="en-US" sz="1800" dirty="0" spc="-39" kern="0">
-                <a:solidFill>
-                  <a:srgbClr val="D8D3C4"/>
-                </a:solidFill>
-                <a:latin typeface="Be Vietnam Pro" pitchFamily="34" charset="0"/>
-                <a:ea typeface="Be Vietnam Pro" pitchFamily="34" charset="-122"/>
-                <a:cs typeface="Be Vietnam Pro" pitchFamily="34" charset="-120"/>
-              </a:rPr>
-              <a:t> OWASP</a:t>
-            </a:r>
-            <a:r>
-              <a:rPr lang="en-US" sz="1800" dirty="0" spc="-9" kern="0">
-                <a:solidFill>
-                  <a:srgbClr val="D8D3C4"/>
-                </a:solidFill>
-                <a:latin typeface="Be Vietnam Pro" pitchFamily="34" charset="0"/>
-                <a:ea typeface="Be Vietnam Pro" pitchFamily="34" charset="-122"/>
-                <a:cs typeface="Be Vietnam Pro" pitchFamily="34" charset="-120"/>
-              </a:rPr>
-              <a:t> ASVS</a:t>
-            </a:r>
-            <a:r>
-              <a:rPr lang="en-US" sz="1800" dirty="0" spc="-1" kern="0">
-                <a:solidFill>
-                  <a:srgbClr val="D8D3C4"/>
-                </a:solidFill>
-                <a:latin typeface="Be Vietnam Pro" pitchFamily="34" charset="0"/>
-                <a:ea typeface="Be Vietnam Pro" pitchFamily="34" charset="-122"/>
-                <a:cs typeface="Be Vietnam Pro" pitchFamily="34" charset="-120"/>
-              </a:rPr>
-              <a:t> ·</a:t>
-            </a:r>
-            <a:r>
-              <a:rPr lang="en-US" sz="1800" dirty="0" spc="-22" kern="0">
-                <a:solidFill>
-                  <a:srgbClr val="D8D3C4"/>
-                </a:solidFill>
-                <a:latin typeface="Be Vietnam Pro" pitchFamily="34" charset="0"/>
-                <a:ea typeface="Be Vietnam Pro" pitchFamily="34" charset="-122"/>
-                <a:cs typeface="Be Vietnam Pro" pitchFamily="34" charset="-120"/>
-              </a:rPr>
-              <a:t> pyca/cryptography</a:t>
-            </a:r>
-            <a:r>
-              <a:rPr lang="en-US" sz="1800" dirty="0" spc="-2" kern="0">
-                <a:solidFill>
-                  <a:srgbClr val="D8D3C4"/>
-                </a:solidFill>
-                <a:latin typeface="Be Vietnam Pro" pitchFamily="34" charset="0"/>
-                <a:ea typeface="Be Vietnam Pro" pitchFamily="34" charset="-122"/>
-                <a:cs typeface="Be Vietnam Pro" pitchFamily="34" charset="-120"/>
-              </a:rPr>
-              <a:t> ·</a:t>
-            </a:r>
-            <a:r>
-              <a:rPr lang="en-US" sz="1800" dirty="0" spc="3" kern="0">
-                <a:solidFill>
-                  <a:srgbClr val="D8D3C4"/>
-                </a:solidFill>
-                <a:latin typeface="Be Vietnam Pro" pitchFamily="34" charset="0"/>
-                <a:ea typeface="Be Vietnam Pro" pitchFamily="34" charset="-122"/>
-                <a:cs typeface="Be Vietnam Pro" pitchFamily="34" charset="-120"/>
-              </a:rPr>
-              <a:t> CPython</a:t>
-            </a:r>
-            <a:r>
-              <a:rPr lang="en-US" sz="1800" dirty="0" spc="-12" kern="0">
-                <a:solidFill>
-                  <a:srgbClr val="D8D3C4"/>
-                </a:solidFill>
-                <a:latin typeface="Be Vietnam Pro" pitchFamily="34" charset="0"/>
-                <a:ea typeface="Be Vietnam Pro" pitchFamily="34" charset="-122"/>
-                <a:cs typeface="Be Vietnam Pro" pitchFamily="34" charset="-120"/>
-              </a:rPr>
-              <a:t> socketserver</a:t>
-            </a:r>
-            <a:endParaRPr lang="en-US" sz="1800" dirty="0"/>
+              <a:t> web</a:t>
+            </a:r>
+            <a:endParaRPr lang="en-US" sz="1650" dirty="0"/>
           </a:p>
         </p:txBody>
       </p:sp>
       <p:sp>
         <p:nvSpPr>
-          <p:cNvPr id="38" name="Text 36"/>
-          <p:cNvSpPr/>
-          <p:nvPr/>
-        </p:nvSpPr>
-        <p:spPr>
-          <a:xfrm>
-            <a:off x="914400" y="8686800"/>
-            <a:ext cx="14287500" cy="304800"/>
+          <p:cNvPr id="43" name="Shape 41"/>
+          <p:cNvSpPr/>
+          <p:nvPr/>
+        </p:nvSpPr>
+        <p:spPr>
+          <a:xfrm>
+            <a:off x="9220200" y="5676900"/>
+            <a:ext cx="4000500" cy="1943100"/>
+          </a:xfrm>
+          <a:prstGeom prst="roundRect">
+            <a:avLst>
+              <a:gd name="adj" fmla="val 10784"/>
+            </a:avLst>
+          </a:prstGeom>
+          <a:solidFill>
+            <a:srgbClr val="1E212B"/>
+          </a:solidFill>
+          <a:ln/>
+        </p:spPr>
+      </p:sp>
+      <p:sp>
+        <p:nvSpPr>
+          <p:cNvPr id="44" name="Text 42"/>
+          <p:cNvSpPr/>
+          <p:nvPr/>
+        </p:nvSpPr>
+        <p:spPr>
+          <a:xfrm>
+            <a:off x="9448800" y="5886450"/>
+            <a:ext cx="3543300" cy="419100"/>
           </a:xfrm>
           <a:prstGeom prst="rect">
             <a:avLst/>
@@ -5611,6 +5616,770 @@
               <a:buNone/>
             </a:pPr>
             <a:r>
+              <a:rPr lang="en-US" sz="2400" dirty="0" spc="-6" kern="0">
+                <a:solidFill>
+                  <a:srgbClr val="F3EEE3"/>
+                </a:solidFill>
+                <a:latin typeface="Bricolage Grotesque ExtraBold" pitchFamily="34" charset="0"/>
+                <a:ea typeface="Bricolage Grotesque ExtraBold" pitchFamily="34" charset="-122"/>
+                <a:cs typeface="Bricolage Grotesque ExtraBold" pitchFamily="34" charset="-120"/>
+              </a:rPr>
+              <a:t>STRIDE</a:t>
+            </a:r>
+            <a:endParaRPr lang="en-US" sz="2400" dirty="0"/>
+          </a:p>
+        </p:txBody>
+      </p:sp>
+      <p:sp>
+        <p:nvSpPr>
+          <p:cNvPr id="45" name="Text 43"/>
+          <p:cNvSpPr/>
+          <p:nvPr/>
+        </p:nvSpPr>
+        <p:spPr>
+          <a:xfrm>
+            <a:off x="9448800" y="6362700"/>
+            <a:ext cx="3543300" cy="571500"/>
+          </a:xfrm>
+          <a:prstGeom prst="rect">
+            <a:avLst/>
+          </a:prstGeom>
+          <a:noFill/>
+          <a:ln/>
+        </p:spPr>
+        <p:txBody>
+          <a:bodyPr wrap="square" lIns="0" tIns="11509" rIns="0" bIns="-11509" rtlCol="0" anchor="t"/>
+          <a:lstStyle/>
+          <a:p>
+            <a:pPr algn="l" indent="0" marL="0">
+              <a:lnSpc>
+                <a:spcPts val="2063"/>
+              </a:lnSpc>
+              <a:buNone/>
+            </a:pPr>
+            <a:r>
+              <a:rPr lang="en-US" sz="1650" dirty="0" spc="-9" kern="0">
+                <a:solidFill>
+                  <a:srgbClr val="9A98A0"/>
+                </a:solidFill>
+                <a:latin typeface="Be Vietnam Pro" pitchFamily="34" charset="0"/>
+                <a:ea typeface="Be Vietnam Pro" pitchFamily="34" charset="-122"/>
+                <a:cs typeface="Be Vietnam Pro" pitchFamily="34" charset="-120"/>
+              </a:rPr>
+              <a:t>tên</a:t>
+            </a:r>
+            <a:r>
+              <a:rPr lang="en-US" sz="1650" dirty="0" spc="0" kern="0">
+                <a:solidFill>
+                  <a:srgbClr val="9A98A0"/>
+                </a:solidFill>
+                <a:latin typeface="Be Vietnam Pro" pitchFamily="34" charset="0"/>
+                <a:ea typeface="Be Vietnam Pro" pitchFamily="34" charset="-122"/>
+                <a:cs typeface="Be Vietnam Pro" pitchFamily="34" charset="-120"/>
+              </a:rPr>
+              <a:t> khung do</a:t>
+            </a:r>
+            <a:r>
+              <a:rPr lang="en-US" sz="1650" dirty="0" spc="-1" kern="0">
+                <a:solidFill>
+                  <a:srgbClr val="9A98A0"/>
+                </a:solidFill>
+                <a:latin typeface="Be Vietnam Pro" pitchFamily="34" charset="0"/>
+                <a:ea typeface="Be Vietnam Pro" pitchFamily="34" charset="-122"/>
+                <a:cs typeface="Be Vietnam Pro" pitchFamily="34" charset="-120"/>
+              </a:rPr>
+              <a:t> MDN</a:t>
+            </a:r>
+            <a:r>
+              <a:rPr lang="en-US" sz="1650" dirty="0" spc="0" kern="0">
+                <a:solidFill>
+                  <a:srgbClr val="9A98A0"/>
+                </a:solidFill>
+                <a:latin typeface="Be Vietnam Pro" pitchFamily="34" charset="0"/>
+                <a:ea typeface="Be Vietnam Pro" pitchFamily="34" charset="-122"/>
+                <a:cs typeface="Be Vietnam Pro" pitchFamily="34" charset="-120"/>
+              </a:rPr>
+              <a:t> nêu</a:t>
+            </a:r>
+            <a:r>
+              <a:rPr lang="en-US" sz="1650" dirty="0" spc="-1" kern="0">
+                <a:solidFill>
+                  <a:srgbClr val="9A98A0"/>
+                </a:solidFill>
+                <a:latin typeface="Be Vietnam Pro" pitchFamily="34" charset="0"/>
+                <a:ea typeface="Be Vietnam Pro" pitchFamily="34" charset="-122"/>
+                <a:cs typeface="Be Vietnam Pro" pitchFamily="34" charset="-120"/>
+              </a:rPr>
+              <a:t> (an ninh)</a:t>
+            </a:r>
+            <a:endParaRPr lang="en-US" sz="1650" dirty="0"/>
+          </a:p>
+        </p:txBody>
+      </p:sp>
+      <p:sp>
+        <p:nvSpPr>
+          <p:cNvPr id="46" name="Text 44"/>
+          <p:cNvSpPr/>
+          <p:nvPr/>
+        </p:nvSpPr>
+        <p:spPr>
+          <a:xfrm>
+            <a:off x="9448800" y="7067550"/>
+            <a:ext cx="3543300" cy="342900"/>
+          </a:xfrm>
+          <a:prstGeom prst="rect">
+            <a:avLst/>
+          </a:prstGeom>
+          <a:noFill/>
+          <a:ln/>
+        </p:spPr>
+        <p:txBody>
+          <a:bodyPr wrap="square" lIns="0" tIns="8906" rIns="0" bIns="-8906" rtlCol="0" anchor="t"/>
+          <a:lstStyle/>
+          <a:p>
+            <a:pPr algn="l" indent="0" marL="0">
+              <a:lnSpc>
+                <a:spcPts val="2145"/>
+              </a:lnSpc>
+              <a:buNone/>
+            </a:pPr>
+            <a:r>
+              <a:rPr lang="en-US" sz="1650" dirty="0" spc="-3" kern="0">
+                <a:solidFill>
+                  <a:srgbClr val="D8D3C4"/>
+                </a:solidFill>
+                <a:latin typeface="Be Vietnam Pro" pitchFamily="34" charset="0"/>
+                <a:ea typeface="Be Vietnam Pro" pitchFamily="34" charset="-122"/>
+                <a:cs typeface="Be Vietnam Pro" pitchFamily="34" charset="-120"/>
+              </a:rPr>
+              <a:t>mẹo</a:t>
+            </a:r>
+            <a:r>
+              <a:rPr lang="en-US" sz="1650" dirty="0" spc="0" kern="0">
+                <a:solidFill>
+                  <a:srgbClr val="D8D3C4"/>
+                </a:solidFill>
+                <a:latin typeface="Be Vietnam Pro" pitchFamily="34" charset="0"/>
+                <a:ea typeface="Be Vietnam Pro" pitchFamily="34" charset="-122"/>
+                <a:cs typeface="Be Vietnam Pro" pitchFamily="34" charset="-120"/>
+              </a:rPr>
+              <a:t> nhớ</a:t>
+            </a:r>
+            <a:r>
+              <a:rPr lang="en-US" sz="1650" dirty="0" spc="-3" kern="0">
+                <a:solidFill>
+                  <a:srgbClr val="D8D3C4"/>
+                </a:solidFill>
+                <a:latin typeface="Be Vietnam Pro" pitchFamily="34" charset="0"/>
+                <a:ea typeface="Be Vietnam Pro" pitchFamily="34" charset="-122"/>
+                <a:cs typeface="Be Vietnam Pro" pitchFamily="34" charset="-120"/>
+              </a:rPr>
+              <a:t> sáu</a:t>
+            </a:r>
+            <a:r>
+              <a:rPr lang="en-US" sz="1650" dirty="0" spc="-2" kern="0">
+                <a:solidFill>
+                  <a:srgbClr val="D8D3C4"/>
+                </a:solidFill>
+                <a:latin typeface="Be Vietnam Pro" pitchFamily="34" charset="0"/>
+                <a:ea typeface="Be Vietnam Pro" pitchFamily="34" charset="-122"/>
+                <a:cs typeface="Be Vietnam Pro" pitchFamily="34" charset="-120"/>
+              </a:rPr>
+              <a:t> loại</a:t>
+            </a:r>
+            <a:r>
+              <a:rPr lang="en-US" sz="1650" dirty="0" spc="0" kern="0">
+                <a:solidFill>
+                  <a:srgbClr val="D8D3C4"/>
+                </a:solidFill>
+                <a:latin typeface="Be Vietnam Pro" pitchFamily="34" charset="0"/>
+                <a:ea typeface="Be Vietnam Pro" pitchFamily="34" charset="-122"/>
+                <a:cs typeface="Be Vietnam Pro" pitchFamily="34" charset="-120"/>
+              </a:rPr>
+              <a:t> mối</a:t>
+            </a:r>
+            <a:r>
+              <a:rPr lang="en-US" sz="1650" dirty="0" spc="15" kern="0">
+                <a:solidFill>
+                  <a:srgbClr val="D8D3C4"/>
+                </a:solidFill>
+                <a:latin typeface="Be Vietnam Pro" pitchFamily="34" charset="0"/>
+                <a:ea typeface="Be Vietnam Pro" pitchFamily="34" charset="-122"/>
+                <a:cs typeface="Be Vietnam Pro" pitchFamily="34" charset="-120"/>
+              </a:rPr>
+              <a:t> đe</a:t>
+            </a:r>
+            <a:r>
+              <a:rPr lang="en-US" sz="1650" dirty="0" spc="-1" kern="0">
+                <a:solidFill>
+                  <a:srgbClr val="D8D3C4"/>
+                </a:solidFill>
+                <a:latin typeface="Be Vietnam Pro" pitchFamily="34" charset="0"/>
+                <a:ea typeface="Be Vietnam Pro" pitchFamily="34" charset="-122"/>
+                <a:cs typeface="Be Vietnam Pro" pitchFamily="34" charset="-120"/>
+              </a:rPr>
+              <a:t> dọa</a:t>
+            </a:r>
+            <a:endParaRPr lang="en-US" sz="1650" dirty="0"/>
+          </a:p>
+        </p:txBody>
+      </p:sp>
+      <p:sp>
+        <p:nvSpPr>
+          <p:cNvPr id="47" name="Shape 45"/>
+          <p:cNvSpPr/>
+          <p:nvPr/>
+        </p:nvSpPr>
+        <p:spPr>
+          <a:xfrm>
+            <a:off x="13373100" y="5676900"/>
+            <a:ext cx="4000500" cy="1943100"/>
+          </a:xfrm>
+          <a:prstGeom prst="roundRect">
+            <a:avLst>
+              <a:gd name="adj" fmla="val 10784"/>
+            </a:avLst>
+          </a:prstGeom>
+          <a:solidFill>
+            <a:srgbClr val="1E212B"/>
+          </a:solidFill>
+          <a:ln/>
+        </p:spPr>
+      </p:sp>
+      <p:sp>
+        <p:nvSpPr>
+          <p:cNvPr id="48" name="Text 46"/>
+          <p:cNvSpPr/>
+          <p:nvPr/>
+        </p:nvSpPr>
+        <p:spPr>
+          <a:xfrm>
+            <a:off x="13601700" y="5886450"/>
+            <a:ext cx="3543300" cy="419100"/>
+          </a:xfrm>
+          <a:prstGeom prst="rect">
+            <a:avLst/>
+          </a:prstGeom>
+          <a:noFill/>
+          <a:ln/>
+        </p:spPr>
+        <p:txBody>
+          <a:bodyPr wrap="square" lIns="0" tIns="0" rIns="0" bIns="0" rtlCol="0" anchor="t"/>
+          <a:lstStyle/>
+          <a:p>
+            <a:pPr algn="l" indent="0" marL="0">
+              <a:buNone/>
+            </a:pPr>
+            <a:r>
+              <a:rPr lang="en-US" sz="2400" dirty="0" spc="2" kern="0">
+                <a:solidFill>
+                  <a:srgbClr val="F3EEE3"/>
+                </a:solidFill>
+                <a:latin typeface="Bricolage Grotesque ExtraBold" pitchFamily="34" charset="0"/>
+                <a:ea typeface="Bricolage Grotesque ExtraBold" pitchFamily="34" charset="-122"/>
+                <a:cs typeface="Bricolage Grotesque ExtraBold" pitchFamily="34" charset="-120"/>
+              </a:rPr>
+              <a:t>LINDDUN</a:t>
+            </a:r>
+            <a:endParaRPr lang="en-US" sz="2400" dirty="0"/>
+          </a:p>
+        </p:txBody>
+      </p:sp>
+      <p:sp>
+        <p:nvSpPr>
+          <p:cNvPr id="49" name="Text 47"/>
+          <p:cNvSpPr/>
+          <p:nvPr/>
+        </p:nvSpPr>
+        <p:spPr>
+          <a:xfrm>
+            <a:off x="13601700" y="6362700"/>
+            <a:ext cx="3543300" cy="571500"/>
+          </a:xfrm>
+          <a:prstGeom prst="rect">
+            <a:avLst/>
+          </a:prstGeom>
+          <a:noFill/>
+          <a:ln/>
+        </p:spPr>
+        <p:txBody>
+          <a:bodyPr wrap="square" lIns="0" tIns="11509" rIns="0" bIns="-11509" rtlCol="0" anchor="t"/>
+          <a:lstStyle/>
+          <a:p>
+            <a:pPr algn="l" indent="0" marL="0">
+              <a:lnSpc>
+                <a:spcPts val="2063"/>
+              </a:lnSpc>
+              <a:buNone/>
+            </a:pPr>
+            <a:r>
+              <a:rPr lang="en-US" sz="1650" dirty="0" spc="-9" kern="0">
+                <a:solidFill>
+                  <a:srgbClr val="9A98A0"/>
+                </a:solidFill>
+                <a:latin typeface="Be Vietnam Pro" pitchFamily="34" charset="0"/>
+                <a:ea typeface="Be Vietnam Pro" pitchFamily="34" charset="-122"/>
+                <a:cs typeface="Be Vietnam Pro" pitchFamily="34" charset="-120"/>
+              </a:rPr>
+              <a:t>tên</a:t>
+            </a:r>
+            <a:r>
+              <a:rPr lang="en-US" sz="1650" dirty="0" spc="0" kern="0">
+                <a:solidFill>
+                  <a:srgbClr val="9A98A0"/>
+                </a:solidFill>
+                <a:latin typeface="Be Vietnam Pro" pitchFamily="34" charset="0"/>
+                <a:ea typeface="Be Vietnam Pro" pitchFamily="34" charset="-122"/>
+                <a:cs typeface="Be Vietnam Pro" pitchFamily="34" charset="-120"/>
+              </a:rPr>
+              <a:t> khung do</a:t>
+            </a:r>
+            <a:r>
+              <a:rPr lang="en-US" sz="1650" dirty="0" spc="-1" kern="0">
+                <a:solidFill>
+                  <a:srgbClr val="9A98A0"/>
+                </a:solidFill>
+                <a:latin typeface="Be Vietnam Pro" pitchFamily="34" charset="0"/>
+                <a:ea typeface="Be Vietnam Pro" pitchFamily="34" charset="-122"/>
+                <a:cs typeface="Be Vietnam Pro" pitchFamily="34" charset="-120"/>
+              </a:rPr>
+              <a:t> MDN</a:t>
+            </a:r>
+            <a:r>
+              <a:rPr lang="en-US" sz="1650" dirty="0" spc="0" kern="0">
+                <a:solidFill>
+                  <a:srgbClr val="9A98A0"/>
+                </a:solidFill>
+                <a:latin typeface="Be Vietnam Pro" pitchFamily="34" charset="0"/>
+                <a:ea typeface="Be Vietnam Pro" pitchFamily="34" charset="-122"/>
+                <a:cs typeface="Be Vietnam Pro" pitchFamily="34" charset="-120"/>
+              </a:rPr>
+              <a:t> nêu</a:t>
+            </a:r>
+            <a:r>
+              <a:rPr lang="en-US" sz="1650" dirty="0" spc="5" kern="0">
+                <a:solidFill>
+                  <a:srgbClr val="9A98A0"/>
+                </a:solidFill>
+                <a:latin typeface="Be Vietnam Pro" pitchFamily="34" charset="0"/>
+                <a:ea typeface="Be Vietnam Pro" pitchFamily="34" charset="-122"/>
+                <a:cs typeface="Be Vietnam Pro" pitchFamily="34" charset="-120"/>
+              </a:rPr>
+              <a:t> (riêng</a:t>
+            </a:r>
+            <a:r>
+              <a:rPr lang="en-US" sz="1650" dirty="0" spc="35" kern="0">
+                <a:solidFill>
+                  <a:srgbClr val="9A98A0"/>
+                </a:solidFill>
+                <a:latin typeface="Be Vietnam Pro" pitchFamily="34" charset="0"/>
+                <a:ea typeface="Be Vietnam Pro" pitchFamily="34" charset="-122"/>
+                <a:cs typeface="Be Vietnam Pro" pitchFamily="34" charset="-120"/>
+              </a:rPr>
+              <a:t> tư)</a:t>
+            </a:r>
+            <a:endParaRPr lang="en-US" sz="1650" dirty="0"/>
+          </a:p>
+        </p:txBody>
+      </p:sp>
+      <p:sp>
+        <p:nvSpPr>
+          <p:cNvPr id="50" name="Text 48"/>
+          <p:cNvSpPr/>
+          <p:nvPr/>
+        </p:nvSpPr>
+        <p:spPr>
+          <a:xfrm>
+            <a:off x="13601700" y="7067550"/>
+            <a:ext cx="3543300" cy="342900"/>
+          </a:xfrm>
+          <a:prstGeom prst="rect">
+            <a:avLst/>
+          </a:prstGeom>
+          <a:noFill/>
+          <a:ln/>
+        </p:spPr>
+        <p:txBody>
+          <a:bodyPr wrap="square" lIns="0" tIns="8906" rIns="0" bIns="-8906" rtlCol="0" anchor="t"/>
+          <a:lstStyle/>
+          <a:p>
+            <a:pPr algn="l" indent="0" marL="0">
+              <a:lnSpc>
+                <a:spcPts val="2145"/>
+              </a:lnSpc>
+              <a:buNone/>
+            </a:pPr>
+            <a:r>
+              <a:rPr lang="en-US" sz="1650" dirty="0" spc="0" kern="0">
+                <a:solidFill>
+                  <a:srgbClr val="D8D3C4"/>
+                </a:solidFill>
+                <a:latin typeface="Be Vietnam Pro" pitchFamily="34" charset="0"/>
+                <a:ea typeface="Be Vietnam Pro" pitchFamily="34" charset="-122"/>
+                <a:cs typeface="Be Vietnam Pro" pitchFamily="34" charset="-120"/>
+              </a:rPr>
+              <a:t>phân</a:t>
+            </a:r>
+            <a:r>
+              <a:rPr lang="en-US" sz="1650" dirty="0" spc="3" kern="0">
+                <a:solidFill>
+                  <a:srgbClr val="D8D3C4"/>
+                </a:solidFill>
+                <a:latin typeface="Be Vietnam Pro" pitchFamily="34" charset="0"/>
+                <a:ea typeface="Be Vietnam Pro" pitchFamily="34" charset="-122"/>
+                <a:cs typeface="Be Vietnam Pro" pitchFamily="34" charset="-120"/>
+              </a:rPr>
+              <a:t> tích</a:t>
+            </a:r>
+            <a:r>
+              <a:rPr lang="en-US" sz="1650" dirty="0" spc="0" kern="0">
+                <a:solidFill>
+                  <a:srgbClr val="D8D3C4"/>
+                </a:solidFill>
+                <a:latin typeface="Be Vietnam Pro" pitchFamily="34" charset="0"/>
+                <a:ea typeface="Be Vietnam Pro" pitchFamily="34" charset="-122"/>
+                <a:cs typeface="Be Vietnam Pro" pitchFamily="34" charset="-120"/>
+              </a:rPr>
+              <a:t> mối</a:t>
+            </a:r>
+            <a:r>
+              <a:rPr lang="en-US" sz="1650" dirty="0" spc="14" kern="0">
+                <a:solidFill>
+                  <a:srgbClr val="D8D3C4"/>
+                </a:solidFill>
+                <a:latin typeface="Be Vietnam Pro" pitchFamily="34" charset="0"/>
+                <a:ea typeface="Be Vietnam Pro" pitchFamily="34" charset="-122"/>
+                <a:cs typeface="Be Vietnam Pro" pitchFamily="34" charset="-120"/>
+              </a:rPr>
+              <a:t> đe</a:t>
+            </a:r>
+            <a:r>
+              <a:rPr lang="en-US" sz="1650" dirty="0" spc="-1" kern="0">
+                <a:solidFill>
+                  <a:srgbClr val="D8D3C4"/>
+                </a:solidFill>
+                <a:latin typeface="Be Vietnam Pro" pitchFamily="34" charset="0"/>
+                <a:ea typeface="Be Vietnam Pro" pitchFamily="34" charset="-122"/>
+                <a:cs typeface="Be Vietnam Pro" pitchFamily="34" charset="-120"/>
+              </a:rPr>
+              <a:t> dọa</a:t>
+            </a:r>
+            <a:r>
+              <a:rPr lang="en-US" sz="1650" dirty="0" spc="-8" kern="0">
+                <a:solidFill>
+                  <a:srgbClr val="D8D3C4"/>
+                </a:solidFill>
+                <a:latin typeface="Be Vietnam Pro" pitchFamily="34" charset="0"/>
+                <a:ea typeface="Be Vietnam Pro" pitchFamily="34" charset="-122"/>
+                <a:cs typeface="Be Vietnam Pro" pitchFamily="34" charset="-120"/>
+              </a:rPr>
+              <a:t> về</a:t>
+            </a:r>
+            <a:r>
+              <a:rPr lang="en-US" sz="1650" dirty="0" spc="5" kern="0">
+                <a:solidFill>
+                  <a:srgbClr val="D8D3C4"/>
+                </a:solidFill>
+                <a:latin typeface="Be Vietnam Pro" pitchFamily="34" charset="0"/>
+                <a:ea typeface="Be Vietnam Pro" pitchFamily="34" charset="-122"/>
+                <a:cs typeface="Be Vietnam Pro" pitchFamily="34" charset="-120"/>
+              </a:rPr>
+              <a:t> riêng</a:t>
+            </a:r>
+            <a:r>
+              <a:rPr lang="en-US" sz="1650" dirty="0" spc="4" kern="0">
+                <a:solidFill>
+                  <a:srgbClr val="D8D3C4"/>
+                </a:solidFill>
+                <a:latin typeface="Be Vietnam Pro" pitchFamily="34" charset="0"/>
+                <a:ea typeface="Be Vietnam Pro" pitchFamily="34" charset="-122"/>
+                <a:cs typeface="Be Vietnam Pro" pitchFamily="34" charset="-120"/>
+              </a:rPr>
+              <a:t> tư</a:t>
+            </a:r>
+            <a:endParaRPr lang="en-US" sz="1650" dirty="0"/>
+          </a:p>
+        </p:txBody>
+      </p:sp>
+      <p:sp>
+        <p:nvSpPr>
+          <p:cNvPr id="51" name="Text 49"/>
+          <p:cNvSpPr/>
+          <p:nvPr/>
+        </p:nvSpPr>
+        <p:spPr>
+          <a:xfrm>
+            <a:off x="914400" y="7867650"/>
+            <a:ext cx="5715000" cy="285750"/>
+          </a:xfrm>
+          <a:prstGeom prst="rect">
+            <a:avLst/>
+          </a:prstGeom>
+          <a:noFill/>
+          <a:ln/>
+        </p:spPr>
+        <p:txBody>
+          <a:bodyPr wrap="square" lIns="0" tIns="0" rIns="0" bIns="0" rtlCol="0" anchor="t"/>
+          <a:lstStyle/>
+          <a:p>
+            <a:pPr algn="l" indent="0" marL="0">
+              <a:buNone/>
+            </a:pPr>
+            <a:r>
+              <a:rPr lang="en-US" sz="1650" b="1" spc="227" kern="0" dirty="0">
+                <a:solidFill>
+                  <a:srgbClr val="FF6A4D"/>
+                </a:solidFill>
+                <a:latin typeface="Be Vietnam Pro" pitchFamily="34" charset="0"/>
+                <a:ea typeface="Be Vietnam Pro" pitchFamily="34" charset="-122"/>
+                <a:cs typeface="Be Vietnam Pro" pitchFamily="34" charset="-120"/>
+              </a:rPr>
+              <a:t>NGUỒN</a:t>
+            </a:r>
+            <a:r>
+              <a:rPr lang="en-US" sz="1650" b="1" spc="229" kern="0" dirty="0">
+                <a:solidFill>
+                  <a:srgbClr val="FF6A4D"/>
+                </a:solidFill>
+                <a:latin typeface="Be Vietnam Pro" pitchFamily="34" charset="0"/>
+                <a:ea typeface="Be Vietnam Pro" pitchFamily="34" charset="-122"/>
+                <a:cs typeface="Be Vietnam Pro" pitchFamily="34" charset="-120"/>
+              </a:rPr>
+              <a:t> ĐỐI</a:t>
+            </a:r>
+            <a:r>
+              <a:rPr lang="en-US" sz="1650" b="1" spc="227" kern="0" dirty="0">
+                <a:solidFill>
+                  <a:srgbClr val="FF6A4D"/>
+                </a:solidFill>
+                <a:latin typeface="Be Vietnam Pro" pitchFamily="34" charset="0"/>
+                <a:ea typeface="Be Vietnam Pro" pitchFamily="34" charset="-122"/>
+                <a:cs typeface="Be Vietnam Pro" pitchFamily="34" charset="-120"/>
+              </a:rPr>
+              <a:t> CHIẾU</a:t>
+            </a:r>
+            <a:endParaRPr lang="en-US" sz="1650" dirty="0"/>
+          </a:p>
+        </p:txBody>
+      </p:sp>
+      <p:sp>
+        <p:nvSpPr>
+          <p:cNvPr id="52" name="Text 50"/>
+          <p:cNvSpPr/>
+          <p:nvPr/>
+        </p:nvSpPr>
+        <p:spPr>
+          <a:xfrm>
+            <a:off x="914400" y="8229600"/>
+            <a:ext cx="16459200" cy="342900"/>
+          </a:xfrm>
+          <a:prstGeom prst="rect">
+            <a:avLst/>
+          </a:prstGeom>
+          <a:noFill/>
+          <a:ln/>
+        </p:spPr>
+        <p:txBody>
+          <a:bodyPr wrap="square" lIns="0" tIns="0" rIns="0" bIns="0" rtlCol="0" anchor="t"/>
+          <a:lstStyle/>
+          <a:p>
+            <a:pPr algn="l" indent="0" marL="0">
+              <a:buNone/>
+            </a:pPr>
+            <a:r>
+              <a:rPr lang="en-US" sz="1800" dirty="0" spc="-4" kern="0">
+                <a:solidFill>
+                  <a:srgbClr val="D8D3C4"/>
+                </a:solidFill>
+                <a:latin typeface="Be Vietnam Pro" pitchFamily="34" charset="0"/>
+                <a:ea typeface="Be Vietnam Pro" pitchFamily="34" charset="-122"/>
+                <a:cs typeface="Be Vietnam Pro" pitchFamily="34" charset="-120"/>
+              </a:rPr>
+              <a:t>ByteByteGo</a:t>
+            </a:r>
+            <a:r>
+              <a:rPr lang="en-US" sz="1800" dirty="0" spc="1" kern="0">
+                <a:solidFill>
+                  <a:srgbClr val="D8D3C4"/>
+                </a:solidFill>
+                <a:latin typeface="Be Vietnam Pro" pitchFamily="34" charset="0"/>
+                <a:ea typeface="Be Vietnam Pro" pitchFamily="34" charset="-122"/>
+                <a:cs typeface="Be Vietnam Pro" pitchFamily="34" charset="-120"/>
+              </a:rPr>
+              <a:t> · MDN</a:t>
+            </a:r>
+            <a:r>
+              <a:rPr lang="en-US" sz="1800" dirty="0" spc="-2" kern="0">
+                <a:solidFill>
+                  <a:srgbClr val="D8D3C4"/>
+                </a:solidFill>
+                <a:latin typeface="Be Vietnam Pro" pitchFamily="34" charset="0"/>
+                <a:ea typeface="Be Vietnam Pro" pitchFamily="34" charset="-122"/>
+                <a:cs typeface="Be Vietnam Pro" pitchFamily="34" charset="-120"/>
+              </a:rPr>
+              <a:t> ·</a:t>
+            </a:r>
+            <a:r>
+              <a:rPr lang="en-US" sz="1800" dirty="0" spc="-39" kern="0">
+                <a:solidFill>
+                  <a:srgbClr val="D8D3C4"/>
+                </a:solidFill>
+                <a:latin typeface="Be Vietnam Pro" pitchFamily="34" charset="0"/>
+                <a:ea typeface="Be Vietnam Pro" pitchFamily="34" charset="-122"/>
+                <a:cs typeface="Be Vietnam Pro" pitchFamily="34" charset="-120"/>
+              </a:rPr>
+              <a:t> OWASP</a:t>
+            </a:r>
+            <a:r>
+              <a:rPr lang="en-US" sz="1800" dirty="0" spc="-8" kern="0">
+                <a:solidFill>
+                  <a:srgbClr val="D8D3C4"/>
+                </a:solidFill>
+                <a:latin typeface="Be Vietnam Pro" pitchFamily="34" charset="0"/>
+                <a:ea typeface="Be Vietnam Pro" pitchFamily="34" charset="-122"/>
+                <a:cs typeface="Be Vietnam Pro" pitchFamily="34" charset="-120"/>
+              </a:rPr>
+              <a:t> Cheat</a:t>
+            </a:r>
+            <a:r>
+              <a:rPr lang="en-US" sz="1800" dirty="0" spc="-3" kern="0">
+                <a:solidFill>
+                  <a:srgbClr val="D8D3C4"/>
+                </a:solidFill>
+                <a:latin typeface="Be Vietnam Pro" pitchFamily="34" charset="0"/>
+                <a:ea typeface="Be Vietnam Pro" pitchFamily="34" charset="-122"/>
+                <a:cs typeface="Be Vietnam Pro" pitchFamily="34" charset="-120"/>
+              </a:rPr>
+              <a:t> Sheet</a:t>
+            </a:r>
+            <a:r>
+              <a:rPr lang="en-US" sz="1800" dirty="0" spc="8" kern="0">
+                <a:solidFill>
+                  <a:srgbClr val="D8D3C4"/>
+                </a:solidFill>
+                <a:latin typeface="Be Vietnam Pro" pitchFamily="34" charset="0"/>
+                <a:ea typeface="Be Vietnam Pro" pitchFamily="34" charset="-122"/>
+                <a:cs typeface="Be Vietnam Pro" pitchFamily="34" charset="-120"/>
+              </a:rPr>
+              <a:t> Series</a:t>
+            </a:r>
+            <a:r>
+              <a:rPr lang="en-US" sz="1800" dirty="0" spc="0" kern="0">
+                <a:solidFill>
+                  <a:srgbClr val="D8D3C4"/>
+                </a:solidFill>
+                <a:latin typeface="Be Vietnam Pro" pitchFamily="34" charset="0"/>
+                <a:ea typeface="Be Vietnam Pro" pitchFamily="34" charset="-122"/>
+                <a:cs typeface="Be Vietnam Pro" pitchFamily="34" charset="-120"/>
+              </a:rPr>
+              <a:t> ·</a:t>
+            </a:r>
+            <a:r>
+              <a:rPr lang="en-US" sz="1800" dirty="0" spc="-39" kern="0">
+                <a:solidFill>
+                  <a:srgbClr val="D8D3C4"/>
+                </a:solidFill>
+                <a:latin typeface="Be Vietnam Pro" pitchFamily="34" charset="0"/>
+                <a:ea typeface="Be Vietnam Pro" pitchFamily="34" charset="-122"/>
+                <a:cs typeface="Be Vietnam Pro" pitchFamily="34" charset="-120"/>
+              </a:rPr>
+              <a:t> OWASP</a:t>
+            </a:r>
+            <a:r>
+              <a:rPr lang="en-US" sz="1800" dirty="0" spc="-9" kern="0">
+                <a:solidFill>
+                  <a:srgbClr val="D8D3C4"/>
+                </a:solidFill>
+                <a:latin typeface="Be Vietnam Pro" pitchFamily="34" charset="0"/>
+                <a:ea typeface="Be Vietnam Pro" pitchFamily="34" charset="-122"/>
+                <a:cs typeface="Be Vietnam Pro" pitchFamily="34" charset="-120"/>
+              </a:rPr>
+              <a:t> ASVS</a:t>
+            </a:r>
+            <a:r>
+              <a:rPr lang="en-US" sz="1800" dirty="0" spc="-1" kern="0">
+                <a:solidFill>
+                  <a:srgbClr val="D8D3C4"/>
+                </a:solidFill>
+                <a:latin typeface="Be Vietnam Pro" pitchFamily="34" charset="0"/>
+                <a:ea typeface="Be Vietnam Pro" pitchFamily="34" charset="-122"/>
+                <a:cs typeface="Be Vietnam Pro" pitchFamily="34" charset="-120"/>
+              </a:rPr>
+              <a:t> ·</a:t>
+            </a:r>
+            <a:r>
+              <a:rPr lang="en-US" sz="1800" dirty="0" spc="-22" kern="0">
+                <a:solidFill>
+                  <a:srgbClr val="D8D3C4"/>
+                </a:solidFill>
+                <a:latin typeface="Be Vietnam Pro" pitchFamily="34" charset="0"/>
+                <a:ea typeface="Be Vietnam Pro" pitchFamily="34" charset="-122"/>
+                <a:cs typeface="Be Vietnam Pro" pitchFamily="34" charset="-120"/>
+              </a:rPr>
+              <a:t> pyca/cryptography</a:t>
+            </a:r>
+            <a:r>
+              <a:rPr lang="en-US" sz="1800" dirty="0" spc="-2" kern="0">
+                <a:solidFill>
+                  <a:srgbClr val="D8D3C4"/>
+                </a:solidFill>
+                <a:latin typeface="Be Vietnam Pro" pitchFamily="34" charset="0"/>
+                <a:ea typeface="Be Vietnam Pro" pitchFamily="34" charset="-122"/>
+                <a:cs typeface="Be Vietnam Pro" pitchFamily="34" charset="-120"/>
+              </a:rPr>
+              <a:t> ·</a:t>
+            </a:r>
+            <a:r>
+              <a:rPr lang="en-US" sz="1800" dirty="0" spc="3" kern="0">
+                <a:solidFill>
+                  <a:srgbClr val="D8D3C4"/>
+                </a:solidFill>
+                <a:latin typeface="Be Vietnam Pro" pitchFamily="34" charset="0"/>
+                <a:ea typeface="Be Vietnam Pro" pitchFamily="34" charset="-122"/>
+                <a:cs typeface="Be Vietnam Pro" pitchFamily="34" charset="-120"/>
+              </a:rPr>
+              <a:t> CPython</a:t>
+            </a:r>
+            <a:r>
+              <a:rPr lang="en-US" sz="1800" dirty="0" spc="-12" kern="0">
+                <a:solidFill>
+                  <a:srgbClr val="D8D3C4"/>
+                </a:solidFill>
+                <a:latin typeface="Be Vietnam Pro" pitchFamily="34" charset="0"/>
+                <a:ea typeface="Be Vietnam Pro" pitchFamily="34" charset="-122"/>
+                <a:cs typeface="Be Vietnam Pro" pitchFamily="34" charset="-120"/>
+              </a:rPr>
+              <a:t> socketserver</a:t>
+            </a:r>
+            <a:endParaRPr lang="en-US" sz="1800" dirty="0"/>
+          </a:p>
+        </p:txBody>
+      </p:sp>
+      <p:sp>
+        <p:nvSpPr>
+          <p:cNvPr id="53" name="Text 51"/>
+          <p:cNvSpPr/>
+          <p:nvPr/>
+        </p:nvSpPr>
+        <p:spPr>
+          <a:xfrm>
+            <a:off x="914400" y="8629650"/>
+            <a:ext cx="14287500" cy="304800"/>
+          </a:xfrm>
+          <a:prstGeom prst="rect">
+            <a:avLst/>
+          </a:prstGeom>
+          <a:noFill/>
+          <a:ln/>
+        </p:spPr>
+        <p:txBody>
+          <a:bodyPr wrap="square" lIns="0" tIns="0" rIns="0" bIns="0" rtlCol="0" anchor="t"/>
+          <a:lstStyle/>
+          <a:p>
+            <a:pPr algn="l" indent="0" marL="0">
+              <a:buNone/>
+            </a:pPr>
+            <a:r>
               <a:rPr lang="en-US" sz="1650" dirty="0" spc="1" kern="0">
                 <a:solidFill>
                   <a:srgbClr val="9A98A0"/>
@@ -5726,7 +6495,7 @@
       </p:sp>
       <p:sp>
         <p:nvSpPr>
-          <p:cNvPr id="39" name="Connector line-1792363554473-541328947"/>
+          <p:cNvPr id="54" name="Connector line-1792390665383-149108112"/>
           <p:cNvSpPr/>
           <p:nvPr/>
         </p:nvSpPr>
@@ -5753,7 +6522,7 @@
       </p:sp>
       <p:sp>
         <p:nvSpPr>
-          <p:cNvPr id="40" name="Shape 38"/>
+          <p:cNvPr id="55" name="Shape 53"/>
           <p:cNvSpPr/>
           <p:nvPr/>
         </p:nvSpPr>
@@ -5773,7 +6542,7 @@
       </p:sp>
       <p:sp>
         <p:nvSpPr>
-          <p:cNvPr id="41" name="Shape 39"/>
+          <p:cNvPr id="56" name="Shape 54"/>
           <p:cNvSpPr/>
           <p:nvPr/>
         </p:nvSpPr>
@@ -5793,7 +6562,7 @@
       </p:sp>
       <p:sp>
         <p:nvSpPr>
-          <p:cNvPr id="42" name="Shape 40"/>
+          <p:cNvPr id="57" name="Shape 55"/>
           <p:cNvSpPr/>
           <p:nvPr/>
         </p:nvSpPr>
@@ -5813,7 +6582,7 @@
       </p:sp>
       <p:sp>
         <p:nvSpPr>
-          <p:cNvPr id="43" name="Shape 41"/>
+          <p:cNvPr id="58" name="Shape 56"/>
           <p:cNvSpPr/>
           <p:nvPr/>
         </p:nvSpPr>
@@ -5833,7 +6602,7 @@
       </p:sp>
       <p:sp>
         <p:nvSpPr>
-          <p:cNvPr id="44" name="Shape 42"/>
+          <p:cNvPr id="59" name="Shape 57"/>
           <p:cNvSpPr/>
           <p:nvPr/>
         </p:nvSpPr>
@@ -5853,7 +6622,7 @@
       </p:sp>
       <p:sp>
         <p:nvSpPr>
-          <p:cNvPr id="45" name="Shape 43"/>
+          <p:cNvPr id="60" name="Shape 58"/>
           <p:cNvSpPr/>
           <p:nvPr/>
         </p:nvSpPr>
@@ -5873,7 +6642,7 @@
       </p:sp>
       <p:sp>
         <p:nvSpPr>
-          <p:cNvPr id="46" name="Shape 44"/>
+          <p:cNvPr id="61" name="Shape 59"/>
           <p:cNvSpPr/>
           <p:nvPr/>
         </p:nvSpPr>
@@ -5893,7 +6662,7 @@
       </p:sp>
       <p:sp>
         <p:nvSpPr>
-          <p:cNvPr id="47" name="Shape 45"/>
+          <p:cNvPr id="62" name="Shape 60"/>
           <p:cNvSpPr/>
           <p:nvPr/>
         </p:nvSpPr>
@@ -5913,7 +6682,7 @@
       </p:sp>
       <p:sp>
         <p:nvSpPr>
-          <p:cNvPr id="48" name="Shape 46"/>
+          <p:cNvPr id="63" name="Shape 61"/>
           <p:cNvSpPr/>
           <p:nvPr/>
         </p:nvSpPr>
@@ -5933,7 +6702,7 @@
       </p:sp>
       <p:sp>
         <p:nvSpPr>
-          <p:cNvPr id="49" name="Shape 47"/>
+          <p:cNvPr id="64" name="Shape 62"/>
           <p:cNvSpPr/>
           <p:nvPr/>
         </p:nvSpPr>
@@ -5953,7 +6722,7 @@
       </p:sp>
       <p:sp>
         <p:nvSpPr>
-          <p:cNvPr id="50" name="Text 48"/>
+          <p:cNvPr id="65" name="Text 63"/>
           <p:cNvSpPr/>
           <p:nvPr/>
         </p:nvSpPr>
@@ -6058,7 +6827,7 @@
       </p:sp>
       <p:sp>
         <p:nvSpPr>
-          <p:cNvPr id="51" name="Shape 49"/>
+          <p:cNvPr id="66" name="Shape 64"/>
           <p:cNvSpPr/>
           <p:nvPr/>
         </p:nvSpPr>
@@ -6082,7 +6851,7 @@
       </p:sp>
       <p:pic>
         <p:nvPicPr>
-          <p:cNvPr id="52" name="Moda image moda-export-watermark-9797e441-c75f-46c8-b5dc-4a89357124c9" descr="">    </p:cNvPr>
+          <p:cNvPr id="67" name="Moda image moda-export-watermark-9797e441-c75f-46c8-b5dc-4a89357124c9" descr="">    </p:cNvPr>
           <p:cNvPicPr>
             <a:picLocks noChangeAspect="1"/>
           </p:cNvPicPr>

--- a/system-design-101/vi/lessons/sd-14-022/slides/sd-14-022.pptx
+++ b/system-design-101/vi/lessons/sd-14-022/slides/sd-14-022.pptx
@@ -3314,11 +3314,11 @@
         <p:spPr>
           <a:xfrm>
             <a:off x="914400" y="1485900"/>
-            <a:ext cx="4000500" cy="1943100"/>
+            <a:ext cx="3171825" cy="2095500"/>
           </a:xfrm>
           <a:prstGeom prst="roundRect">
             <a:avLst>
-              <a:gd name="adj" fmla="val 10784"/>
+              <a:gd name="adj" fmla="val 10000"/>
             </a:avLst>
           </a:prstGeom>
           <a:solidFill>
@@ -3335,8 +3335,8 @@
         </p:nvSpPr>
         <p:spPr>
           <a:xfrm>
-            <a:off x="1143000" y="1695450"/>
-            <a:ext cx="3543300" cy="419100"/>
+            <a:off x="1104900" y="1638300"/>
+            <a:ext cx="2790825" cy="419100"/>
           </a:xfrm>
           <a:prstGeom prst="rect">
             <a:avLst/>
@@ -3374,8 +3374,8 @@
         </p:nvSpPr>
         <p:spPr>
           <a:xfrm>
-            <a:off x="1143000" y="2171700"/>
-            <a:ext cx="3543300" cy="571500"/>
+            <a:off x="1104900" y="2076450"/>
+            <a:ext cx="2790825" cy="800100"/>
           </a:xfrm>
           <a:prstGeom prst="rect">
             <a:avLst/>
@@ -3438,8 +3438,8 @@
         </p:nvSpPr>
         <p:spPr>
           <a:xfrm>
-            <a:off x="1143000" y="2876550"/>
-            <a:ext cx="3543300" cy="342900"/>
+            <a:off x="1104900" y="2933700"/>
+            <a:ext cx="2790825" cy="590550"/>
           </a:xfrm>
           <a:prstGeom prst="rect">
             <a:avLst/>
@@ -3524,12 +3524,12 @@
         </p:nvSpPr>
         <p:spPr>
           <a:xfrm>
-            <a:off x="5067300" y="1485900"/>
-            <a:ext cx="4000500" cy="1943100"/>
+            <a:off x="4238625" y="1485900"/>
+            <a:ext cx="3171825" cy="2095500"/>
           </a:xfrm>
           <a:prstGeom prst="roundRect">
             <a:avLst>
-              <a:gd name="adj" fmla="val 10784"/>
+              <a:gd name="adj" fmla="val 10000"/>
             </a:avLst>
           </a:prstGeom>
           <a:solidFill>
@@ -3546,8 +3546,8 @@
         </p:nvSpPr>
         <p:spPr>
           <a:xfrm>
-            <a:off x="5295900" y="1695450"/>
-            <a:ext cx="3543300" cy="419100"/>
+            <a:off x="4429125" y="1638300"/>
+            <a:ext cx="2790825" cy="419100"/>
           </a:xfrm>
           <a:prstGeom prst="rect">
             <a:avLst/>
@@ -3585,8 +3585,8 @@
         </p:nvSpPr>
         <p:spPr>
           <a:xfrm>
-            <a:off x="5295900" y="2171700"/>
-            <a:ext cx="3543300" cy="571500"/>
+            <a:off x="4429125" y="2076450"/>
+            <a:ext cx="2790825" cy="800100"/>
           </a:xfrm>
           <a:prstGeom prst="rect">
             <a:avLst/>
@@ -3649,8 +3649,8 @@
         </p:nvSpPr>
         <p:spPr>
           <a:xfrm>
-            <a:off x="5295900" y="2876550"/>
-            <a:ext cx="3543300" cy="342900"/>
+            <a:off x="4429125" y="2933700"/>
+            <a:ext cx="2790825" cy="590550"/>
           </a:xfrm>
           <a:prstGeom prst="rect">
             <a:avLst/>
@@ -3757,12 +3757,12 @@
         </p:nvSpPr>
         <p:spPr>
           <a:xfrm>
-            <a:off x="9220200" y="1485900"/>
-            <a:ext cx="4000500" cy="1943100"/>
+            <a:off x="7562850" y="1485900"/>
+            <a:ext cx="3171825" cy="2095500"/>
           </a:xfrm>
           <a:prstGeom prst="roundRect">
             <a:avLst>
-              <a:gd name="adj" fmla="val 10784"/>
+              <a:gd name="adj" fmla="val 10000"/>
             </a:avLst>
           </a:prstGeom>
           <a:solidFill>
@@ -3779,8 +3779,8 @@
         </p:nvSpPr>
         <p:spPr>
           <a:xfrm>
-            <a:off x="9448800" y="1695450"/>
-            <a:ext cx="3543300" cy="419100"/>
+            <a:off x="7753350" y="1638300"/>
+            <a:ext cx="2790825" cy="419100"/>
           </a:xfrm>
           <a:prstGeom prst="rect">
             <a:avLst/>
@@ -3818,8 +3818,8 @@
         </p:nvSpPr>
         <p:spPr>
           <a:xfrm>
-            <a:off x="9448800" y="2171700"/>
-            <a:ext cx="3543300" cy="571500"/>
+            <a:off x="7753350" y="2076450"/>
+            <a:ext cx="2790825" cy="800100"/>
           </a:xfrm>
           <a:prstGeom prst="rect">
             <a:avLst/>
@@ -3893,8 +3893,8 @@
         </p:nvSpPr>
         <p:spPr>
           <a:xfrm>
-            <a:off x="9448800" y="2876550"/>
-            <a:ext cx="3543300" cy="342900"/>
+            <a:off x="7753350" y="2933700"/>
+            <a:ext cx="2790825" cy="590550"/>
           </a:xfrm>
           <a:prstGeom prst="rect">
             <a:avLst/>
@@ -4001,12 +4001,12 @@
         </p:nvSpPr>
         <p:spPr>
           <a:xfrm>
-            <a:off x="13373100" y="1485900"/>
-            <a:ext cx="4000500" cy="1943100"/>
+            <a:off x="10887075" y="1485900"/>
+            <a:ext cx="3171825" cy="2095500"/>
           </a:xfrm>
           <a:prstGeom prst="roundRect">
             <a:avLst>
-              <a:gd name="adj" fmla="val 10784"/>
+              <a:gd name="adj" fmla="val 10000"/>
             </a:avLst>
           </a:prstGeom>
           <a:solidFill>
@@ -4023,8 +4023,8 @@
         </p:nvSpPr>
         <p:spPr>
           <a:xfrm>
-            <a:off x="13601700" y="1695450"/>
-            <a:ext cx="3543300" cy="419100"/>
+            <a:off x="11077575" y="1638300"/>
+            <a:ext cx="2790825" cy="419100"/>
           </a:xfrm>
           <a:prstGeom prst="rect">
             <a:avLst/>
@@ -4062,8 +4062,8 @@
         </p:nvSpPr>
         <p:spPr>
           <a:xfrm>
-            <a:off x="13601700" y="2171700"/>
-            <a:ext cx="3543300" cy="571500"/>
+            <a:off x="11077575" y="2076450"/>
+            <a:ext cx="2790825" cy="800100"/>
           </a:xfrm>
           <a:prstGeom prst="rect">
             <a:avLst/>
@@ -4126,8 +4126,8 @@
         </p:nvSpPr>
         <p:spPr>
           <a:xfrm>
-            <a:off x="13601700" y="2876550"/>
-            <a:ext cx="3543300" cy="342900"/>
+            <a:off x="11077575" y="2933700"/>
+            <a:ext cx="2790825" cy="590550"/>
           </a:xfrm>
           <a:prstGeom prst="rect">
             <a:avLst/>
@@ -4201,12 +4201,12 @@
         </p:nvSpPr>
         <p:spPr>
           <a:xfrm>
-            <a:off x="914400" y="3581400"/>
-            <a:ext cx="4000500" cy="1943100"/>
+            <a:off x="14211300" y="1485900"/>
+            <a:ext cx="3162300" cy="2095500"/>
           </a:xfrm>
           <a:prstGeom prst="roundRect">
             <a:avLst>
-              <a:gd name="adj" fmla="val 10784"/>
+              <a:gd name="adj" fmla="val 10000"/>
             </a:avLst>
           </a:prstGeom>
           <a:solidFill>
@@ -4223,8 +4223,8 @@
         </p:nvSpPr>
         <p:spPr>
           <a:xfrm>
-            <a:off x="1143000" y="3790950"/>
-            <a:ext cx="3543300" cy="419100"/>
+            <a:off x="14401800" y="1638300"/>
+            <a:ext cx="2781300" cy="419100"/>
           </a:xfrm>
           <a:prstGeom prst="rect">
             <a:avLst/>
@@ -4262,8 +4262,8 @@
         </p:nvSpPr>
         <p:spPr>
           <a:xfrm>
-            <a:off x="1143000" y="4267200"/>
-            <a:ext cx="3543300" cy="571500"/>
+            <a:off x="14401800" y="2076450"/>
+            <a:ext cx="2781300" cy="800100"/>
           </a:xfrm>
           <a:prstGeom prst="rect">
             <a:avLst/>
@@ -4304,8 +4304,8 @@
         </p:nvSpPr>
         <p:spPr>
           <a:xfrm>
-            <a:off x="1143000" y="4972050"/>
-            <a:ext cx="3543300" cy="342900"/>
+            <a:off x="14401800" y="2933700"/>
+            <a:ext cx="2781300" cy="590550"/>
           </a:xfrm>
           <a:prstGeom prst="rect">
             <a:avLst/>
@@ -4412,12 +4412,12 @@
         </p:nvSpPr>
         <p:spPr>
           <a:xfrm>
-            <a:off x="5067300" y="3581400"/>
-            <a:ext cx="4000500" cy="1943100"/>
+            <a:off x="914400" y="3733800"/>
+            <a:ext cx="3171825" cy="2095500"/>
           </a:xfrm>
           <a:prstGeom prst="roundRect">
             <a:avLst>
-              <a:gd name="adj" fmla="val 10784"/>
+              <a:gd name="adj" fmla="val 10000"/>
             </a:avLst>
           </a:prstGeom>
           <a:solidFill>
@@ -4434,8 +4434,8 @@
         </p:nvSpPr>
         <p:spPr>
           <a:xfrm>
-            <a:off x="5295900" y="3790950"/>
-            <a:ext cx="3543300" cy="419100"/>
+            <a:off x="1104900" y="3886200"/>
+            <a:ext cx="2790825" cy="419100"/>
           </a:xfrm>
           <a:prstGeom prst="rect">
             <a:avLst/>
@@ -4473,8 +4473,8 @@
         </p:nvSpPr>
         <p:spPr>
           <a:xfrm>
-            <a:off x="5295900" y="4267200"/>
-            <a:ext cx="3543300" cy="571500"/>
+            <a:off x="1104900" y="4324350"/>
+            <a:ext cx="2790825" cy="800100"/>
           </a:xfrm>
           <a:prstGeom prst="rect">
             <a:avLst/>
@@ -4526,8 +4526,8 @@
         </p:nvSpPr>
         <p:spPr>
           <a:xfrm>
-            <a:off x="5295900" y="4972050"/>
-            <a:ext cx="3543300" cy="342900"/>
+            <a:off x="1104900" y="5181600"/>
+            <a:ext cx="2790825" cy="590550"/>
           </a:xfrm>
           <a:prstGeom prst="rect">
             <a:avLst/>
@@ -4645,12 +4645,12 @@
         </p:nvSpPr>
         <p:spPr>
           <a:xfrm>
-            <a:off x="9220200" y="3581400"/>
-            <a:ext cx="4000500" cy="1943100"/>
+            <a:off x="4238625" y="3733800"/>
+            <a:ext cx="3171825" cy="2095500"/>
           </a:xfrm>
           <a:prstGeom prst="roundRect">
             <a:avLst>
-              <a:gd name="adj" fmla="val 10784"/>
+              <a:gd name="adj" fmla="val 10000"/>
             </a:avLst>
           </a:prstGeom>
           <a:solidFill>
@@ -4667,8 +4667,8 @@
         </p:nvSpPr>
         <p:spPr>
           <a:xfrm>
-            <a:off x="9448800" y="3790950"/>
-            <a:ext cx="3543300" cy="419100"/>
+            <a:off x="4429125" y="3886200"/>
+            <a:ext cx="2790825" cy="419100"/>
           </a:xfrm>
           <a:prstGeom prst="rect">
             <a:avLst/>
@@ -4706,8 +4706,8 @@
         </p:nvSpPr>
         <p:spPr>
           <a:xfrm>
-            <a:off x="9448800" y="4267200"/>
-            <a:ext cx="3543300" cy="571500"/>
+            <a:off x="4429125" y="4324350"/>
+            <a:ext cx="2790825" cy="800100"/>
           </a:xfrm>
           <a:prstGeom prst="rect">
             <a:avLst/>
@@ -4770,8 +4770,8 @@
         </p:nvSpPr>
         <p:spPr>
           <a:xfrm>
-            <a:off x="9448800" y="4972050"/>
-            <a:ext cx="3543300" cy="342900"/>
+            <a:off x="4429125" y="5181600"/>
+            <a:ext cx="2790825" cy="590550"/>
           </a:xfrm>
           <a:prstGeom prst="rect">
             <a:avLst/>
@@ -4867,12 +4867,12 @@
         </p:nvSpPr>
         <p:spPr>
           <a:xfrm>
-            <a:off x="13373100" y="3581400"/>
-            <a:ext cx="4000500" cy="1943100"/>
+            <a:off x="7562850" y="3733800"/>
+            <a:ext cx="3171825" cy="2095500"/>
           </a:xfrm>
           <a:prstGeom prst="roundRect">
             <a:avLst>
-              <a:gd name="adj" fmla="val 10784"/>
+              <a:gd name="adj" fmla="val 10000"/>
             </a:avLst>
           </a:prstGeom>
           <a:solidFill>
@@ -4889,8 +4889,8 @@
         </p:nvSpPr>
         <p:spPr>
           <a:xfrm>
-            <a:off x="13601700" y="3790950"/>
-            <a:ext cx="3543300" cy="419100"/>
+            <a:off x="7753350" y="3886200"/>
+            <a:ext cx="2790825" cy="419100"/>
           </a:xfrm>
           <a:prstGeom prst="rect">
             <a:avLst/>
@@ -4928,8 +4928,8 @@
         </p:nvSpPr>
         <p:spPr>
           <a:xfrm>
-            <a:off x="13601700" y="4267200"/>
-            <a:ext cx="3543300" cy="571500"/>
+            <a:off x="7753350" y="4324350"/>
+            <a:ext cx="2790825" cy="800100"/>
           </a:xfrm>
           <a:prstGeom prst="rect">
             <a:avLst/>
@@ -5014,8 +5014,8 @@
         </p:nvSpPr>
         <p:spPr>
           <a:xfrm>
-            <a:off x="13601700" y="4972050"/>
-            <a:ext cx="3543300" cy="342900"/>
+            <a:off x="7753350" y="5181600"/>
+            <a:ext cx="2790825" cy="590550"/>
           </a:xfrm>
           <a:prstGeom prst="rect">
             <a:avLst/>
@@ -5111,12 +5111,12 @@
         </p:nvSpPr>
         <p:spPr>
           <a:xfrm>
-            <a:off x="914400" y="5676900"/>
-            <a:ext cx="4000500" cy="1943100"/>
+            <a:off x="10887075" y="3733800"/>
+            <a:ext cx="3171825" cy="2095500"/>
           </a:xfrm>
           <a:prstGeom prst="roundRect">
             <a:avLst>
-              <a:gd name="adj" fmla="val 10784"/>
+              <a:gd name="adj" fmla="val 10000"/>
             </a:avLst>
           </a:prstGeom>
           <a:solidFill>
@@ -5133,8 +5133,8 @@
         </p:nvSpPr>
         <p:spPr>
           <a:xfrm>
-            <a:off x="1143000" y="5886450"/>
-            <a:ext cx="3543300" cy="419100"/>
+            <a:off x="11077575" y="3886200"/>
+            <a:ext cx="2790825" cy="419100"/>
           </a:xfrm>
           <a:prstGeom prst="rect">
             <a:avLst/>
@@ -5172,8 +5172,8 @@
         </p:nvSpPr>
         <p:spPr>
           <a:xfrm>
-            <a:off x="1143000" y="6362700"/>
-            <a:ext cx="3543300" cy="571500"/>
+            <a:off x="11077575" y="4324350"/>
+            <a:ext cx="2790825" cy="800100"/>
           </a:xfrm>
           <a:prstGeom prst="rect">
             <a:avLst/>
@@ -5247,8 +5247,8 @@
         </p:nvSpPr>
         <p:spPr>
           <a:xfrm>
-            <a:off x="1143000" y="7067550"/>
-            <a:ext cx="3543300" cy="342900"/>
+            <a:off x="11077575" y="5181600"/>
+            <a:ext cx="2790825" cy="590550"/>
           </a:xfrm>
           <a:prstGeom prst="rect">
             <a:avLst/>
@@ -5355,12 +5355,12 @@
         </p:nvSpPr>
         <p:spPr>
           <a:xfrm>
-            <a:off x="5067300" y="5676900"/>
-            <a:ext cx="4000500" cy="1943100"/>
+            <a:off x="14211300" y="3733800"/>
+            <a:ext cx="3162300" cy="2095500"/>
           </a:xfrm>
           <a:prstGeom prst="roundRect">
             <a:avLst>
-              <a:gd name="adj" fmla="val 10784"/>
+              <a:gd name="adj" fmla="val 10000"/>
             </a:avLst>
           </a:prstGeom>
           <a:solidFill>
@@ -5377,8 +5377,8 @@
         </p:nvSpPr>
         <p:spPr>
           <a:xfrm>
-            <a:off x="5295900" y="5886450"/>
-            <a:ext cx="3543300" cy="419100"/>
+            <a:off x="14401800" y="3886200"/>
+            <a:ext cx="2781300" cy="419100"/>
           </a:xfrm>
           <a:prstGeom prst="rect">
             <a:avLst/>
@@ -5416,8 +5416,8 @@
         </p:nvSpPr>
         <p:spPr>
           <a:xfrm>
-            <a:off x="5295900" y="6362700"/>
-            <a:ext cx="3543300" cy="571500"/>
+            <a:off x="14401800" y="4324350"/>
+            <a:ext cx="2781300" cy="800100"/>
           </a:xfrm>
           <a:prstGeom prst="rect">
             <a:avLst/>
@@ -5480,8 +5480,8 @@
         </p:nvSpPr>
         <p:spPr>
           <a:xfrm>
-            <a:off x="5295900" y="7067550"/>
-            <a:ext cx="3543300" cy="342900"/>
+            <a:off x="14401800" y="5181600"/>
+            <a:ext cx="2781300" cy="590550"/>
           </a:xfrm>
           <a:prstGeom prst="rect">
             <a:avLst/>
@@ -5577,12 +5577,12 @@
         </p:nvSpPr>
         <p:spPr>
           <a:xfrm>
-            <a:off x="9220200" y="5676900"/>
-            <a:ext cx="4000500" cy="1943100"/>
+            <a:off x="914400" y="5981700"/>
+            <a:ext cx="8153400" cy="1657350"/>
           </a:xfrm>
           <a:prstGeom prst="roundRect">
             <a:avLst>
-              <a:gd name="adj" fmla="val 10784"/>
+              <a:gd name="adj" fmla="val 12644"/>
             </a:avLst>
           </a:prstGeom>
           <a:solidFill>
@@ -5599,8 +5599,8 @@
         </p:nvSpPr>
         <p:spPr>
           <a:xfrm>
-            <a:off x="9448800" y="5886450"/>
-            <a:ext cx="3543300" cy="419100"/>
+            <a:off x="1143000" y="6134100"/>
+            <a:ext cx="7696200" cy="419100"/>
           </a:xfrm>
           <a:prstGeom prst="rect">
             <a:avLst/>
@@ -5638,8 +5638,8 @@
         </p:nvSpPr>
         <p:spPr>
           <a:xfrm>
-            <a:off x="9448800" y="6362700"/>
-            <a:ext cx="3543300" cy="571500"/>
+            <a:off x="1143000" y="6591300"/>
+            <a:ext cx="7696200" cy="571500"/>
           </a:xfrm>
           <a:prstGeom prst="rect">
             <a:avLst/>
@@ -5658,6 +5658,28 @@
               <a:buNone/>
             </a:pPr>
             <a:r>
+              <a:rPr lang="en-US" sz="1650" dirty="0" spc="-3" kern="0">
+                <a:solidFill>
+                  <a:srgbClr val="9A98A0"/>
+                </a:solidFill>
+                <a:latin typeface="Be Vietnam Pro" pitchFamily="34" charset="0"/>
+                <a:ea typeface="Be Vietnam Pro" pitchFamily="34" charset="-122"/>
+                <a:cs typeface="Be Vietnam Pro" pitchFamily="34" charset="-120"/>
+              </a:rPr>
+              <a:t>Spoofing,</a:t>
+            </a:r>
+            <a:r>
+              <a:rPr lang="en-US" sz="1650" dirty="0" spc="-12" kern="0">
+                <a:solidFill>
+                  <a:srgbClr val="9A98A0"/>
+                </a:solidFill>
+                <a:latin typeface="Be Vietnam Pro" pitchFamily="34" charset="0"/>
+                <a:ea typeface="Be Vietnam Pro" pitchFamily="34" charset="-122"/>
+                <a:cs typeface="Be Vietnam Pro" pitchFamily="34" charset="-120"/>
+              </a:rPr>
+              <a:t> Tampering,</a:t>
+            </a:r>
+            <a:r>
               <a:rPr lang="en-US" sz="1650" dirty="0" spc="-9" kern="0">
                 <a:solidFill>
                   <a:srgbClr val="9A98A0"/>
@@ -5666,7 +5688,29 @@
                 <a:ea typeface="Be Vietnam Pro" pitchFamily="34" charset="-122"/>
                 <a:cs typeface="Be Vietnam Pro" pitchFamily="34" charset="-120"/>
               </a:rPr>
-              <a:t>tên</a:t>
+              <a:t> Repudiation,</a:t>
+            </a:r>
+            <a:r>
+              <a:rPr lang="en-US" sz="1650" dirty="0" spc="-8" kern="0">
+                <a:solidFill>
+                  <a:srgbClr val="9A98A0"/>
+                </a:solidFill>
+                <a:latin typeface="Be Vietnam Pro" pitchFamily="34" charset="0"/>
+                <a:ea typeface="Be Vietnam Pro" pitchFamily="34" charset="-122"/>
+                <a:cs typeface="Be Vietnam Pro" pitchFamily="34" charset="-120"/>
+              </a:rPr>
+              <a:t> Information disclosure,</a:t>
+            </a:r>
+            <a:r>
+              <a:rPr lang="en-US" sz="1650" dirty="0" spc="-1" kern="0">
+                <a:solidFill>
+                  <a:srgbClr val="9A98A0"/>
+                </a:solidFill>
+                <a:latin typeface="Be Vietnam Pro" pitchFamily="34" charset="0"/>
+                <a:ea typeface="Be Vietnam Pro" pitchFamily="34" charset="-122"/>
+                <a:cs typeface="Be Vietnam Pro" pitchFamily="34" charset="-120"/>
+              </a:rPr>
+              <a:t> Denial</a:t>
             </a:r>
             <a:r>
               <a:rPr lang="en-US" sz="1650" dirty="0" spc="0" kern="0">
@@ -5677,7 +5721,29 @@
                 <a:ea typeface="Be Vietnam Pro" pitchFamily="34" charset="-122"/>
                 <a:cs typeface="Be Vietnam Pro" pitchFamily="34" charset="-120"/>
               </a:rPr>
-              <a:t> khung do</a:t>
+              <a:t> of</a:t>
+            </a:r>
+            <a:r>
+              <a:rPr lang="en-US" sz="1650" dirty="0" spc="-2" kern="0">
+                <a:solidFill>
+                  <a:srgbClr val="9A98A0"/>
+                </a:solidFill>
+                <a:latin typeface="Be Vietnam Pro" pitchFamily="34" charset="0"/>
+                <a:ea typeface="Be Vietnam Pro" pitchFamily="34" charset="-122"/>
+                <a:cs typeface="Be Vietnam Pro" pitchFamily="34" charset="-120"/>
+              </a:rPr>
+              <a:t> service,</a:t>
+            </a:r>
+            <a:r>
+              <a:rPr lang="en-US" sz="1650" dirty="0" spc="-10" kern="0">
+                <a:solidFill>
+                  <a:srgbClr val="9A98A0"/>
+                </a:solidFill>
+                <a:latin typeface="Be Vietnam Pro" pitchFamily="34" charset="0"/>
+                <a:ea typeface="Be Vietnam Pro" pitchFamily="34" charset="-122"/>
+                <a:cs typeface="Be Vietnam Pro" pitchFamily="34" charset="-120"/>
+              </a:rPr>
+              <a:t> Elevation</a:t>
             </a:r>
             <a:r>
               <a:rPr lang="en-US" sz="1650" dirty="0" spc="-1" kern="0">
@@ -5688,29 +5754,7 @@
                 <a:ea typeface="Be Vietnam Pro" pitchFamily="34" charset="-122"/>
                 <a:cs typeface="Be Vietnam Pro" pitchFamily="34" charset="-120"/>
               </a:rPr>
-              <a:t> MDN</a:t>
-            </a:r>
-            <a:r>
-              <a:rPr lang="en-US" sz="1650" dirty="0" spc="0" kern="0">
-                <a:solidFill>
-                  <a:srgbClr val="9A98A0"/>
-                </a:solidFill>
-                <a:latin typeface="Be Vietnam Pro" pitchFamily="34" charset="0"/>
-                <a:ea typeface="Be Vietnam Pro" pitchFamily="34" charset="-122"/>
-                <a:cs typeface="Be Vietnam Pro" pitchFamily="34" charset="-120"/>
-              </a:rPr>
-              <a:t> nêu</a:t>
-            </a:r>
-            <a:r>
-              <a:rPr lang="en-US" sz="1650" dirty="0" spc="-1" kern="0">
-                <a:solidFill>
-                  <a:srgbClr val="9A98A0"/>
-                </a:solidFill>
-                <a:latin typeface="Be Vietnam Pro" pitchFamily="34" charset="0"/>
-                <a:ea typeface="Be Vietnam Pro" pitchFamily="34" charset="-122"/>
-                <a:cs typeface="Be Vietnam Pro" pitchFamily="34" charset="-120"/>
-              </a:rPr>
-              <a:t> (an ninh)</a:t>
+              <a:t> of privilege</a:t>
             </a:r>
             <a:endParaRPr lang="en-US" sz="1650" dirty="0"/>
           </a:p>
@@ -5724,8 +5768,8 @@
         </p:nvSpPr>
         <p:spPr>
           <a:xfrm>
-            <a:off x="9448800" y="7067550"/>
-            <a:ext cx="3543300" cy="342900"/>
+            <a:off x="1143000" y="7219950"/>
+            <a:ext cx="7696200" cy="361950"/>
           </a:xfrm>
           <a:prstGeom prst="rect">
             <a:avLst/>
@@ -5744,6 +5788,28 @@
               <a:buNone/>
             </a:pPr>
             <a:r>
+              <a:rPr lang="en-US" sz="1650" dirty="0" spc="-4" kern="0">
+                <a:solidFill>
+                  <a:srgbClr val="D8D3C4"/>
+                </a:solidFill>
+                <a:latin typeface="Be Vietnam Pro" pitchFamily="34" charset="0"/>
+                <a:ea typeface="Be Vietnam Pro" pitchFamily="34" charset="-122"/>
+                <a:cs typeface="Be Vietnam Pro" pitchFamily="34" charset="-120"/>
+              </a:rPr>
+              <a:t>Mẹo</a:t>
+            </a:r>
+            <a:r>
+              <a:rPr lang="en-US" sz="1650" dirty="0" spc="0" kern="0">
+                <a:solidFill>
+                  <a:srgbClr val="D8D3C4"/>
+                </a:solidFill>
+                <a:latin typeface="Be Vietnam Pro" pitchFamily="34" charset="0"/>
+                <a:ea typeface="Be Vietnam Pro" pitchFamily="34" charset="-122"/>
+                <a:cs typeface="Be Vietnam Pro" pitchFamily="34" charset="-120"/>
+              </a:rPr>
+              <a:t> nhớ</a:t>
+            </a:r>
+            <a:r>
               <a:rPr lang="en-US" sz="1650" dirty="0" spc="-3" kern="0">
                 <a:solidFill>
                   <a:srgbClr val="D8D3C4"/>
@@ -5752,7 +5818,18 @@
                 <a:ea typeface="Be Vietnam Pro" pitchFamily="34" charset="-122"/>
                 <a:cs typeface="Be Vietnam Pro" pitchFamily="34" charset="-120"/>
               </a:rPr>
-              <a:t>mẹo</a:t>
+              <a:t> sáu</a:t>
+            </a:r>
+            <a:r>
+              <a:rPr lang="en-US" sz="1650" dirty="0" spc="-2" kern="0">
+                <a:solidFill>
+                  <a:srgbClr val="D8D3C4"/>
+                </a:solidFill>
+                <a:latin typeface="Be Vietnam Pro" pitchFamily="34" charset="0"/>
+                <a:ea typeface="Be Vietnam Pro" pitchFamily="34" charset="-122"/>
+                <a:cs typeface="Be Vietnam Pro" pitchFamily="34" charset="-120"/>
+              </a:rPr>
+              <a:t> loại</a:t>
             </a:r>
             <a:r>
               <a:rPr lang="en-US" sz="1650" dirty="0" spc="0" kern="0">
@@ -5763,10 +5840,10 @@
                 <a:ea typeface="Be Vietnam Pro" pitchFamily="34" charset="-122"/>
                 <a:cs typeface="Be Vietnam Pro" pitchFamily="34" charset="-120"/>
               </a:rPr>
-              <a:t> nhớ</a:t>
-            </a:r>
-            <a:r>
-              <a:rPr lang="en-US" sz="1650" dirty="0" spc="-3" kern="0">
+              <a:t> mối</a:t>
+            </a:r>
+            <a:r>
+              <a:rPr lang="en-US" sz="1650" dirty="0" spc="15" kern="0">
                 <a:solidFill>
                   <a:srgbClr val="D8D3C4"/>
                 </a:solidFill>
@@ -5774,7 +5851,40 @@
                 <a:ea typeface="Be Vietnam Pro" pitchFamily="34" charset="-122"/>
                 <a:cs typeface="Be Vietnam Pro" pitchFamily="34" charset="-120"/>
               </a:rPr>
-              <a:t> sáu</a:t>
+              <a:t> đe</a:t>
+            </a:r>
+            <a:r>
+              <a:rPr lang="en-US" sz="1650" dirty="0" spc="-1" kern="0">
+                <a:solidFill>
+                  <a:srgbClr val="D8D3C4"/>
+                </a:solidFill>
+                <a:latin typeface="Be Vietnam Pro" pitchFamily="34" charset="0"/>
+                <a:ea typeface="Be Vietnam Pro" pitchFamily="34" charset="-122"/>
+                <a:cs typeface="Be Vietnam Pro" pitchFamily="34" charset="-120"/>
+              </a:rPr>
+              <a:t> dọa</a:t>
+            </a:r>
+            <a:r>
+              <a:rPr lang="en-US" sz="1650" dirty="0" spc="-8" kern="0">
+                <a:solidFill>
+                  <a:srgbClr val="D8D3C4"/>
+                </a:solidFill>
+                <a:latin typeface="Be Vietnam Pro" pitchFamily="34" charset="0"/>
+                <a:ea typeface="Be Vietnam Pro" pitchFamily="34" charset="-122"/>
+                <a:cs typeface="Be Vietnam Pro" pitchFamily="34" charset="-120"/>
+              </a:rPr>
+              <a:t> về</a:t>
+            </a:r>
+            <a:r>
+              <a:rPr lang="en-US" sz="1650" dirty="0" spc="-1" kern="0">
+                <a:solidFill>
+                  <a:srgbClr val="D8D3C4"/>
+                </a:solidFill>
+                <a:latin typeface="Be Vietnam Pro" pitchFamily="34" charset="0"/>
+                <a:ea typeface="Be Vietnam Pro" pitchFamily="34" charset="-122"/>
+                <a:cs typeface="Be Vietnam Pro" pitchFamily="34" charset="-120"/>
+              </a:rPr>
+              <a:t> an</a:t>
             </a:r>
             <a:r>
               <a:rPr lang="en-US" sz="1650" dirty="0" spc="-2" kern="0">
@@ -5785,40 +5895,7 @@
                 <a:ea typeface="Be Vietnam Pro" pitchFamily="34" charset="-122"/>
                 <a:cs typeface="Be Vietnam Pro" pitchFamily="34" charset="-120"/>
               </a:rPr>
-              <a:t> loại</a:t>
-            </a:r>
-            <a:r>
-              <a:rPr lang="en-US" sz="1650" dirty="0" spc="0" kern="0">
-                <a:solidFill>
-                  <a:srgbClr val="D8D3C4"/>
-                </a:solidFill>
-                <a:latin typeface="Be Vietnam Pro" pitchFamily="34" charset="0"/>
-                <a:ea typeface="Be Vietnam Pro" pitchFamily="34" charset="-122"/>
-                <a:cs typeface="Be Vietnam Pro" pitchFamily="34" charset="-120"/>
-              </a:rPr>
-              <a:t> mối</a:t>
-            </a:r>
-            <a:r>
-              <a:rPr lang="en-US" sz="1650" dirty="0" spc="15" kern="0">
-                <a:solidFill>
-                  <a:srgbClr val="D8D3C4"/>
-                </a:solidFill>
-                <a:latin typeface="Be Vietnam Pro" pitchFamily="34" charset="0"/>
-                <a:ea typeface="Be Vietnam Pro" pitchFamily="34" charset="-122"/>
-                <a:cs typeface="Be Vietnam Pro" pitchFamily="34" charset="-120"/>
-              </a:rPr>
-              <a:t> đe</a:t>
-            </a:r>
-            <a:r>
-              <a:rPr lang="en-US" sz="1650" dirty="0" spc="-1" kern="0">
-                <a:solidFill>
-                  <a:srgbClr val="D8D3C4"/>
-                </a:solidFill>
-                <a:latin typeface="Be Vietnam Pro" pitchFamily="34" charset="0"/>
-                <a:ea typeface="Be Vietnam Pro" pitchFamily="34" charset="-122"/>
-                <a:cs typeface="Be Vietnam Pro" pitchFamily="34" charset="-120"/>
-              </a:rPr>
-              <a:t> dọa</a:t>
+              <a:t> ninh.</a:t>
             </a:r>
             <a:endParaRPr lang="en-US" sz="1650" dirty="0"/>
           </a:p>
@@ -5832,12 +5909,12 @@
         </p:nvSpPr>
         <p:spPr>
           <a:xfrm>
-            <a:off x="13373100" y="5676900"/>
-            <a:ext cx="4000500" cy="1943100"/>
+            <a:off x="9220200" y="5981700"/>
+            <a:ext cx="8153400" cy="1657350"/>
           </a:xfrm>
           <a:prstGeom prst="roundRect">
             <a:avLst>
-              <a:gd name="adj" fmla="val 10784"/>
+              <a:gd name="adj" fmla="val 12644"/>
             </a:avLst>
           </a:prstGeom>
           <a:solidFill>
@@ -5854,8 +5931,8 @@
         </p:nvSpPr>
         <p:spPr>
           <a:xfrm>
-            <a:off x="13601700" y="5886450"/>
-            <a:ext cx="3543300" cy="419100"/>
+            <a:off x="9448800" y="6134100"/>
+            <a:ext cx="7696200" cy="419100"/>
           </a:xfrm>
           <a:prstGeom prst="rect">
             <a:avLst/>
@@ -5893,8 +5970,8 @@
         </p:nvSpPr>
         <p:spPr>
           <a:xfrm>
-            <a:off x="13601700" y="6362700"/>
-            <a:ext cx="3543300" cy="571500"/>
+            <a:off x="9448800" y="6591300"/>
+            <a:ext cx="7696200" cy="571500"/>
           </a:xfrm>
           <a:prstGeom prst="rect">
             <a:avLst/>
@@ -5913,7 +5990,7 @@
               <a:buNone/>
             </a:pPr>
             <a:r>
-              <a:rPr lang="en-US" sz="1650" dirty="0" spc="-9" kern="0">
+              <a:rPr lang="en-US" sz="1650" dirty="0" spc="-1" kern="0">
                 <a:solidFill>
                   <a:srgbClr val="9A98A0"/>
                 </a:solidFill>
@@ -5921,10 +5998,10 @@
                 <a:ea typeface="Be Vietnam Pro" pitchFamily="34" charset="-122"/>
                 <a:cs typeface="Be Vietnam Pro" pitchFamily="34" charset="-120"/>
               </a:rPr>
-              <a:t>tên</a:t>
-            </a:r>
-            <a:r>
-              <a:rPr lang="en-US" sz="1650" dirty="0" spc="0" kern="0">
+              <a:t>Linking,</a:t>
+            </a:r>
+            <a:r>
+              <a:rPr lang="en-US" sz="1650" dirty="0" spc="-3" kern="0">
                 <a:solidFill>
                   <a:srgbClr val="9A98A0"/>
                 </a:solidFill>
@@ -5932,10 +6009,10 @@
                 <a:ea typeface="Be Vietnam Pro" pitchFamily="34" charset="-122"/>
                 <a:cs typeface="Be Vietnam Pro" pitchFamily="34" charset="-120"/>
               </a:rPr>
-              <a:t> khung do</a:t>
-            </a:r>
-            <a:r>
-              <a:rPr lang="en-US" sz="1650" dirty="0" spc="-1" kern="0">
+              <a:t> Identifying,</a:t>
+            </a:r>
+            <a:r>
+              <a:rPr lang="en-US" sz="1650" dirty="0" spc="-7" kern="0">
                 <a:solidFill>
                   <a:srgbClr val="9A98A0"/>
                 </a:solidFill>
@@ -5943,10 +6020,10 @@
                 <a:ea typeface="Be Vietnam Pro" pitchFamily="34" charset="-122"/>
                 <a:cs typeface="Be Vietnam Pro" pitchFamily="34" charset="-120"/>
               </a:rPr>
-              <a:t> MDN</a:t>
-            </a:r>
-            <a:r>
-              <a:rPr lang="en-US" sz="1650" dirty="0" spc="0" kern="0">
+              <a:t> Non-repudiation,</a:t>
+            </a:r>
+            <a:r>
+              <a:rPr lang="en-US" sz="1650" dirty="0" spc="-4" kern="0">
                 <a:solidFill>
                   <a:srgbClr val="9A98A0"/>
                 </a:solidFill>
@@ -5954,10 +6031,10 @@
                 <a:ea typeface="Be Vietnam Pro" pitchFamily="34" charset="-122"/>
                 <a:cs typeface="Be Vietnam Pro" pitchFamily="34" charset="-120"/>
               </a:rPr>
-              <a:t> nêu</a:t>
-            </a:r>
-            <a:r>
-              <a:rPr lang="en-US" sz="1650" dirty="0" spc="5" kern="0">
+              <a:t> Detecting,</a:t>
+            </a:r>
+            <a:r>
+              <a:rPr lang="en-US" sz="1650" dirty="0" spc="-11" kern="0">
                 <a:solidFill>
                   <a:srgbClr val="9A98A0"/>
                 </a:solidFill>
@@ -5965,10 +6042,10 @@
                 <a:ea typeface="Be Vietnam Pro" pitchFamily="34" charset="-122"/>
                 <a:cs typeface="Be Vietnam Pro" pitchFamily="34" charset="-120"/>
               </a:rPr>
-              <a:t> (riêng</a:t>
-            </a:r>
-            <a:r>
-              <a:rPr lang="en-US" sz="1650" dirty="0" spc="35" kern="0">
+              <a:t> Data</a:t>
+            </a:r>
+            <a:r>
+              <a:rPr lang="en-US" sz="1650" dirty="0" spc="-8" kern="0">
                 <a:solidFill>
                   <a:srgbClr val="9A98A0"/>
                 </a:solidFill>
@@ -5976,7 +6053,29 @@
                 <a:ea typeface="Be Vietnam Pro" pitchFamily="34" charset="-122"/>
                 <a:cs typeface="Be Vietnam Pro" pitchFamily="34" charset="-120"/>
               </a:rPr>
-              <a:t> tư)</a:t>
+              <a:t> disclosure,</a:t>
+            </a:r>
+            <a:r>
+              <a:rPr lang="en-US" sz="1650" dirty="0" spc="-11" kern="0">
+                <a:solidFill>
+                  <a:srgbClr val="9A98A0"/>
+                </a:solidFill>
+                <a:latin typeface="Be Vietnam Pro" pitchFamily="34" charset="0"/>
+                <a:ea typeface="Be Vietnam Pro" pitchFamily="34" charset="-122"/>
+                <a:cs typeface="Be Vietnam Pro" pitchFamily="34" charset="-120"/>
+              </a:rPr>
+              <a:t> Unawareness,</a:t>
+            </a:r>
+            <a:r>
+              <a:rPr lang="en-US" sz="1650" dirty="0" spc="-2" kern="0">
+                <a:solidFill>
+                  <a:srgbClr val="9A98A0"/>
+                </a:solidFill>
+                <a:latin typeface="Be Vietnam Pro" pitchFamily="34" charset="0"/>
+                <a:ea typeface="Be Vietnam Pro" pitchFamily="34" charset="-122"/>
+                <a:cs typeface="Be Vietnam Pro" pitchFamily="34" charset="-120"/>
+              </a:rPr>
+              <a:t> Non-compliance</a:t>
             </a:r>
             <a:endParaRPr lang="en-US" sz="1650" dirty="0"/>
           </a:p>
@@ -5990,8 +6089,8 @@
         </p:nvSpPr>
         <p:spPr>
           <a:xfrm>
-            <a:off x="13601700" y="7067550"/>
-            <a:ext cx="3543300" cy="342900"/>
+            <a:off x="9448800" y="7219950"/>
+            <a:ext cx="7696200" cy="361950"/>
           </a:xfrm>
           <a:prstGeom prst="rect">
             <a:avLst/>
@@ -6010,6 +6109,17 @@
               <a:buNone/>
             </a:pPr>
             <a:r>
+              <a:rPr lang="en-US" sz="1650" dirty="0" spc="-4" kern="0">
+                <a:solidFill>
+                  <a:srgbClr val="D8D3C4"/>
+                </a:solidFill>
+                <a:latin typeface="Be Vietnam Pro" pitchFamily="34" charset="0"/>
+                <a:ea typeface="Be Vietnam Pro" pitchFamily="34" charset="-122"/>
+                <a:cs typeface="Be Vietnam Pro" pitchFamily="34" charset="-120"/>
+              </a:rPr>
+              <a:t>Mẹo</a:t>
+            </a:r>
+            <a:r>
               <a:rPr lang="en-US" sz="1650" dirty="0" spc="0" kern="0">
                 <a:solidFill>
                   <a:srgbClr val="D8D3C4"/>
@@ -6018,10 +6128,10 @@
                 <a:ea typeface="Be Vietnam Pro" pitchFamily="34" charset="-122"/>
                 <a:cs typeface="Be Vietnam Pro" pitchFamily="34" charset="-120"/>
               </a:rPr>
-              <a:t>phân</a:t>
-            </a:r>
-            <a:r>
-              <a:rPr lang="en-US" sz="1650" dirty="0" spc="3" kern="0">
+              <a:t> nhớ</a:t>
+            </a:r>
+            <a:r>
+              <a:rPr lang="en-US" sz="1650" dirty="0" spc="-6" kern="0">
                 <a:solidFill>
                   <a:srgbClr val="D8D3C4"/>
                 </a:solidFill>
@@ -6029,7 +6139,18 @@
                 <a:ea typeface="Be Vietnam Pro" pitchFamily="34" charset="-122"/>
                 <a:cs typeface="Be Vietnam Pro" pitchFamily="34" charset="-120"/>
               </a:rPr>
-              <a:t> tích</a:t>
+              <a:t> bảy</a:t>
+            </a:r>
+            <a:r>
+              <a:rPr lang="en-US" sz="1650" dirty="0" spc="-2" kern="0">
+                <a:solidFill>
+                  <a:srgbClr val="D8D3C4"/>
+                </a:solidFill>
+                <a:latin typeface="Be Vietnam Pro" pitchFamily="34" charset="0"/>
+                <a:ea typeface="Be Vietnam Pro" pitchFamily="34" charset="-122"/>
+                <a:cs typeface="Be Vietnam Pro" pitchFamily="34" charset="-120"/>
+              </a:rPr>
+              <a:t> loại</a:t>
             </a:r>
             <a:r>
               <a:rPr lang="en-US" sz="1650" dirty="0" spc="0" kern="0">
@@ -6076,6 +6197,17 @@
               <a:t> về</a:t>
             </a:r>
             <a:r>
+              <a:rPr lang="en-US" sz="1650" dirty="0" spc="-9" kern="0">
+                <a:solidFill>
+                  <a:srgbClr val="D8D3C4"/>
+                </a:solidFill>
+                <a:latin typeface="Be Vietnam Pro" pitchFamily="34" charset="0"/>
+                <a:ea typeface="Be Vietnam Pro" pitchFamily="34" charset="-122"/>
+                <a:cs typeface="Be Vietnam Pro" pitchFamily="34" charset="-120"/>
+              </a:rPr>
+              <a:t> quyền</a:t>
+            </a:r>
+            <a:r>
               <a:rPr lang="en-US" sz="1650" dirty="0" spc="5" kern="0">
                 <a:solidFill>
                   <a:srgbClr val="D8D3C4"/>
@@ -6087,7 +6219,7 @@
               <a:t> riêng</a:t>
             </a:r>
             <a:r>
-              <a:rPr lang="en-US" sz="1650" dirty="0" spc="4" kern="0">
+              <a:rPr lang="en-US" sz="1650" dirty="0" spc="2" kern="0">
                 <a:solidFill>
                   <a:srgbClr val="D8D3C4"/>
                 </a:solidFill>
@@ -6095,7 +6227,7 @@
                 <a:ea typeface="Be Vietnam Pro" pitchFamily="34" charset="-122"/>
                 <a:cs typeface="Be Vietnam Pro" pitchFamily="34" charset="-120"/>
               </a:rPr>
-              <a:t> tư</a:t>
+              <a:t> tư.</a:t>
             </a:r>
             <a:endParaRPr lang="en-US" sz="1650" dirty="0"/>
           </a:p>
@@ -6495,7 +6627,7 @@
       </p:sp>
       <p:sp>
         <p:nvSpPr>
-          <p:cNvPr id="54" name="Connector line-1792390665383-149108112"/>
+          <p:cNvPr id="54" name="Connector line-1792394885300-625791014"/>
           <p:cNvSpPr/>
           <p:nvPr/>
         </p:nvSpPr>

--- a/system-design-101/vi/lessons/sd-14-022/slides/sd-14-022.pptx
+++ b/system-design-101/vi/lessons/sd-14-022/slides/sd-14-022.pptx
@@ -3313,12 +3313,12 @@
         </p:nvSpPr>
         <p:spPr>
           <a:xfrm>
-            <a:off x="914400" y="1485900"/>
-            <a:ext cx="3171825" cy="2095500"/>
+            <a:off x="914400" y="1409700"/>
+            <a:ext cx="3171825" cy="2038350"/>
           </a:xfrm>
           <a:prstGeom prst="roundRect">
             <a:avLst>
-              <a:gd name="adj" fmla="val 10000"/>
+              <a:gd name="adj" fmla="val 10280"/>
             </a:avLst>
           </a:prstGeom>
           <a:solidFill>
@@ -3335,7 +3335,7 @@
         </p:nvSpPr>
         <p:spPr>
           <a:xfrm>
-            <a:off x="1104900" y="1638300"/>
+            <a:off x="1104900" y="1543050"/>
             <a:ext cx="2790825" cy="419100"/>
           </a:xfrm>
           <a:prstGeom prst="rect">
@@ -3374,7 +3374,7 @@
         </p:nvSpPr>
         <p:spPr>
           <a:xfrm>
-            <a:off x="1104900" y="2076450"/>
+            <a:off x="1104900" y="1943100"/>
             <a:ext cx="2790825" cy="800100"/>
           </a:xfrm>
           <a:prstGeom prst="rect">
@@ -3438,7 +3438,7 @@
         </p:nvSpPr>
         <p:spPr>
           <a:xfrm>
-            <a:off x="1104900" y="2933700"/>
+            <a:off x="1104900" y="2781300"/>
             <a:ext cx="2790825" cy="590550"/>
           </a:xfrm>
           <a:prstGeom prst="rect">
@@ -3524,12 +3524,12 @@
         </p:nvSpPr>
         <p:spPr>
           <a:xfrm>
-            <a:off x="4238625" y="1485900"/>
-            <a:ext cx="3171825" cy="2095500"/>
+            <a:off x="4238625" y="1409700"/>
+            <a:ext cx="3171825" cy="2038350"/>
           </a:xfrm>
           <a:prstGeom prst="roundRect">
             <a:avLst>
-              <a:gd name="adj" fmla="val 10000"/>
+              <a:gd name="adj" fmla="val 10280"/>
             </a:avLst>
           </a:prstGeom>
           <a:solidFill>
@@ -3546,7 +3546,7 @@
         </p:nvSpPr>
         <p:spPr>
           <a:xfrm>
-            <a:off x="4429125" y="1638300"/>
+            <a:off x="4429125" y="1543050"/>
             <a:ext cx="2790825" cy="419100"/>
           </a:xfrm>
           <a:prstGeom prst="rect">
@@ -3585,7 +3585,7 @@
         </p:nvSpPr>
         <p:spPr>
           <a:xfrm>
-            <a:off x="4429125" y="2076450"/>
+            <a:off x="4429125" y="1943100"/>
             <a:ext cx="2790825" cy="800100"/>
           </a:xfrm>
           <a:prstGeom prst="rect">
@@ -3649,7 +3649,7 @@
         </p:nvSpPr>
         <p:spPr>
           <a:xfrm>
-            <a:off x="4429125" y="2933700"/>
+            <a:off x="4429125" y="2781300"/>
             <a:ext cx="2790825" cy="590550"/>
           </a:xfrm>
           <a:prstGeom prst="rect">
@@ -3757,12 +3757,12 @@
         </p:nvSpPr>
         <p:spPr>
           <a:xfrm>
-            <a:off x="7562850" y="1485900"/>
-            <a:ext cx="3171825" cy="2095500"/>
+            <a:off x="7562850" y="1409700"/>
+            <a:ext cx="3171825" cy="2038350"/>
           </a:xfrm>
           <a:prstGeom prst="roundRect">
             <a:avLst>
-              <a:gd name="adj" fmla="val 10000"/>
+              <a:gd name="adj" fmla="val 10280"/>
             </a:avLst>
           </a:prstGeom>
           <a:solidFill>
@@ -3779,7 +3779,7 @@
         </p:nvSpPr>
         <p:spPr>
           <a:xfrm>
-            <a:off x="7753350" y="1638300"/>
+            <a:off x="7753350" y="1543050"/>
             <a:ext cx="2790825" cy="419100"/>
           </a:xfrm>
           <a:prstGeom prst="rect">
@@ -3818,7 +3818,7 @@
         </p:nvSpPr>
         <p:spPr>
           <a:xfrm>
-            <a:off x="7753350" y="2076450"/>
+            <a:off x="7753350" y="1943100"/>
             <a:ext cx="2790825" cy="800100"/>
           </a:xfrm>
           <a:prstGeom prst="rect">
@@ -3893,7 +3893,7 @@
         </p:nvSpPr>
         <p:spPr>
           <a:xfrm>
-            <a:off x="7753350" y="2933700"/>
+            <a:off x="7753350" y="2781300"/>
             <a:ext cx="2790825" cy="590550"/>
           </a:xfrm>
           <a:prstGeom prst="rect">
@@ -4001,12 +4001,12 @@
         </p:nvSpPr>
         <p:spPr>
           <a:xfrm>
-            <a:off x="10887075" y="1485900"/>
-            <a:ext cx="3171825" cy="2095500"/>
+            <a:off x="10887075" y="1409700"/>
+            <a:ext cx="3171825" cy="2038350"/>
           </a:xfrm>
           <a:prstGeom prst="roundRect">
             <a:avLst>
-              <a:gd name="adj" fmla="val 10000"/>
+              <a:gd name="adj" fmla="val 10280"/>
             </a:avLst>
           </a:prstGeom>
           <a:solidFill>
@@ -4023,7 +4023,7 @@
         </p:nvSpPr>
         <p:spPr>
           <a:xfrm>
-            <a:off x="11077575" y="1638300"/>
+            <a:off x="11077575" y="1543050"/>
             <a:ext cx="2790825" cy="419100"/>
           </a:xfrm>
           <a:prstGeom prst="rect">
@@ -4062,7 +4062,7 @@
         </p:nvSpPr>
         <p:spPr>
           <a:xfrm>
-            <a:off x="11077575" y="2076450"/>
+            <a:off x="11077575" y="1943100"/>
             <a:ext cx="2790825" cy="800100"/>
           </a:xfrm>
           <a:prstGeom prst="rect">
@@ -4126,7 +4126,7 @@
         </p:nvSpPr>
         <p:spPr>
           <a:xfrm>
-            <a:off x="11077575" y="2933700"/>
+            <a:off x="11077575" y="2781300"/>
             <a:ext cx="2790825" cy="590550"/>
           </a:xfrm>
           <a:prstGeom prst="rect">
@@ -4201,12 +4201,12 @@
         </p:nvSpPr>
         <p:spPr>
           <a:xfrm>
-            <a:off x="14211300" y="1485900"/>
-            <a:ext cx="3162300" cy="2095500"/>
+            <a:off x="14211300" y="1409700"/>
+            <a:ext cx="3162300" cy="2038350"/>
           </a:xfrm>
           <a:prstGeom prst="roundRect">
             <a:avLst>
-              <a:gd name="adj" fmla="val 10000"/>
+              <a:gd name="adj" fmla="val 10280"/>
             </a:avLst>
           </a:prstGeom>
           <a:solidFill>
@@ -4223,7 +4223,7 @@
         </p:nvSpPr>
         <p:spPr>
           <a:xfrm>
-            <a:off x="14401800" y="1638300"/>
+            <a:off x="14401800" y="1543050"/>
             <a:ext cx="2781300" cy="419100"/>
           </a:xfrm>
           <a:prstGeom prst="rect">
@@ -4262,7 +4262,7 @@
         </p:nvSpPr>
         <p:spPr>
           <a:xfrm>
-            <a:off x="14401800" y="2076450"/>
+            <a:off x="14401800" y="1943100"/>
             <a:ext cx="2781300" cy="800100"/>
           </a:xfrm>
           <a:prstGeom prst="rect">
@@ -4304,7 +4304,7 @@
         </p:nvSpPr>
         <p:spPr>
           <a:xfrm>
-            <a:off x="14401800" y="2933700"/>
+            <a:off x="14401800" y="2781300"/>
             <a:ext cx="2781300" cy="590550"/>
           </a:xfrm>
           <a:prstGeom prst="rect">
@@ -4412,12 +4412,12 @@
         </p:nvSpPr>
         <p:spPr>
           <a:xfrm>
-            <a:off x="914400" y="3733800"/>
-            <a:ext cx="3171825" cy="2095500"/>
+            <a:off x="914400" y="3600450"/>
+            <a:ext cx="3171825" cy="2038350"/>
           </a:xfrm>
           <a:prstGeom prst="roundRect">
             <a:avLst>
-              <a:gd name="adj" fmla="val 10000"/>
+              <a:gd name="adj" fmla="val 10280"/>
             </a:avLst>
           </a:prstGeom>
           <a:solidFill>
@@ -4434,7 +4434,7 @@
         </p:nvSpPr>
         <p:spPr>
           <a:xfrm>
-            <a:off x="1104900" y="3886200"/>
+            <a:off x="1104900" y="3733800"/>
             <a:ext cx="2790825" cy="419100"/>
           </a:xfrm>
           <a:prstGeom prst="rect">
@@ -4473,7 +4473,7 @@
         </p:nvSpPr>
         <p:spPr>
           <a:xfrm>
-            <a:off x="1104900" y="4324350"/>
+            <a:off x="1104900" y="4133850"/>
             <a:ext cx="2790825" cy="800100"/>
           </a:xfrm>
           <a:prstGeom prst="rect">
@@ -4526,7 +4526,7 @@
         </p:nvSpPr>
         <p:spPr>
           <a:xfrm>
-            <a:off x="1104900" y="5181600"/>
+            <a:off x="1104900" y="4972050"/>
             <a:ext cx="2790825" cy="590550"/>
           </a:xfrm>
           <a:prstGeom prst="rect">
@@ -4645,12 +4645,12 @@
         </p:nvSpPr>
         <p:spPr>
           <a:xfrm>
-            <a:off x="4238625" y="3733800"/>
-            <a:ext cx="3171825" cy="2095500"/>
+            <a:off x="4238625" y="3600450"/>
+            <a:ext cx="3171825" cy="2038350"/>
           </a:xfrm>
           <a:prstGeom prst="roundRect">
             <a:avLst>
-              <a:gd name="adj" fmla="val 10000"/>
+              <a:gd name="adj" fmla="val 10280"/>
             </a:avLst>
           </a:prstGeom>
           <a:solidFill>
@@ -4667,7 +4667,7 @@
         </p:nvSpPr>
         <p:spPr>
           <a:xfrm>
-            <a:off x="4429125" y="3886200"/>
+            <a:off x="4429125" y="3733800"/>
             <a:ext cx="2790825" cy="419100"/>
           </a:xfrm>
           <a:prstGeom prst="rect">
@@ -4706,7 +4706,7 @@
         </p:nvSpPr>
         <p:spPr>
           <a:xfrm>
-            <a:off x="4429125" y="4324350"/>
+            <a:off x="4429125" y="4133850"/>
             <a:ext cx="2790825" cy="800100"/>
           </a:xfrm>
           <a:prstGeom prst="rect">
@@ -4770,7 +4770,7 @@
         </p:nvSpPr>
         <p:spPr>
           <a:xfrm>
-            <a:off x="4429125" y="5181600"/>
+            <a:off x="4429125" y="4972050"/>
             <a:ext cx="2790825" cy="590550"/>
           </a:xfrm>
           <a:prstGeom prst="rect">
@@ -4867,12 +4867,12 @@
         </p:nvSpPr>
         <p:spPr>
           <a:xfrm>
-            <a:off x="7562850" y="3733800"/>
-            <a:ext cx="3171825" cy="2095500"/>
+            <a:off x="7562850" y="3600450"/>
+            <a:ext cx="3171825" cy="2038350"/>
           </a:xfrm>
           <a:prstGeom prst="roundRect">
             <a:avLst>
-              <a:gd name="adj" fmla="val 10000"/>
+              <a:gd name="adj" fmla="val 10280"/>
             </a:avLst>
           </a:prstGeom>
           <a:solidFill>
@@ -4889,7 +4889,7 @@
         </p:nvSpPr>
         <p:spPr>
           <a:xfrm>
-            <a:off x="7753350" y="3886200"/>
+            <a:off x="7753350" y="3733800"/>
             <a:ext cx="2790825" cy="419100"/>
           </a:xfrm>
           <a:prstGeom prst="rect">
@@ -4928,7 +4928,7 @@
         </p:nvSpPr>
         <p:spPr>
           <a:xfrm>
-            <a:off x="7753350" y="4324350"/>
+            <a:off x="7753350" y="4133850"/>
             <a:ext cx="2790825" cy="800100"/>
           </a:xfrm>
           <a:prstGeom prst="rect">
@@ -5014,7 +5014,7 @@
         </p:nvSpPr>
         <p:spPr>
           <a:xfrm>
-            <a:off x="7753350" y="5181600"/>
+            <a:off x="7753350" y="4972050"/>
             <a:ext cx="2790825" cy="590550"/>
           </a:xfrm>
           <a:prstGeom prst="rect">
@@ -5111,12 +5111,12 @@
         </p:nvSpPr>
         <p:spPr>
           <a:xfrm>
-            <a:off x="10887075" y="3733800"/>
-            <a:ext cx="3171825" cy="2095500"/>
+            <a:off x="10887075" y="3600450"/>
+            <a:ext cx="3171825" cy="2038350"/>
           </a:xfrm>
           <a:prstGeom prst="roundRect">
             <a:avLst>
-              <a:gd name="adj" fmla="val 10000"/>
+              <a:gd name="adj" fmla="val 10280"/>
             </a:avLst>
           </a:prstGeom>
           <a:solidFill>
@@ -5133,7 +5133,7 @@
         </p:nvSpPr>
         <p:spPr>
           <a:xfrm>
-            <a:off x="11077575" y="3886200"/>
+            <a:off x="11077575" y="3733800"/>
             <a:ext cx="2790825" cy="419100"/>
           </a:xfrm>
           <a:prstGeom prst="rect">
@@ -5172,7 +5172,7 @@
         </p:nvSpPr>
         <p:spPr>
           <a:xfrm>
-            <a:off x="11077575" y="4324350"/>
+            <a:off x="11077575" y="4133850"/>
             <a:ext cx="2790825" cy="800100"/>
           </a:xfrm>
           <a:prstGeom prst="rect">
@@ -5247,7 +5247,7 @@
         </p:nvSpPr>
         <p:spPr>
           <a:xfrm>
-            <a:off x="11077575" y="5181600"/>
+            <a:off x="11077575" y="4972050"/>
             <a:ext cx="2790825" cy="590550"/>
           </a:xfrm>
           <a:prstGeom prst="rect">
@@ -5355,12 +5355,12 @@
         </p:nvSpPr>
         <p:spPr>
           <a:xfrm>
-            <a:off x="14211300" y="3733800"/>
-            <a:ext cx="3162300" cy="2095500"/>
+            <a:off x="14211300" y="3600450"/>
+            <a:ext cx="3162300" cy="2038350"/>
           </a:xfrm>
           <a:prstGeom prst="roundRect">
             <a:avLst>
-              <a:gd name="adj" fmla="val 10000"/>
+              <a:gd name="adj" fmla="val 10280"/>
             </a:avLst>
           </a:prstGeom>
           <a:solidFill>
@@ -5377,7 +5377,7 @@
         </p:nvSpPr>
         <p:spPr>
           <a:xfrm>
-            <a:off x="14401800" y="3886200"/>
+            <a:off x="14401800" y="3733800"/>
             <a:ext cx="2781300" cy="419100"/>
           </a:xfrm>
           <a:prstGeom prst="rect">
@@ -5416,7 +5416,7 @@
         </p:nvSpPr>
         <p:spPr>
           <a:xfrm>
-            <a:off x="14401800" y="4324350"/>
+            <a:off x="14401800" y="4133850"/>
             <a:ext cx="2781300" cy="800100"/>
           </a:xfrm>
           <a:prstGeom prst="rect">
@@ -5480,7 +5480,7 @@
         </p:nvSpPr>
         <p:spPr>
           <a:xfrm>
-            <a:off x="14401800" y="5181600"/>
+            <a:off x="14401800" y="4972050"/>
             <a:ext cx="2781300" cy="590550"/>
           </a:xfrm>
           <a:prstGeom prst="rect">
@@ -5577,12 +5577,12 @@
         </p:nvSpPr>
         <p:spPr>
           <a:xfrm>
-            <a:off x="914400" y="5981700"/>
-            <a:ext cx="8153400" cy="1657350"/>
+            <a:off x="5067300" y="5791200"/>
+            <a:ext cx="6076950" cy="1752600"/>
           </a:xfrm>
           <a:prstGeom prst="roundRect">
             <a:avLst>
-              <a:gd name="adj" fmla="val 12644"/>
+              <a:gd name="adj" fmla="val 11957"/>
             </a:avLst>
           </a:prstGeom>
           <a:solidFill>
@@ -5599,8 +5599,8 @@
         </p:nvSpPr>
         <p:spPr>
           <a:xfrm>
-            <a:off x="1143000" y="6134100"/>
-            <a:ext cx="7696200" cy="419100"/>
+            <a:off x="5295900" y="5943600"/>
+            <a:ext cx="5619750" cy="419100"/>
           </a:xfrm>
           <a:prstGeom prst="rect">
             <a:avLst/>
@@ -5638,8 +5638,8 @@
         </p:nvSpPr>
         <p:spPr>
           <a:xfrm>
-            <a:off x="1143000" y="6591300"/>
-            <a:ext cx="7696200" cy="571500"/>
+            <a:off x="5295900" y="6381750"/>
+            <a:ext cx="5619750" cy="571500"/>
           </a:xfrm>
           <a:prstGeom prst="rect">
             <a:avLst/>
@@ -5768,8 +5768,8 @@
         </p:nvSpPr>
         <p:spPr>
           <a:xfrm>
-            <a:off x="1143000" y="7219950"/>
-            <a:ext cx="7696200" cy="361950"/>
+            <a:off x="5295900" y="7048500"/>
+            <a:ext cx="5619750" cy="361950"/>
           </a:xfrm>
           <a:prstGeom prst="rect">
             <a:avLst/>
@@ -5909,12 +5909,12 @@
         </p:nvSpPr>
         <p:spPr>
           <a:xfrm>
-            <a:off x="9220200" y="5981700"/>
-            <a:ext cx="8153400" cy="1657350"/>
+            <a:off x="11296650" y="5791200"/>
+            <a:ext cx="6076950" cy="1752600"/>
           </a:xfrm>
           <a:prstGeom prst="roundRect">
             <a:avLst>
-              <a:gd name="adj" fmla="val 12644"/>
+              <a:gd name="adj" fmla="val 11957"/>
             </a:avLst>
           </a:prstGeom>
           <a:solidFill>
@@ -5931,8 +5931,8 @@
         </p:nvSpPr>
         <p:spPr>
           <a:xfrm>
-            <a:off x="9448800" y="6134100"/>
-            <a:ext cx="7696200" cy="419100"/>
+            <a:off x="11525250" y="5943600"/>
+            <a:ext cx="5619750" cy="419100"/>
           </a:xfrm>
           <a:prstGeom prst="rect">
             <a:avLst/>
@@ -5970,8 +5970,8 @@
         </p:nvSpPr>
         <p:spPr>
           <a:xfrm>
-            <a:off x="9448800" y="6591300"/>
-            <a:ext cx="7696200" cy="571500"/>
+            <a:off x="11525250" y="6381750"/>
+            <a:ext cx="5619750" cy="571500"/>
           </a:xfrm>
           <a:prstGeom prst="rect">
             <a:avLst/>
@@ -6089,8 +6089,8 @@
         </p:nvSpPr>
         <p:spPr>
           <a:xfrm>
-            <a:off x="9448800" y="7219950"/>
-            <a:ext cx="7696200" cy="361950"/>
+            <a:off x="11525250" y="7048500"/>
+            <a:ext cx="5619750" cy="361950"/>
           </a:xfrm>
           <a:prstGeom prst="rect">
             <a:avLst/>
@@ -6965,6 +6965,283 @@
         </p:nvSpPr>
         <p:spPr>
           <a:xfrm>
+            <a:off x="914400" y="5791200"/>
+            <a:ext cx="4000500" cy="1752600"/>
+          </a:xfrm>
+          <a:prstGeom prst="roundRect">
+            <a:avLst>
+              <a:gd name="adj" fmla="val 11957"/>
+            </a:avLst>
+          </a:prstGeom>
+          <a:solidFill>
+            <a:srgbClr val="1E212B"/>
+          </a:solidFill>
+          <a:ln/>
+        </p:spPr>
+      </p:sp>
+      <p:sp>
+        <p:nvSpPr>
+          <p:cNvPr id="67" name="Text 65"/>
+          <p:cNvSpPr/>
+          <p:nvPr/>
+        </p:nvSpPr>
+        <p:spPr>
+          <a:xfrm>
+            <a:off x="1143000" y="5943600"/>
+            <a:ext cx="3543300" cy="419100"/>
+          </a:xfrm>
+          <a:prstGeom prst="rect">
+            <a:avLst/>
+          </a:prstGeom>
+          <a:noFill/>
+          <a:ln/>
+        </p:spPr>
+        <p:txBody>
+          <a:bodyPr wrap="square" lIns="0" tIns="0" rIns="0" bIns="0" rtlCol="0" anchor="t"/>
+          <a:lstStyle/>
+          <a:p>
+            <a:pPr algn="l" indent="0" marL="0">
+              <a:buNone/>
+            </a:pPr>
+            <a:r>
+              <a:rPr lang="en-US" sz="2400" dirty="0" spc="2" kern="0">
+                <a:solidFill>
+                  <a:srgbClr val="3DD6A0"/>
+                </a:solidFill>
+                <a:latin typeface="Bricolage Grotesque ExtraBold" pitchFamily="34" charset="0"/>
+                <a:ea typeface="Bricolage Grotesque ExtraBold" pitchFamily="34" charset="-122"/>
+                <a:cs typeface="Bricolage Grotesque ExtraBold" pitchFamily="34" charset="-120"/>
+              </a:rPr>
+              <a:t>DoS</a:t>
+            </a:r>
+            <a:endParaRPr lang="en-US" sz="2400" dirty="0"/>
+          </a:p>
+        </p:txBody>
+      </p:sp>
+      <p:sp>
+        <p:nvSpPr>
+          <p:cNvPr id="68" name="Text 66"/>
+          <p:cNvSpPr/>
+          <p:nvPr/>
+        </p:nvSpPr>
+        <p:spPr>
+          <a:xfrm>
+            <a:off x="1143000" y="6381750"/>
+            <a:ext cx="3543300" cy="285750"/>
+          </a:xfrm>
+          <a:prstGeom prst="rect">
+            <a:avLst/>
+          </a:prstGeom>
+          <a:noFill/>
+          <a:ln/>
+        </p:spPr>
+        <p:txBody>
+          <a:bodyPr wrap="square" lIns="0" tIns="11509" rIns="0" bIns="-11509" rtlCol="0" anchor="t"/>
+          <a:lstStyle/>
+          <a:p>
+            <a:pPr algn="l" indent="0" marL="0">
+              <a:lnSpc>
+                <a:spcPts val="2063"/>
+              </a:lnSpc>
+              <a:buNone/>
+            </a:pPr>
+            <a:r>
+              <a:rPr lang="en-US" sz="1650" dirty="0" spc="-2" kern="0">
+                <a:solidFill>
+                  <a:srgbClr val="9A98A0"/>
+                </a:solidFill>
+                <a:latin typeface="Be Vietnam Pro" pitchFamily="34" charset="0"/>
+                <a:ea typeface="Be Vietnam Pro" pitchFamily="34" charset="-122"/>
+                <a:cs typeface="Be Vietnam Pro" pitchFamily="34" charset="-120"/>
+              </a:rPr>
+              <a:t>Denial</a:t>
+            </a:r>
+            <a:r>
+              <a:rPr lang="en-US" sz="1650" dirty="0" spc="0" kern="0">
+                <a:solidFill>
+                  <a:srgbClr val="9A98A0"/>
+                </a:solidFill>
+                <a:latin typeface="Be Vietnam Pro" pitchFamily="34" charset="0"/>
+                <a:ea typeface="Be Vietnam Pro" pitchFamily="34" charset="-122"/>
+                <a:cs typeface="Be Vietnam Pro" pitchFamily="34" charset="-120"/>
+              </a:rPr>
+              <a:t> of Service</a:t>
+            </a:r>
+            <a:endParaRPr lang="en-US" sz="1650" dirty="0"/>
+          </a:p>
+        </p:txBody>
+      </p:sp>
+      <p:sp>
+        <p:nvSpPr>
+          <p:cNvPr id="69" name="Text 67"/>
+          <p:cNvSpPr/>
+          <p:nvPr/>
+        </p:nvSpPr>
+        <p:spPr>
+          <a:xfrm>
+            <a:off x="1143000" y="6743700"/>
+            <a:ext cx="3543300" cy="590550"/>
+          </a:xfrm>
+          <a:prstGeom prst="rect">
+            <a:avLst/>
+          </a:prstGeom>
+          <a:noFill/>
+          <a:ln/>
+        </p:spPr>
+        <p:txBody>
+          <a:bodyPr wrap="square" lIns="0" tIns="8906" rIns="0" bIns="-8906" rtlCol="0" anchor="t"/>
+          <a:lstStyle/>
+          <a:p>
+            <a:pPr algn="l" indent="0" marL="0">
+              <a:lnSpc>
+                <a:spcPts val="2145"/>
+              </a:lnSpc>
+              <a:buNone/>
+            </a:pPr>
+            <a:r>
+              <a:rPr lang="en-US" sz="1650" dirty="0" spc="-20" kern="0">
+                <a:solidFill>
+                  <a:srgbClr val="D8D3C4"/>
+                </a:solidFill>
+                <a:latin typeface="Be Vietnam Pro" pitchFamily="34" charset="0"/>
+                <a:ea typeface="Be Vietnam Pro" pitchFamily="34" charset="-122"/>
+                <a:cs typeface="Be Vietnam Pro" pitchFamily="34" charset="-120"/>
+              </a:rPr>
+              <a:t>Làm</a:t>
+            </a:r>
+            <a:r>
+              <a:rPr lang="en-US" sz="1650" dirty="0" spc="0" kern="0">
+                <a:solidFill>
+                  <a:srgbClr val="D8D3C4"/>
+                </a:solidFill>
+                <a:latin typeface="Be Vietnam Pro" pitchFamily="34" charset="0"/>
+                <a:ea typeface="Be Vietnam Pro" pitchFamily="34" charset="-122"/>
+                <a:cs typeface="Be Vietnam Pro" pitchFamily="34" charset="-120"/>
+              </a:rPr>
+              <a:t> cạn</a:t>
+            </a:r>
+            <a:r>
+              <a:rPr lang="en-US" sz="1650" dirty="0" spc="-5" kern="0">
+                <a:solidFill>
+                  <a:srgbClr val="D8D3C4"/>
+                </a:solidFill>
+                <a:latin typeface="Be Vietnam Pro" pitchFamily="34" charset="0"/>
+                <a:ea typeface="Be Vietnam Pro" pitchFamily="34" charset="-122"/>
+                <a:cs typeface="Be Vietnam Pro" pitchFamily="34" charset="-120"/>
+              </a:rPr>
+              <a:t> tài</a:t>
+            </a:r>
+            <a:r>
+              <a:rPr lang="en-US" sz="1650" dirty="0" spc="-9" kern="0">
+                <a:solidFill>
+                  <a:srgbClr val="D8D3C4"/>
+                </a:solidFill>
+                <a:latin typeface="Be Vietnam Pro" pitchFamily="34" charset="0"/>
+                <a:ea typeface="Be Vietnam Pro" pitchFamily="34" charset="-122"/>
+                <a:cs typeface="Be Vietnam Pro" pitchFamily="34" charset="-120"/>
+              </a:rPr>
+              <a:t> nguyên</a:t>
+            </a:r>
+            <a:r>
+              <a:rPr lang="en-US" sz="1650" dirty="0" spc="-5" kern="0">
+                <a:solidFill>
+                  <a:srgbClr val="D8D3C4"/>
+                </a:solidFill>
+                <a:latin typeface="Be Vietnam Pro" pitchFamily="34" charset="0"/>
+                <a:ea typeface="Be Vietnam Pro" pitchFamily="34" charset="-122"/>
+                <a:cs typeface="Be Vietnam Pro" pitchFamily="34" charset="-120"/>
+              </a:rPr>
+              <a:t> máy</a:t>
+            </a:r>
+            <a:r>
+              <a:rPr lang="en-US" sz="1650" dirty="0" spc="0" kern="0">
+                <a:solidFill>
+                  <a:srgbClr val="D8D3C4"/>
+                </a:solidFill>
+                <a:latin typeface="Be Vietnam Pro" pitchFamily="34" charset="0"/>
+                <a:ea typeface="Be Vietnam Pro" pitchFamily="34" charset="-122"/>
+                <a:cs typeface="Be Vietnam Pro" pitchFamily="34" charset="-120"/>
+              </a:rPr>
+              <a:t> chủ,</a:t>
+            </a:r>
+            <a:r>
+              <a:rPr lang="en-US" sz="1650" dirty="0" spc="4" kern="0">
+                <a:solidFill>
+                  <a:srgbClr val="D8D3C4"/>
+                </a:solidFill>
+                <a:latin typeface="Be Vietnam Pro" pitchFamily="34" charset="0"/>
+                <a:ea typeface="Be Vietnam Pro" pitchFamily="34" charset="-122"/>
+                <a:cs typeface="Be Vietnam Pro" pitchFamily="34" charset="-120"/>
+              </a:rPr>
+              <a:t> người</a:t>
+            </a:r>
+            <a:r>
+              <a:rPr lang="en-US" sz="1650" dirty="0" spc="0" kern="0">
+                <a:solidFill>
+                  <a:srgbClr val="D8D3C4"/>
+                </a:solidFill>
+                <a:latin typeface="Be Vietnam Pro" pitchFamily="34" charset="0"/>
+                <a:ea typeface="Be Vietnam Pro" pitchFamily="34" charset="-122"/>
+                <a:cs typeface="Be Vietnam Pro" pitchFamily="34" charset="-120"/>
+              </a:rPr>
+              <a:t> dùng</a:t>
+            </a:r>
+            <a:r>
+              <a:rPr lang="en-US" sz="1650" dirty="0" spc="-3" kern="0">
+                <a:solidFill>
+                  <a:srgbClr val="D8D3C4"/>
+                </a:solidFill>
+                <a:latin typeface="Be Vietnam Pro" pitchFamily="34" charset="0"/>
+                <a:ea typeface="Be Vietnam Pro" pitchFamily="34" charset="-122"/>
+                <a:cs typeface="Be Vietnam Pro" pitchFamily="34" charset="-120"/>
+              </a:rPr>
+              <a:t> thật</a:t>
+            </a:r>
+            <a:r>
+              <a:rPr lang="en-US" sz="1650" dirty="0" spc="0" kern="0">
+                <a:solidFill>
+                  <a:srgbClr val="D8D3C4"/>
+                </a:solidFill>
+                <a:latin typeface="Be Vietnam Pro" pitchFamily="34" charset="0"/>
+                <a:ea typeface="Be Vietnam Pro" pitchFamily="34" charset="-122"/>
+                <a:cs typeface="Be Vietnam Pro" pitchFamily="34" charset="-120"/>
+              </a:rPr>
+              <a:t> không</a:t>
+            </a:r>
+            <a:r>
+              <a:rPr lang="en-US" sz="1650" dirty="0" spc="-7" kern="0">
+                <a:solidFill>
+                  <a:srgbClr val="D8D3C4"/>
+                </a:solidFill>
+                <a:latin typeface="Be Vietnam Pro" pitchFamily="34" charset="0"/>
+                <a:ea typeface="Be Vietnam Pro" pitchFamily="34" charset="-122"/>
+                <a:cs typeface="Be Vietnam Pro" pitchFamily="34" charset="-120"/>
+              </a:rPr>
+              <a:t> vào</a:t>
+            </a:r>
+            <a:r>
+              <a:rPr lang="en-US" sz="1650" dirty="0" spc="5" kern="0">
+                <a:solidFill>
+                  <a:srgbClr val="D8D3C4"/>
+                </a:solidFill>
+                <a:latin typeface="Be Vietnam Pro" pitchFamily="34" charset="0"/>
+                <a:ea typeface="Be Vietnam Pro" pitchFamily="34" charset="-122"/>
+                <a:cs typeface="Be Vietnam Pro" pitchFamily="34" charset="-120"/>
+              </a:rPr>
+              <a:t> được.</a:t>
+            </a:r>
+            <a:endParaRPr lang="en-US" sz="1650" dirty="0"/>
+          </a:p>
+        </p:txBody>
+      </p:sp>
+      <p:sp>
+        <p:nvSpPr>
+          <p:cNvPr id="70" name="Shape 68"/>
+          <p:cNvSpPr/>
+          <p:nvPr/>
+        </p:nvSpPr>
+        <p:spPr>
+          <a:xfrm>
             <a:off x="15983712" y="9076331"/>
             <a:ext cx="1645920" cy="552301"/>
           </a:xfrm>
@@ -6983,7 +7260,7 @@
       </p:sp>
       <p:pic>
         <p:nvPicPr>
-          <p:cNvPr id="67" name="Moda image moda-export-watermark-9797e441-c75f-46c8-b5dc-4a89357124c9" descr="">    </p:cNvPr>
+          <p:cNvPr id="71" name="Moda image moda-export-watermark-9797e441-c75f-46c8-b5dc-4a89357124c9" descr="">    </p:cNvPr>
           <p:cNvPicPr>
             <a:picLocks noChangeAspect="1"/>
           </p:cNvPicPr>
